--- a/output/wordlabs-reflect-3day.pptx
+++ b/output/wordlabs-reflect-3day.pptx
@@ -6057,7 +6057,7 @@
                 <a:ea typeface="Calibri" pitchFamily="34" charset="-122"/>
                 <a:cs typeface="Calibri" pitchFamily="34" charset="-120"/>
               </a:rPr>
-              <a:t>reflection</a:t>
+              <a:t>reflective</a:t>
             </a:r>
             <a:pPr algn="l" indent="0" marL="0">
               <a:buNone/>
@@ -6071,7 +6071,7 @@
                 <a:ea typeface="Calibri" pitchFamily="34" charset="-122"/>
                 <a:cs typeface="Calibri" pitchFamily="34" charset="-120"/>
               </a:rPr>
-              <a:t> in the puddle was clear and still, showing how </a:t>
+              <a:t> jacket helped the cyclist stay safe, and the </a:t>
             </a:r>
             <a:pPr algn="l" indent="0" marL="0">
               <a:buNone/>
@@ -6088,7 +6088,7 @@
                 <a:ea typeface="Calibri" pitchFamily="34" charset="-122"/>
                 <a:cs typeface="Calibri" pitchFamily="34" charset="-120"/>
               </a:rPr>
-              <a:t>reflective</a:t>
+              <a:t>reflection</a:t>
             </a:r>
             <a:pPr algn="l" indent="0" marL="0">
               <a:buNone/>
@@ -6102,7 +6102,7 @@
                 <a:ea typeface="Calibri" pitchFamily="34" charset="-122"/>
                 <a:cs typeface="Calibri" pitchFamily="34" charset="-120"/>
               </a:rPr>
-              <a:t> the water's surface had become.</a:t>
+              <a:t> of car lights made it shine brightly.</a:t>
             </a:r>
             <a:endParaRPr lang="en-US" sz="1800" dirty="0"/>
           </a:p>
@@ -6257,7 +6257,7 @@
                 <a:ea typeface="Trebuchet MS" pitchFamily="34" charset="-122"/>
                 <a:cs typeface="Trebuchet MS" pitchFamily="34" charset="-120"/>
               </a:rPr>
-              <a:t>reflection</a:t>
+              <a:t>reflective</a:t>
             </a:r>
             <a:endParaRPr lang="en-US" sz="1400" dirty="0"/>
           </a:p>
@@ -6385,7 +6385,7 @@
                 <a:ea typeface="Trebuchet MS" pitchFamily="34" charset="-122"/>
                 <a:cs typeface="Trebuchet MS" pitchFamily="34" charset="-120"/>
               </a:rPr>
-              <a:t>reflective</a:t>
+              <a:t>reflection</a:t>
             </a:r>
             <a:endParaRPr lang="en-US" sz="1400" dirty="0"/>
           </a:p>
@@ -6855,7 +6855,7 @@
                 <a:ea typeface="Trebuchet MS" pitchFamily="34" charset="-122"/>
                 <a:cs typeface="Trebuchet MS" pitchFamily="34" charset="-120"/>
               </a:rPr>
-              <a:t>reflection</a:t>
+              <a:t>reflective</a:t>
             </a:r>
             <a:endParaRPr lang="en-US" sz="2800" dirty="0"/>
           </a:p>
@@ -7682,7 +7682,7 @@
                 <a:ea typeface="Trebuchet MS" pitchFamily="34" charset="-122"/>
                 <a:cs typeface="Trebuchet MS" pitchFamily="34" charset="-120"/>
               </a:rPr>
-              <a:t>reflection</a:t>
+              <a:t>reflective</a:t>
             </a:r>
             <a:endParaRPr lang="en-US" sz="2800" dirty="0"/>
           </a:p>
@@ -7972,7 +7972,7 @@
                 <a:ea typeface="Calibri" pitchFamily="34" charset="-122"/>
                 <a:cs typeface="Calibri" pitchFamily="34" charset="-120"/>
               </a:rPr>
-              <a:t>bend or throw back</a:t>
+              <a:t>bend or throw</a:t>
             </a:r>
             <a:endParaRPr lang="en-US" sz="850" dirty="0"/>
           </a:p>
@@ -8045,7 +8045,7 @@
                 <a:ea typeface="Trebuchet MS" pitchFamily="34" charset="-122"/>
                 <a:cs typeface="Trebuchet MS" pitchFamily="34" charset="-120"/>
               </a:rPr>
-              <a:t>ion</a:t>
+              <a:t>ive</a:t>
             </a:r>
             <a:endParaRPr lang="en-US" sz="1300" dirty="0"/>
           </a:p>
@@ -8084,7 +8084,7 @@
                 <a:ea typeface="Calibri" pitchFamily="34" charset="-122"/>
                 <a:cs typeface="Calibri" pitchFamily="34" charset="-120"/>
               </a:rPr>
-              <a:t>act or result of</a:t>
+              <a:t>having the quality of</a:t>
             </a:r>
             <a:endParaRPr lang="en-US" sz="850" dirty="0"/>
           </a:p>
@@ -8779,7 +8779,7 @@
                 <a:ea typeface="Trebuchet MS" pitchFamily="34" charset="-122"/>
                 <a:cs typeface="Trebuchet MS" pitchFamily="34" charset="-120"/>
               </a:rPr>
-              <a:t>reflection</a:t>
+              <a:t>reflective</a:t>
             </a:r>
             <a:endParaRPr lang="en-US" sz="2800" dirty="0"/>
           </a:p>
@@ -9069,7 +9069,7 @@
                 <a:ea typeface="Calibri" pitchFamily="34" charset="-122"/>
                 <a:cs typeface="Calibri" pitchFamily="34" charset="-120"/>
               </a:rPr>
-              <a:t>bend or throw back</a:t>
+              <a:t>bend or throw</a:t>
             </a:r>
             <a:endParaRPr lang="en-US" sz="850" dirty="0"/>
           </a:p>
@@ -9142,7 +9142,7 @@
                 <a:ea typeface="Trebuchet MS" pitchFamily="34" charset="-122"/>
                 <a:cs typeface="Trebuchet MS" pitchFamily="34" charset="-120"/>
               </a:rPr>
-              <a:t>ion</a:t>
+              <a:t>ive</a:t>
             </a:r>
             <a:endParaRPr lang="en-US" sz="1300" dirty="0"/>
           </a:p>
@@ -9181,7 +9181,7 @@
                 <a:ea typeface="Calibri" pitchFamily="34" charset="-122"/>
                 <a:cs typeface="Calibri" pitchFamily="34" charset="-120"/>
               </a:rPr>
-              <a:t>act or result of</a:t>
+              <a:t>having the quality of</a:t>
             </a:r>
             <a:endParaRPr lang="en-US" sz="850" dirty="0"/>
           </a:p>
@@ -9550,7 +9550,7 @@
                 <a:ea typeface="Trebuchet MS" pitchFamily="34" charset="-122"/>
                 <a:cs typeface="Trebuchet MS" pitchFamily="34" charset="-120"/>
               </a:rPr>
-              <a:t>tion</a:t>
+              <a:t>tive</a:t>
             </a:r>
             <a:endParaRPr lang="en-US" sz="1400" dirty="0"/>
           </a:p>
@@ -10113,7 +10113,7 @@
                 <a:ea typeface="Trebuchet MS" pitchFamily="34" charset="-122"/>
                 <a:cs typeface="Trebuchet MS" pitchFamily="34" charset="-120"/>
               </a:rPr>
-              <a:t>reflection</a:t>
+              <a:t>reflective</a:t>
             </a:r>
             <a:endParaRPr lang="en-US" sz="2800" dirty="0"/>
           </a:p>
@@ -10403,7 +10403,7 @@
                 <a:ea typeface="Calibri" pitchFamily="34" charset="-122"/>
                 <a:cs typeface="Calibri" pitchFamily="34" charset="-120"/>
               </a:rPr>
-              <a:t>bend or throw back</a:t>
+              <a:t>bend or throw</a:t>
             </a:r>
             <a:endParaRPr lang="en-US" sz="850" dirty="0"/>
           </a:p>
@@ -10476,7 +10476,7 @@
                 <a:ea typeface="Trebuchet MS" pitchFamily="34" charset="-122"/>
                 <a:cs typeface="Trebuchet MS" pitchFamily="34" charset="-120"/>
               </a:rPr>
-              <a:t>ion</a:t>
+              <a:t>ive</a:t>
             </a:r>
             <a:endParaRPr lang="en-US" sz="1300" dirty="0"/>
           </a:p>
@@ -10515,7 +10515,7 @@
                 <a:ea typeface="Calibri" pitchFamily="34" charset="-122"/>
                 <a:cs typeface="Calibri" pitchFamily="34" charset="-120"/>
               </a:rPr>
-              <a:t>act or result of</a:t>
+              <a:t>having the quality of</a:t>
             </a:r>
             <a:endParaRPr lang="en-US" sz="850" dirty="0"/>
           </a:p>
@@ -10884,7 +10884,7 @@
                 <a:ea typeface="Trebuchet MS" pitchFamily="34" charset="-122"/>
                 <a:cs typeface="Trebuchet MS" pitchFamily="34" charset="-120"/>
               </a:rPr>
-              <a:t>tion</a:t>
+              <a:t>tive</a:t>
             </a:r>
             <a:endParaRPr lang="en-US" sz="1400" dirty="0"/>
           </a:p>
@@ -10991,7 +10991,7 @@
         </p:nvSpPr>
         <p:spPr>
           <a:xfrm>
-            <a:off x="2023872" y="4169664"/>
+            <a:off x="2124837" y="4169664"/>
             <a:ext cx="685800" cy="384048"/>
           </a:xfrm>
           <a:prstGeom prst="rect">
@@ -11018,7 +11018,7 @@
         </p:nvSpPr>
         <p:spPr>
           <a:xfrm>
-            <a:off x="2023872" y="4169664"/>
+            <a:off x="2124837" y="4169664"/>
             <a:ext cx="685800" cy="384048"/>
           </a:xfrm>
           <a:prstGeom prst="rect">
@@ -11057,7 +11057,7 @@
         </p:nvSpPr>
         <p:spPr>
           <a:xfrm>
-            <a:off x="2831592" y="4169664"/>
+            <a:off x="3033522" y="4169664"/>
             <a:ext cx="685800" cy="384048"/>
           </a:xfrm>
           <a:prstGeom prst="rect">
@@ -11084,7 +11084,7 @@
         </p:nvSpPr>
         <p:spPr>
           <a:xfrm>
-            <a:off x="2831592" y="4169664"/>
+            <a:off x="3033522" y="4169664"/>
             <a:ext cx="685800" cy="384048"/>
           </a:xfrm>
           <a:prstGeom prst="rect">
@@ -11123,7 +11123,7 @@
         </p:nvSpPr>
         <p:spPr>
           <a:xfrm>
-            <a:off x="3639312" y="4169664"/>
+            <a:off x="3942207" y="4169664"/>
             <a:ext cx="685800" cy="384048"/>
           </a:xfrm>
           <a:prstGeom prst="rect">
@@ -11150,7 +11150,7 @@
         </p:nvSpPr>
         <p:spPr>
           <a:xfrm>
-            <a:off x="3639312" y="4169664"/>
+            <a:off x="3942207" y="4169664"/>
             <a:ext cx="685800" cy="384048"/>
           </a:xfrm>
           <a:prstGeom prst="rect">
@@ -11175,7 +11175,7 @@
                 <a:ea typeface="Trebuchet MS" pitchFamily="34" charset="-122"/>
                 <a:cs typeface="Trebuchet MS" pitchFamily="34" charset="-120"/>
               </a:rPr>
-              <a:t>f</a:t>
+              <a:t>fl</a:t>
             </a:r>
             <a:endParaRPr lang="en-US" sz="900" dirty="0"/>
           </a:p>
@@ -11189,7 +11189,7 @@
         </p:nvSpPr>
         <p:spPr>
           <a:xfrm>
-            <a:off x="4447032" y="4169664"/>
+            <a:off x="4850892" y="4169664"/>
             <a:ext cx="685800" cy="384048"/>
           </a:xfrm>
           <a:prstGeom prst="rect">
@@ -11216,7 +11216,7 @@
         </p:nvSpPr>
         <p:spPr>
           <a:xfrm>
-            <a:off x="4447032" y="4169664"/>
+            <a:off x="4850892" y="4169664"/>
             <a:ext cx="685800" cy="384048"/>
           </a:xfrm>
           <a:prstGeom prst="rect">
@@ -11241,7 +11241,7 @@
                 <a:ea typeface="Trebuchet MS" pitchFamily="34" charset="-122"/>
                 <a:cs typeface="Trebuchet MS" pitchFamily="34" charset="-120"/>
               </a:rPr>
-              <a:t>l</a:t>
+              <a:t>e</a:t>
             </a:r>
             <a:endParaRPr lang="en-US" sz="900" dirty="0"/>
           </a:p>
@@ -11255,7 +11255,7 @@
         </p:nvSpPr>
         <p:spPr>
           <a:xfrm>
-            <a:off x="5254752" y="4169664"/>
+            <a:off x="5759577" y="4169664"/>
             <a:ext cx="685800" cy="384048"/>
           </a:xfrm>
           <a:prstGeom prst="rect">
@@ -11282,7 +11282,7 @@
         </p:nvSpPr>
         <p:spPr>
           <a:xfrm>
-            <a:off x="5254752" y="4169664"/>
+            <a:off x="5759577" y="4169664"/>
             <a:ext cx="685800" cy="384048"/>
           </a:xfrm>
           <a:prstGeom prst="rect">
@@ -11307,7 +11307,7 @@
                 <a:ea typeface="Trebuchet MS" pitchFamily="34" charset="-122"/>
                 <a:cs typeface="Trebuchet MS" pitchFamily="34" charset="-120"/>
               </a:rPr>
-              <a:t>e</a:t>
+              <a:t>c</a:t>
             </a:r>
             <a:endParaRPr lang="en-US" sz="900" dirty="0"/>
           </a:p>
@@ -11315,13 +11315,52 @@
       </p:sp>
       <p:sp>
         <p:nvSpPr>
-          <p:cNvPr id="49" name="Shape 47"/>
-          <p:cNvSpPr/>
-          <p:nvPr/>
-        </p:nvSpPr>
-        <p:spPr>
-          <a:xfrm>
-            <a:off x="6062472" y="4169664"/>
+          <p:cNvPr id="49" name="Text 47"/>
+          <p:cNvSpPr/>
+          <p:nvPr/>
+        </p:nvSpPr>
+        <p:spPr>
+          <a:xfrm>
+            <a:off x="5759577" y="4572000"/>
+            <a:ext cx="685800" cy="219456"/>
+          </a:xfrm>
+          <a:prstGeom prst="rect">
+            <a:avLst/>
+          </a:prstGeom>
+          <a:noFill/>
+          <a:ln/>
+        </p:spPr>
+        <p:txBody>
+          <a:bodyPr wrap="square" lIns="0" tIns="0" rIns="0" bIns="0" rtlCol="0" anchor="t"/>
+          <a:lstStyle/>
+          <a:p>
+            <a:pPr algn="ctr" indent="0" marL="0">
+              <a:buNone/>
+            </a:pPr>
+            <a:r>
+              <a:rPr lang="en-US" sz="750" i="1" dirty="0">
+                <a:solidFill>
+                  <a:srgbClr val="94A3B8"/>
+                </a:solidFill>
+                <a:latin typeface="Calibri" pitchFamily="34" charset="0"/>
+                <a:ea typeface="Calibri" pitchFamily="34" charset="-122"/>
+                <a:cs typeface="Calibri" pitchFamily="34" charset="-120"/>
+              </a:rPr>
+              <a:t>/k/</a:t>
+            </a:r>
+            <a:endParaRPr lang="en-US" sz="750" dirty="0"/>
+          </a:p>
+        </p:txBody>
+      </p:sp>
+      <p:sp>
+        <p:nvSpPr>
+          <p:cNvPr id="50" name="Shape 48"/>
+          <p:cNvSpPr/>
+          <p:nvPr/>
+        </p:nvSpPr>
+        <p:spPr>
+          <a:xfrm>
+            <a:off x="6668262" y="4169664"/>
             <a:ext cx="685800" cy="384048"/>
           </a:xfrm>
           <a:prstGeom prst="rect">
@@ -11342,13 +11381,13 @@
       </p:sp>
       <p:sp>
         <p:nvSpPr>
-          <p:cNvPr id="50" name="Text 48"/>
-          <p:cNvSpPr/>
-          <p:nvPr/>
-        </p:nvSpPr>
-        <p:spPr>
-          <a:xfrm>
-            <a:off x="6062472" y="4169664"/>
+          <p:cNvPr id="51" name="Text 49"/>
+          <p:cNvSpPr/>
+          <p:nvPr/>
+        </p:nvSpPr>
+        <p:spPr>
+          <a:xfrm>
+            <a:off x="6668262" y="4169664"/>
             <a:ext cx="685800" cy="384048"/>
           </a:xfrm>
           <a:prstGeom prst="rect">
@@ -11373,7 +11412,7 @@
                 <a:ea typeface="Trebuchet MS" pitchFamily="34" charset="-122"/>
                 <a:cs typeface="Trebuchet MS" pitchFamily="34" charset="-120"/>
               </a:rPr>
-              <a:t>c</a:t>
+              <a:t>t</a:t>
             </a:r>
             <a:endParaRPr lang="en-US" sz="900" dirty="0"/>
           </a:p>
@@ -11381,52 +11420,13 @@
       </p:sp>
       <p:sp>
         <p:nvSpPr>
-          <p:cNvPr id="51" name="Text 49"/>
-          <p:cNvSpPr/>
-          <p:nvPr/>
-        </p:nvSpPr>
-        <p:spPr>
-          <a:xfrm>
-            <a:off x="6062472" y="4572000"/>
-            <a:ext cx="685800" cy="219456"/>
-          </a:xfrm>
-          <a:prstGeom prst="rect">
-            <a:avLst/>
-          </a:prstGeom>
-          <a:noFill/>
-          <a:ln/>
-        </p:spPr>
-        <p:txBody>
-          <a:bodyPr wrap="square" lIns="0" tIns="0" rIns="0" bIns="0" rtlCol="0" anchor="t"/>
-          <a:lstStyle/>
-          <a:p>
-            <a:pPr algn="ctr" indent="0" marL="0">
-              <a:buNone/>
-            </a:pPr>
-            <a:r>
-              <a:rPr lang="en-US" sz="750" i="1" dirty="0">
-                <a:solidFill>
-                  <a:srgbClr val="94A3B8"/>
-                </a:solidFill>
-                <a:latin typeface="Calibri" pitchFamily="34" charset="0"/>
-                <a:ea typeface="Calibri" pitchFamily="34" charset="-122"/>
-                <a:cs typeface="Calibri" pitchFamily="34" charset="-120"/>
-              </a:rPr>
-              <a:t>/k/</a:t>
-            </a:r>
-            <a:endParaRPr lang="en-US" sz="750" dirty="0"/>
-          </a:p>
-        </p:txBody>
-      </p:sp>
-      <p:sp>
-        <p:nvSpPr>
           <p:cNvPr id="52" name="Shape 50"/>
           <p:cNvSpPr/>
           <p:nvPr/>
         </p:nvSpPr>
         <p:spPr>
           <a:xfrm>
-            <a:off x="6870192" y="4169664"/>
+            <a:off x="7576947" y="4169664"/>
             <a:ext cx="685800" cy="384048"/>
           </a:xfrm>
           <a:prstGeom prst="rect">
@@ -11453,7 +11453,7 @@
         </p:nvSpPr>
         <p:spPr>
           <a:xfrm>
-            <a:off x="6870192" y="4169664"/>
+            <a:off x="7576947" y="4169664"/>
             <a:ext cx="685800" cy="384048"/>
           </a:xfrm>
           <a:prstGeom prst="rect">
@@ -11478,114 +11478,9 @@
                 <a:ea typeface="Trebuchet MS" pitchFamily="34" charset="-122"/>
                 <a:cs typeface="Trebuchet MS" pitchFamily="34" charset="-120"/>
               </a:rPr>
-              <a:t>t</a:t>
+              <a:t>ive</a:t>
             </a:r>
             <a:endParaRPr lang="en-US" sz="900" dirty="0"/>
-          </a:p>
-        </p:txBody>
-      </p:sp>
-      <p:sp>
-        <p:nvSpPr>
-          <p:cNvPr id="54" name="Shape 52"/>
-          <p:cNvSpPr/>
-          <p:nvPr/>
-        </p:nvSpPr>
-        <p:spPr>
-          <a:xfrm>
-            <a:off x="7677912" y="4169664"/>
-            <a:ext cx="685800" cy="384048"/>
-          </a:xfrm>
-          <a:prstGeom prst="rect">
-            <a:avLst>
-              <a:gd name="adj" fmla="val 9524"/>
-            </a:avLst>
-          </a:prstGeom>
-          <a:solidFill>
-            <a:srgbClr val="FFFFFF"/>
-          </a:solidFill>
-          <a:ln w="12700">
-            <a:solidFill>
-              <a:srgbClr val="DB2777"/>
-            </a:solidFill>
-            <a:prstDash val="solid"/>
-          </a:ln>
-        </p:spPr>
-      </p:sp>
-      <p:sp>
-        <p:nvSpPr>
-          <p:cNvPr id="55" name="Text 53"/>
-          <p:cNvSpPr/>
-          <p:nvPr/>
-        </p:nvSpPr>
-        <p:spPr>
-          <a:xfrm>
-            <a:off x="7677912" y="4169664"/>
-            <a:ext cx="685800" cy="384048"/>
-          </a:xfrm>
-          <a:prstGeom prst="rect">
-            <a:avLst/>
-          </a:prstGeom>
-          <a:noFill/>
-          <a:ln/>
-        </p:spPr>
-        <p:txBody>
-          <a:bodyPr wrap="square" lIns="0" tIns="0" rIns="0" bIns="0" rtlCol="0" anchor="ctr"/>
-          <a:lstStyle/>
-          <a:p>
-            <a:pPr algn="ctr" indent="0" marL="0">
-              <a:buNone/>
-            </a:pPr>
-            <a:r>
-              <a:rPr lang="en-US" sz="900" b="1" dirty="0">
-                <a:solidFill>
-                  <a:srgbClr val="9D174D"/>
-                </a:solidFill>
-                <a:latin typeface="Trebuchet MS" pitchFamily="34" charset="0"/>
-                <a:ea typeface="Trebuchet MS" pitchFamily="34" charset="-122"/>
-                <a:cs typeface="Trebuchet MS" pitchFamily="34" charset="-120"/>
-              </a:rPr>
-              <a:t>ion</a:t>
-            </a:r>
-            <a:endParaRPr lang="en-US" sz="900" dirty="0"/>
-          </a:p>
-        </p:txBody>
-      </p:sp>
-      <p:sp>
-        <p:nvSpPr>
-          <p:cNvPr id="56" name="Text 54"/>
-          <p:cNvSpPr/>
-          <p:nvPr/>
-        </p:nvSpPr>
-        <p:spPr>
-          <a:xfrm>
-            <a:off x="7677912" y="4572000"/>
-            <a:ext cx="685800" cy="219456"/>
-          </a:xfrm>
-          <a:prstGeom prst="rect">
-            <a:avLst/>
-          </a:prstGeom>
-          <a:noFill/>
-          <a:ln/>
-        </p:spPr>
-        <p:txBody>
-          <a:bodyPr wrap="square" lIns="0" tIns="0" rIns="0" bIns="0" rtlCol="0" anchor="t"/>
-          <a:lstStyle/>
-          <a:p>
-            <a:pPr algn="ctr" indent="0" marL="0">
-              <a:buNone/>
-            </a:pPr>
-            <a:r>
-              <a:rPr lang="en-US" sz="750" i="1" dirty="0">
-                <a:solidFill>
-                  <a:srgbClr val="94A3B8"/>
-                </a:solidFill>
-                <a:latin typeface="Calibri" pitchFamily="34" charset="0"/>
-                <a:ea typeface="Calibri" pitchFamily="34" charset="-122"/>
-                <a:cs typeface="Calibri" pitchFamily="34" charset="-120"/>
-              </a:rPr>
-              <a:t>/shun/</a:t>
-            </a:r>
-            <a:endParaRPr lang="en-US" sz="750" dirty="0"/>
           </a:p>
         </p:txBody>
       </p:sp>
@@ -12014,7 +11909,7 @@
                 <a:ea typeface="Trebuchet MS" pitchFamily="34" charset="-122"/>
                 <a:cs typeface="Trebuchet MS" pitchFamily="34" charset="-120"/>
               </a:rPr>
-              <a:t>reflective</a:t>
+              <a:t>reflection</a:t>
             </a:r>
             <a:endParaRPr lang="en-US" sz="2800" dirty="0"/>
           </a:p>
@@ -12841,7 +12736,7 @@
                 <a:ea typeface="Trebuchet MS" pitchFamily="34" charset="-122"/>
                 <a:cs typeface="Trebuchet MS" pitchFamily="34" charset="-120"/>
               </a:rPr>
-              <a:t>reflective</a:t>
+              <a:t>reflection</a:t>
             </a:r>
             <a:endParaRPr lang="en-US" sz="2800" dirty="0"/>
           </a:p>
@@ -13131,7 +13026,7 @@
                 <a:ea typeface="Calibri" pitchFamily="34" charset="-122"/>
                 <a:cs typeface="Calibri" pitchFamily="34" charset="-120"/>
               </a:rPr>
-              <a:t>bend or throw back</a:t>
+              <a:t>bend or throw</a:t>
             </a:r>
             <a:endParaRPr lang="en-US" sz="850" dirty="0"/>
           </a:p>
@@ -13204,7 +13099,7 @@
                 <a:ea typeface="Trebuchet MS" pitchFamily="34" charset="-122"/>
                 <a:cs typeface="Trebuchet MS" pitchFamily="34" charset="-120"/>
               </a:rPr>
-              <a:t>ive</a:t>
+              <a:t>ion</a:t>
             </a:r>
             <a:endParaRPr lang="en-US" sz="1300" dirty="0"/>
           </a:p>
@@ -13243,7 +13138,7 @@
                 <a:ea typeface="Calibri" pitchFamily="34" charset="-122"/>
                 <a:cs typeface="Calibri" pitchFamily="34" charset="-120"/>
               </a:rPr>
-              <a:t>having the quality of</a:t>
+              <a:t>act or result of</a:t>
             </a:r>
             <a:endParaRPr lang="en-US" sz="850" dirty="0"/>
           </a:p>
@@ -13938,7 +13833,7 @@
                 <a:ea typeface="Trebuchet MS" pitchFamily="34" charset="-122"/>
                 <a:cs typeface="Trebuchet MS" pitchFamily="34" charset="-120"/>
               </a:rPr>
-              <a:t>reflective</a:t>
+              <a:t>reflection</a:t>
             </a:r>
             <a:endParaRPr lang="en-US" sz="2800" dirty="0"/>
           </a:p>
@@ -14228,7 +14123,7 @@
                 <a:ea typeface="Calibri" pitchFamily="34" charset="-122"/>
                 <a:cs typeface="Calibri" pitchFamily="34" charset="-120"/>
               </a:rPr>
-              <a:t>bend or throw back</a:t>
+              <a:t>bend or throw</a:t>
             </a:r>
             <a:endParaRPr lang="en-US" sz="850" dirty="0"/>
           </a:p>
@@ -14301,7 +14196,7 @@
                 <a:ea typeface="Trebuchet MS" pitchFamily="34" charset="-122"/>
                 <a:cs typeface="Trebuchet MS" pitchFamily="34" charset="-120"/>
               </a:rPr>
-              <a:t>ive</a:t>
+              <a:t>ion</a:t>
             </a:r>
             <a:endParaRPr lang="en-US" sz="1300" dirty="0"/>
           </a:p>
@@ -14340,7 +14235,7 @@
                 <a:ea typeface="Calibri" pitchFamily="34" charset="-122"/>
                 <a:cs typeface="Calibri" pitchFamily="34" charset="-120"/>
               </a:rPr>
-              <a:t>having the quality of</a:t>
+              <a:t>act or result of</a:t>
             </a:r>
             <a:endParaRPr lang="en-US" sz="850" dirty="0"/>
           </a:p>
@@ -14709,7 +14604,7 @@
                 <a:ea typeface="Trebuchet MS" pitchFamily="34" charset="-122"/>
                 <a:cs typeface="Trebuchet MS" pitchFamily="34" charset="-120"/>
               </a:rPr>
-              <a:t>tive</a:t>
+              <a:t>tion</a:t>
             </a:r>
             <a:endParaRPr lang="en-US" sz="1400" dirty="0"/>
           </a:p>
@@ -15537,7 +15432,7 @@
                 <a:ea typeface="Trebuchet MS" pitchFamily="34" charset="-122"/>
                 <a:cs typeface="Trebuchet MS" pitchFamily="34" charset="-120"/>
               </a:rPr>
-              <a:t>reflective</a:t>
+              <a:t>reflection</a:t>
             </a:r>
             <a:endParaRPr lang="en-US" sz="2800" dirty="0"/>
           </a:p>
@@ -15827,7 +15722,7 @@
                 <a:ea typeface="Calibri" pitchFamily="34" charset="-122"/>
                 <a:cs typeface="Calibri" pitchFamily="34" charset="-120"/>
               </a:rPr>
-              <a:t>bend or throw back</a:t>
+              <a:t>bend or throw</a:t>
             </a:r>
             <a:endParaRPr lang="en-US" sz="850" dirty="0"/>
           </a:p>
@@ -15900,7 +15795,7 @@
                 <a:ea typeface="Trebuchet MS" pitchFamily="34" charset="-122"/>
                 <a:cs typeface="Trebuchet MS" pitchFamily="34" charset="-120"/>
               </a:rPr>
-              <a:t>ive</a:t>
+              <a:t>ion</a:t>
             </a:r>
             <a:endParaRPr lang="en-US" sz="1300" dirty="0"/>
           </a:p>
@@ -15939,7 +15834,7 @@
                 <a:ea typeface="Calibri" pitchFamily="34" charset="-122"/>
                 <a:cs typeface="Calibri" pitchFamily="34" charset="-120"/>
               </a:rPr>
-              <a:t>having the quality of</a:t>
+              <a:t>act or result of</a:t>
             </a:r>
             <a:endParaRPr lang="en-US" sz="850" dirty="0"/>
           </a:p>
@@ -16308,7 +16203,7 @@
                 <a:ea typeface="Trebuchet MS" pitchFamily="34" charset="-122"/>
                 <a:cs typeface="Trebuchet MS" pitchFamily="34" charset="-120"/>
               </a:rPr>
-              <a:t>tive</a:t>
+              <a:t>tion</a:t>
             </a:r>
             <a:endParaRPr lang="en-US" sz="1400" dirty="0"/>
           </a:p>
@@ -16415,8 +16310,8 @@
         </p:nvSpPr>
         <p:spPr>
           <a:xfrm>
-            <a:off x="1951330" y="4169664"/>
-            <a:ext cx="676656" cy="384048"/>
+            <a:off x="2124837" y="4169664"/>
+            <a:ext cx="685800" cy="384048"/>
           </a:xfrm>
           <a:prstGeom prst="rect">
             <a:avLst>
@@ -16442,8 +16337,8 @@
         </p:nvSpPr>
         <p:spPr>
           <a:xfrm>
-            <a:off x="1951330" y="4169664"/>
-            <a:ext cx="676656" cy="384048"/>
+            <a:off x="2124837" y="4169664"/>
+            <a:ext cx="685800" cy="384048"/>
           </a:xfrm>
           <a:prstGeom prst="rect">
             <a:avLst/>
@@ -16481,8 +16376,8 @@
         </p:nvSpPr>
         <p:spPr>
           <a:xfrm>
-            <a:off x="2677363" y="4169664"/>
-            <a:ext cx="676656" cy="384048"/>
+            <a:off x="3033522" y="4169664"/>
+            <a:ext cx="685800" cy="384048"/>
           </a:xfrm>
           <a:prstGeom prst="rect">
             <a:avLst>
@@ -16508,8 +16403,8 @@
         </p:nvSpPr>
         <p:spPr>
           <a:xfrm>
-            <a:off x="2677363" y="4169664"/>
-            <a:ext cx="676656" cy="384048"/>
+            <a:off x="3033522" y="4169664"/>
+            <a:ext cx="685800" cy="384048"/>
           </a:xfrm>
           <a:prstGeom prst="rect">
             <a:avLst/>
@@ -16547,8 +16442,8 @@
         </p:nvSpPr>
         <p:spPr>
           <a:xfrm>
-            <a:off x="3403397" y="4169664"/>
-            <a:ext cx="676656" cy="384048"/>
+            <a:off x="3942207" y="4169664"/>
+            <a:ext cx="685800" cy="384048"/>
           </a:xfrm>
           <a:prstGeom prst="rect">
             <a:avLst>
@@ -16574,8 +16469,8 @@
         </p:nvSpPr>
         <p:spPr>
           <a:xfrm>
-            <a:off x="3403397" y="4169664"/>
-            <a:ext cx="676656" cy="384048"/>
+            <a:off x="3942207" y="4169664"/>
+            <a:ext cx="685800" cy="384048"/>
           </a:xfrm>
           <a:prstGeom prst="rect">
             <a:avLst/>
@@ -16599,7 +16494,7 @@
                 <a:ea typeface="Trebuchet MS" pitchFamily="34" charset="-122"/>
                 <a:cs typeface="Trebuchet MS" pitchFamily="34" charset="-120"/>
               </a:rPr>
-              <a:t>f</a:t>
+              <a:t>fl</a:t>
             </a:r>
             <a:endParaRPr lang="en-US" sz="900" dirty="0"/>
           </a:p>
@@ -16613,8 +16508,8 @@
         </p:nvSpPr>
         <p:spPr>
           <a:xfrm>
-            <a:off x="4129430" y="4169664"/>
-            <a:ext cx="676656" cy="384048"/>
+            <a:off x="4850892" y="4169664"/>
+            <a:ext cx="685800" cy="384048"/>
           </a:xfrm>
           <a:prstGeom prst="rect">
             <a:avLst>
@@ -16640,8 +16535,8 @@
         </p:nvSpPr>
         <p:spPr>
           <a:xfrm>
-            <a:off x="4129430" y="4169664"/>
-            <a:ext cx="676656" cy="384048"/>
+            <a:off x="4850892" y="4169664"/>
+            <a:ext cx="685800" cy="384048"/>
           </a:xfrm>
           <a:prstGeom prst="rect">
             <a:avLst/>
@@ -16665,7 +16560,7 @@
                 <a:ea typeface="Trebuchet MS" pitchFamily="34" charset="-122"/>
                 <a:cs typeface="Trebuchet MS" pitchFamily="34" charset="-120"/>
               </a:rPr>
-              <a:t>l</a:t>
+              <a:t>e</a:t>
             </a:r>
             <a:endParaRPr lang="en-US" sz="900" dirty="0"/>
           </a:p>
@@ -16679,8 +16574,8 @@
         </p:nvSpPr>
         <p:spPr>
           <a:xfrm>
-            <a:off x="4855464" y="4169664"/>
-            <a:ext cx="676656" cy="384048"/>
+            <a:off x="5759577" y="4169664"/>
+            <a:ext cx="685800" cy="384048"/>
           </a:xfrm>
           <a:prstGeom prst="rect">
             <a:avLst>
@@ -16706,8 +16601,8 @@
         </p:nvSpPr>
         <p:spPr>
           <a:xfrm>
-            <a:off x="4855464" y="4169664"/>
-            <a:ext cx="676656" cy="384048"/>
+            <a:off x="5759577" y="4169664"/>
+            <a:ext cx="685800" cy="384048"/>
           </a:xfrm>
           <a:prstGeom prst="rect">
             <a:avLst/>
@@ -16731,7 +16626,7 @@
                 <a:ea typeface="Trebuchet MS" pitchFamily="34" charset="-122"/>
                 <a:cs typeface="Trebuchet MS" pitchFamily="34" charset="-120"/>
               </a:rPr>
-              <a:t>e</a:t>
+              <a:t>c</a:t>
             </a:r>
             <a:endParaRPr lang="en-US" sz="900" dirty="0"/>
           </a:p>
@@ -16739,14 +16634,53 @@
       </p:sp>
       <p:sp>
         <p:nvSpPr>
-          <p:cNvPr id="49" name="Shape 47"/>
-          <p:cNvSpPr/>
-          <p:nvPr/>
-        </p:nvSpPr>
-        <p:spPr>
-          <a:xfrm>
-            <a:off x="5581498" y="4169664"/>
-            <a:ext cx="676656" cy="384048"/>
+          <p:cNvPr id="49" name="Text 47"/>
+          <p:cNvSpPr/>
+          <p:nvPr/>
+        </p:nvSpPr>
+        <p:spPr>
+          <a:xfrm>
+            <a:off x="5759577" y="4572000"/>
+            <a:ext cx="685800" cy="219456"/>
+          </a:xfrm>
+          <a:prstGeom prst="rect">
+            <a:avLst/>
+          </a:prstGeom>
+          <a:noFill/>
+          <a:ln/>
+        </p:spPr>
+        <p:txBody>
+          <a:bodyPr wrap="square" lIns="0" tIns="0" rIns="0" bIns="0" rtlCol="0" anchor="t"/>
+          <a:lstStyle/>
+          <a:p>
+            <a:pPr algn="ctr" indent="0" marL="0">
+              <a:buNone/>
+            </a:pPr>
+            <a:r>
+              <a:rPr lang="en-US" sz="750" i="1" dirty="0">
+                <a:solidFill>
+                  <a:srgbClr val="94A3B8"/>
+                </a:solidFill>
+                <a:latin typeface="Calibri" pitchFamily="34" charset="0"/>
+                <a:ea typeface="Calibri" pitchFamily="34" charset="-122"/>
+                <a:cs typeface="Calibri" pitchFamily="34" charset="-120"/>
+              </a:rPr>
+              <a:t>/k/</a:t>
+            </a:r>
+            <a:endParaRPr lang="en-US" sz="750" dirty="0"/>
+          </a:p>
+        </p:txBody>
+      </p:sp>
+      <p:sp>
+        <p:nvSpPr>
+          <p:cNvPr id="50" name="Shape 48"/>
+          <p:cNvSpPr/>
+          <p:nvPr/>
+        </p:nvSpPr>
+        <p:spPr>
+          <a:xfrm>
+            <a:off x="6668262" y="4169664"/>
+            <a:ext cx="685800" cy="384048"/>
           </a:xfrm>
           <a:prstGeom prst="rect">
             <a:avLst>
@@ -16766,14 +16700,14 @@
       </p:sp>
       <p:sp>
         <p:nvSpPr>
-          <p:cNvPr id="50" name="Text 48"/>
-          <p:cNvSpPr/>
-          <p:nvPr/>
-        </p:nvSpPr>
-        <p:spPr>
-          <a:xfrm>
-            <a:off x="5581498" y="4169664"/>
-            <a:ext cx="676656" cy="384048"/>
+          <p:cNvPr id="51" name="Text 49"/>
+          <p:cNvSpPr/>
+          <p:nvPr/>
+        </p:nvSpPr>
+        <p:spPr>
+          <a:xfrm>
+            <a:off x="6668262" y="4169664"/>
+            <a:ext cx="685800" cy="384048"/>
           </a:xfrm>
           <a:prstGeom prst="rect">
             <a:avLst/>
@@ -16797,7 +16731,7 @@
                 <a:ea typeface="Trebuchet MS" pitchFamily="34" charset="-122"/>
                 <a:cs typeface="Trebuchet MS" pitchFamily="34" charset="-120"/>
               </a:rPr>
-              <a:t>c</a:t>
+              <a:t>t</a:t>
             </a:r>
             <a:endParaRPr lang="en-US" sz="900" dirty="0"/>
           </a:p>
@@ -16805,14 +16739,80 @@
       </p:sp>
       <p:sp>
         <p:nvSpPr>
-          <p:cNvPr id="51" name="Text 49"/>
-          <p:cNvSpPr/>
-          <p:nvPr/>
-        </p:nvSpPr>
-        <p:spPr>
-          <a:xfrm>
-            <a:off x="5581498" y="4572000"/>
-            <a:ext cx="676656" cy="219456"/>
+          <p:cNvPr id="52" name="Shape 50"/>
+          <p:cNvSpPr/>
+          <p:nvPr/>
+        </p:nvSpPr>
+        <p:spPr>
+          <a:xfrm>
+            <a:off x="7576947" y="4169664"/>
+            <a:ext cx="685800" cy="384048"/>
+          </a:xfrm>
+          <a:prstGeom prst="rect">
+            <a:avLst>
+              <a:gd name="adj" fmla="val 9524"/>
+            </a:avLst>
+          </a:prstGeom>
+          <a:solidFill>
+            <a:srgbClr val="FFFFFF"/>
+          </a:solidFill>
+          <a:ln w="12700">
+            <a:solidFill>
+              <a:srgbClr val="DB2777"/>
+            </a:solidFill>
+            <a:prstDash val="solid"/>
+          </a:ln>
+        </p:spPr>
+      </p:sp>
+      <p:sp>
+        <p:nvSpPr>
+          <p:cNvPr id="53" name="Text 51"/>
+          <p:cNvSpPr/>
+          <p:nvPr/>
+        </p:nvSpPr>
+        <p:spPr>
+          <a:xfrm>
+            <a:off x="7576947" y="4169664"/>
+            <a:ext cx="685800" cy="384048"/>
+          </a:xfrm>
+          <a:prstGeom prst="rect">
+            <a:avLst/>
+          </a:prstGeom>
+          <a:noFill/>
+          <a:ln/>
+        </p:spPr>
+        <p:txBody>
+          <a:bodyPr wrap="square" lIns="0" tIns="0" rIns="0" bIns="0" rtlCol="0" anchor="ctr"/>
+          <a:lstStyle/>
+          <a:p>
+            <a:pPr algn="ctr" indent="0" marL="0">
+              <a:buNone/>
+            </a:pPr>
+            <a:r>
+              <a:rPr lang="en-US" sz="900" b="1" dirty="0">
+                <a:solidFill>
+                  <a:srgbClr val="9D174D"/>
+                </a:solidFill>
+                <a:latin typeface="Trebuchet MS" pitchFamily="34" charset="0"/>
+                <a:ea typeface="Trebuchet MS" pitchFamily="34" charset="-122"/>
+                <a:cs typeface="Trebuchet MS" pitchFamily="34" charset="-120"/>
+              </a:rPr>
+              <a:t>ion</a:t>
+            </a:r>
+            <a:endParaRPr lang="en-US" sz="900" dirty="0"/>
+          </a:p>
+        </p:txBody>
+      </p:sp>
+      <p:sp>
+        <p:nvSpPr>
+          <p:cNvPr id="54" name="Text 52"/>
+          <p:cNvSpPr/>
+          <p:nvPr/>
+        </p:nvSpPr>
+        <p:spPr>
+          <a:xfrm>
+            <a:off x="7576947" y="4572000"/>
+            <a:ext cx="685800" cy="219456"/>
           </a:xfrm>
           <a:prstGeom prst="rect">
             <a:avLst/>
@@ -16836,207 +16836,9 @@
                 <a:ea typeface="Calibri" pitchFamily="34" charset="-122"/>
                 <a:cs typeface="Calibri" pitchFamily="34" charset="-120"/>
               </a:rPr>
-              <a:t>/k/</a:t>
+              <a:t>/shun/</a:t>
             </a:r>
             <a:endParaRPr lang="en-US" sz="750" dirty="0"/>
-          </a:p>
-        </p:txBody>
-      </p:sp>
-      <p:sp>
-        <p:nvSpPr>
-          <p:cNvPr id="52" name="Shape 50"/>
-          <p:cNvSpPr/>
-          <p:nvPr/>
-        </p:nvSpPr>
-        <p:spPr>
-          <a:xfrm>
-            <a:off x="6307531" y="4169664"/>
-            <a:ext cx="676656" cy="384048"/>
-          </a:xfrm>
-          <a:prstGeom prst="rect">
-            <a:avLst>
-              <a:gd name="adj" fmla="val 9524"/>
-            </a:avLst>
-          </a:prstGeom>
-          <a:solidFill>
-            <a:srgbClr val="FFFFFF"/>
-          </a:solidFill>
-          <a:ln w="12700">
-            <a:solidFill>
-              <a:srgbClr val="DB2777"/>
-            </a:solidFill>
-            <a:prstDash val="solid"/>
-          </a:ln>
-        </p:spPr>
-      </p:sp>
-      <p:sp>
-        <p:nvSpPr>
-          <p:cNvPr id="53" name="Text 51"/>
-          <p:cNvSpPr/>
-          <p:nvPr/>
-        </p:nvSpPr>
-        <p:spPr>
-          <a:xfrm>
-            <a:off x="6307531" y="4169664"/>
-            <a:ext cx="676656" cy="384048"/>
-          </a:xfrm>
-          <a:prstGeom prst="rect">
-            <a:avLst/>
-          </a:prstGeom>
-          <a:noFill/>
-          <a:ln/>
-        </p:spPr>
-        <p:txBody>
-          <a:bodyPr wrap="square" lIns="0" tIns="0" rIns="0" bIns="0" rtlCol="0" anchor="ctr"/>
-          <a:lstStyle/>
-          <a:p>
-            <a:pPr algn="ctr" indent="0" marL="0">
-              <a:buNone/>
-            </a:pPr>
-            <a:r>
-              <a:rPr lang="en-US" sz="900" b="1" dirty="0">
-                <a:solidFill>
-                  <a:srgbClr val="9D174D"/>
-                </a:solidFill>
-                <a:latin typeface="Trebuchet MS" pitchFamily="34" charset="0"/>
-                <a:ea typeface="Trebuchet MS" pitchFamily="34" charset="-122"/>
-                <a:cs typeface="Trebuchet MS" pitchFamily="34" charset="-120"/>
-              </a:rPr>
-              <a:t>t</a:t>
-            </a:r>
-            <a:endParaRPr lang="en-US" sz="900" dirty="0"/>
-          </a:p>
-        </p:txBody>
-      </p:sp>
-      <p:sp>
-        <p:nvSpPr>
-          <p:cNvPr id="54" name="Shape 52"/>
-          <p:cNvSpPr/>
-          <p:nvPr/>
-        </p:nvSpPr>
-        <p:spPr>
-          <a:xfrm>
-            <a:off x="7033565" y="4169664"/>
-            <a:ext cx="676656" cy="384048"/>
-          </a:xfrm>
-          <a:prstGeom prst="rect">
-            <a:avLst>
-              <a:gd name="adj" fmla="val 9524"/>
-            </a:avLst>
-          </a:prstGeom>
-          <a:solidFill>
-            <a:srgbClr val="FFFFFF"/>
-          </a:solidFill>
-          <a:ln w="12700">
-            <a:solidFill>
-              <a:srgbClr val="DB2777"/>
-            </a:solidFill>
-            <a:prstDash val="solid"/>
-          </a:ln>
-        </p:spPr>
-      </p:sp>
-      <p:sp>
-        <p:nvSpPr>
-          <p:cNvPr id="55" name="Text 53"/>
-          <p:cNvSpPr/>
-          <p:nvPr/>
-        </p:nvSpPr>
-        <p:spPr>
-          <a:xfrm>
-            <a:off x="7033565" y="4169664"/>
-            <a:ext cx="676656" cy="384048"/>
-          </a:xfrm>
-          <a:prstGeom prst="rect">
-            <a:avLst/>
-          </a:prstGeom>
-          <a:noFill/>
-          <a:ln/>
-        </p:spPr>
-        <p:txBody>
-          <a:bodyPr wrap="square" lIns="0" tIns="0" rIns="0" bIns="0" rtlCol="0" anchor="ctr"/>
-          <a:lstStyle/>
-          <a:p>
-            <a:pPr algn="ctr" indent="0" marL="0">
-              <a:buNone/>
-            </a:pPr>
-            <a:r>
-              <a:rPr lang="en-US" sz="900" b="1" dirty="0">
-                <a:solidFill>
-                  <a:srgbClr val="9D174D"/>
-                </a:solidFill>
-                <a:latin typeface="Trebuchet MS" pitchFamily="34" charset="0"/>
-                <a:ea typeface="Trebuchet MS" pitchFamily="34" charset="-122"/>
-                <a:cs typeface="Trebuchet MS" pitchFamily="34" charset="-120"/>
-              </a:rPr>
-              <a:t>i</a:t>
-            </a:r>
-            <a:endParaRPr lang="en-US" sz="900" dirty="0"/>
-          </a:p>
-        </p:txBody>
-      </p:sp>
-      <p:sp>
-        <p:nvSpPr>
-          <p:cNvPr id="56" name="Shape 54"/>
-          <p:cNvSpPr/>
-          <p:nvPr/>
-        </p:nvSpPr>
-        <p:spPr>
-          <a:xfrm>
-            <a:off x="7759598" y="4169664"/>
-            <a:ext cx="676656" cy="384048"/>
-          </a:xfrm>
-          <a:prstGeom prst="rect">
-            <a:avLst>
-              <a:gd name="adj" fmla="val 9524"/>
-            </a:avLst>
-          </a:prstGeom>
-          <a:solidFill>
-            <a:srgbClr val="FFFFFF"/>
-          </a:solidFill>
-          <a:ln w="12700">
-            <a:solidFill>
-              <a:srgbClr val="DB2777"/>
-            </a:solidFill>
-            <a:prstDash val="solid"/>
-          </a:ln>
-        </p:spPr>
-      </p:sp>
-      <p:sp>
-        <p:nvSpPr>
-          <p:cNvPr id="57" name="Text 55"/>
-          <p:cNvSpPr/>
-          <p:nvPr/>
-        </p:nvSpPr>
-        <p:spPr>
-          <a:xfrm>
-            <a:off x="7759598" y="4169664"/>
-            <a:ext cx="676656" cy="384048"/>
-          </a:xfrm>
-          <a:prstGeom prst="rect">
-            <a:avLst/>
-          </a:prstGeom>
-          <a:noFill/>
-          <a:ln/>
-        </p:spPr>
-        <p:txBody>
-          <a:bodyPr wrap="square" lIns="0" tIns="0" rIns="0" bIns="0" rtlCol="0" anchor="ctr"/>
-          <a:lstStyle/>
-          <a:p>
-            <a:pPr algn="ctr" indent="0" marL="0">
-              <a:buNone/>
-            </a:pPr>
-            <a:r>
-              <a:rPr lang="en-US" sz="900" b="1" dirty="0">
-                <a:solidFill>
-                  <a:srgbClr val="9D174D"/>
-                </a:solidFill>
-                <a:latin typeface="Trebuchet MS" pitchFamily="34" charset="0"/>
-                <a:ea typeface="Trebuchet MS" pitchFamily="34" charset="-122"/>
-                <a:cs typeface="Trebuchet MS" pitchFamily="34" charset="-120"/>
-              </a:rPr>
-              <a:t>ve</a:t>
-            </a:r>
-            <a:endParaRPr lang="en-US" sz="900" dirty="0"/>
           </a:p>
         </p:txBody>
       </p:sp>
@@ -18360,7 +18162,7 @@
                 <a:ea typeface="Calibri" pitchFamily="34" charset="-122"/>
                 <a:cs typeface="Calibri" pitchFamily="34" charset="-120"/>
               </a:rPr>
-              <a:t>During </a:t>
+              <a:t>The </a:t>
             </a:r>
             <a:pPr algn="l" indent="0" marL="0">
               <a:buNone/>
@@ -18377,7 +18179,7 @@
                 <a:ea typeface="Calibri" pitchFamily="34" charset="-122"/>
                 <a:cs typeface="Calibri" pitchFamily="34" charset="-120"/>
               </a:rPr>
-              <a:t>self-reflection</a:t>
+              <a:t>reflector</a:t>
             </a:r>
             <a:pPr algn="l" indent="0" marL="0">
               <a:buNone/>
@@ -18391,7 +18193,7 @@
                 <a:ea typeface="Calibri" pitchFamily="34" charset="-122"/>
                 <a:cs typeface="Calibri" pitchFamily="34" charset="-120"/>
               </a:rPr>
-              <a:t>, Mia realised that </a:t>
+              <a:t> on her bike glowed in the dark; after </a:t>
             </a:r>
             <a:pPr algn="l" indent="0" marL="0">
               <a:buNone/>
@@ -18422,118 +18224,343 @@
                 <a:ea typeface="Calibri" pitchFamily="34" charset="-122"/>
                 <a:cs typeface="Calibri" pitchFamily="34" charset="-120"/>
               </a:rPr>
-              <a:t> on her mistakes had made her a more </a:t>
-            </a:r>
+              <a:t> on her route, she chose the safer path.</a:t>
+            </a:r>
+            <a:endParaRPr lang="en-US" sz="1800" dirty="0"/>
+          </a:p>
+        </p:txBody>
+      </p:sp>
+      <p:sp>
+        <p:nvSpPr>
+          <p:cNvPr id="13" name="Shape 11"/>
+          <p:cNvSpPr/>
+          <p:nvPr/>
+        </p:nvSpPr>
+        <p:spPr>
+          <a:xfrm>
+            <a:off x="365760" y="2852928"/>
+            <a:ext cx="8412480" cy="475488"/>
+          </a:xfrm>
+          <a:prstGeom prst="rect">
+            <a:avLst>
+              <a:gd name="adj" fmla="val 15385"/>
+            </a:avLst>
+          </a:prstGeom>
+          <a:solidFill>
+            <a:srgbClr val="CCFBF1"/>
+          </a:solidFill>
+          <a:ln w="12700">
+            <a:solidFill>
+              <a:srgbClr val="0D9488"/>
+            </a:solidFill>
+            <a:prstDash val="solid"/>
+          </a:ln>
+        </p:spPr>
+      </p:sp>
+      <p:sp>
+        <p:nvSpPr>
+          <p:cNvPr id="14" name="Text 12"/>
+          <p:cNvSpPr/>
+          <p:nvPr/>
+        </p:nvSpPr>
+        <p:spPr>
+          <a:xfrm>
+            <a:off x="502920" y="2852928"/>
+            <a:ext cx="8229600" cy="475488"/>
+          </a:xfrm>
+          <a:prstGeom prst="rect">
+            <a:avLst/>
+          </a:prstGeom>
+          <a:noFill/>
+          <a:ln/>
+        </p:spPr>
+        <p:txBody>
+          <a:bodyPr wrap="square" rtlCol="0" anchor="ctr"/>
+          <a:lstStyle/>
+          <a:p>
             <a:pPr algn="l" indent="0" marL="0">
               <a:buNone/>
             </a:pPr>
             <a:r>
-              <a:rPr lang="en-US" sz="1800" b="1" dirty="0">
-                <a:solidFill>
-                  <a:srgbClr val="0D9488"/>
-                </a:solidFill>
-                <a:highlight>
-                  <a:srgbClr val="CCFBF1"/>
-                </a:highlight>
+              <a:rPr lang="en-US" sz="1200" b="1" dirty="0">
+                <a:solidFill>
+                  <a:srgbClr val="0F766E"/>
+                </a:solidFill>
                 <a:latin typeface="Calibri" pitchFamily="34" charset="0"/>
                 <a:ea typeface="Calibri" pitchFamily="34" charset="-122"/>
                 <a:cs typeface="Calibri" pitchFamily="34" charset="-120"/>
               </a:rPr>
-              <a:t>reflective</a:t>
-            </a:r>
-            <a:pPr algn="l" indent="0" marL="0">
-              <a:buNone/>
-            </a:pPr>
-            <a:r>
-              <a:rPr lang="en-US" sz="1800" dirty="0">
-                <a:solidFill>
-                  <a:srgbClr val="0F172A"/>
+              <a:t>Now rewrite each focus word below with space between letters — leave room for your breakdown.</a:t>
+            </a:r>
+            <a:endParaRPr lang="en-US" sz="1200" dirty="0"/>
+          </a:p>
+        </p:txBody>
+      </p:sp>
+      <p:sp>
+        <p:nvSpPr>
+          <p:cNvPr id="15" name="Shape 13"/>
+          <p:cNvSpPr/>
+          <p:nvPr/>
+        </p:nvSpPr>
+        <p:spPr>
+          <a:xfrm>
+            <a:off x="411480" y="3456432"/>
+            <a:ext cx="2499360" cy="1005840"/>
+          </a:xfrm>
+          <a:prstGeom prst="rect">
+            <a:avLst>
+              <a:gd name="adj" fmla="val 7273"/>
+            </a:avLst>
+          </a:prstGeom>
+          <a:solidFill>
+            <a:srgbClr val="F8FAFC"/>
+          </a:solidFill>
+          <a:ln w="12700">
+            <a:solidFill>
+              <a:srgbClr val="E2E8F0"/>
+            </a:solidFill>
+            <a:prstDash val="solid"/>
+          </a:ln>
+        </p:spPr>
+      </p:sp>
+      <p:sp>
+        <p:nvSpPr>
+          <p:cNvPr id="16" name="Shape 14"/>
+          <p:cNvSpPr/>
+          <p:nvPr/>
+        </p:nvSpPr>
+        <p:spPr>
+          <a:xfrm>
+            <a:off x="411480" y="3977640"/>
+            <a:ext cx="2499360" cy="0"/>
+          </a:xfrm>
+          <a:prstGeom prst="line">
+            <a:avLst/>
+          </a:prstGeom>
+          <a:noFill/>
+          <a:ln w="12700">
+            <a:solidFill>
+              <a:srgbClr val="E2E8F0"/>
+            </a:solidFill>
+            <a:prstDash val="dash"/>
+          </a:ln>
+        </p:spPr>
+      </p:sp>
+      <p:sp>
+        <p:nvSpPr>
+          <p:cNvPr id="17" name="Text 15"/>
+          <p:cNvSpPr/>
+          <p:nvPr/>
+        </p:nvSpPr>
+        <p:spPr>
+          <a:xfrm>
+            <a:off x="411480" y="3456432"/>
+            <a:ext cx="2499360" cy="502920"/>
+          </a:xfrm>
+          <a:prstGeom prst="rect">
+            <a:avLst/>
+          </a:prstGeom>
+          <a:noFill/>
+          <a:ln/>
+        </p:spPr>
+        <p:txBody>
+          <a:bodyPr wrap="square" lIns="0" tIns="0" rIns="0" bIns="0" rtlCol="0" anchor="ctr"/>
+          <a:lstStyle/>
+          <a:p>
+            <a:pPr algn="ctr" indent="0" marL="0">
+              <a:buNone/>
+            </a:pPr>
+            <a:r>
+              <a:rPr lang="en-US" sz="1400" b="1" dirty="0">
+                <a:solidFill>
+                  <a:srgbClr val="0D9488"/>
+                </a:solidFill>
+                <a:latin typeface="Trebuchet MS" pitchFamily="34" charset="0"/>
+                <a:ea typeface="Trebuchet MS" pitchFamily="34" charset="-122"/>
+                <a:cs typeface="Trebuchet MS" pitchFamily="34" charset="-120"/>
+              </a:rPr>
+              <a:t>reflector</a:t>
+            </a:r>
+            <a:endParaRPr lang="en-US" sz="1400" dirty="0"/>
+          </a:p>
+        </p:txBody>
+      </p:sp>
+      <p:sp>
+        <p:nvSpPr>
+          <p:cNvPr id="18" name="Text 16"/>
+          <p:cNvSpPr/>
+          <p:nvPr/>
+        </p:nvSpPr>
+        <p:spPr>
+          <a:xfrm>
+            <a:off x="411480" y="4005072"/>
+            <a:ext cx="2499360" cy="457200"/>
+          </a:xfrm>
+          <a:prstGeom prst="rect">
+            <a:avLst/>
+          </a:prstGeom>
+          <a:noFill/>
+          <a:ln/>
+        </p:spPr>
+        <p:txBody>
+          <a:bodyPr wrap="square" lIns="0" tIns="0" rIns="0" bIns="0" rtlCol="0" anchor="ctr"/>
+          <a:lstStyle/>
+          <a:p>
+            <a:pPr algn="ctr" indent="0" marL="0">
+              <a:buNone/>
+            </a:pPr>
+            <a:r>
+              <a:rPr lang="en-US" sz="900" i="1" dirty="0">
+                <a:solidFill>
+                  <a:srgbClr val="475569"/>
                 </a:solidFill>
                 <a:latin typeface="Calibri" pitchFamily="34" charset="0"/>
                 <a:ea typeface="Calibri" pitchFamily="34" charset="-122"/>
                 <a:cs typeface="Calibri" pitchFamily="34" charset="-120"/>
               </a:rPr>
-              <a:t> and thoughtful student.</a:t>
-            </a:r>
-            <a:endParaRPr lang="en-US" sz="1800" dirty="0"/>
-          </a:p>
-        </p:txBody>
-      </p:sp>
-      <p:sp>
-        <p:nvSpPr>
-          <p:cNvPr id="13" name="Shape 11"/>
-          <p:cNvSpPr/>
-          <p:nvPr/>
-        </p:nvSpPr>
-        <p:spPr>
-          <a:xfrm>
-            <a:off x="365760" y="2852928"/>
-            <a:ext cx="8412480" cy="475488"/>
+              <a:t>write your breakdown below</a:t>
+            </a:r>
+            <a:endParaRPr lang="en-US" sz="900" dirty="0"/>
+          </a:p>
+        </p:txBody>
+      </p:sp>
+      <p:sp>
+        <p:nvSpPr>
+          <p:cNvPr id="19" name="Shape 17"/>
+          <p:cNvSpPr/>
+          <p:nvPr/>
+        </p:nvSpPr>
+        <p:spPr>
+          <a:xfrm>
+            <a:off x="3185160" y="3456432"/>
+            <a:ext cx="2499360" cy="1005840"/>
           </a:xfrm>
           <a:prstGeom prst="rect">
             <a:avLst>
-              <a:gd name="adj" fmla="val 15385"/>
+              <a:gd name="adj" fmla="val 7273"/>
             </a:avLst>
           </a:prstGeom>
           <a:solidFill>
-            <a:srgbClr val="CCFBF1"/>
-          </a:solidFill>
-          <a:ln w="12700">
-            <a:solidFill>
-              <a:srgbClr val="0D9488"/>
-            </a:solidFill>
-            <a:prstDash val="solid"/>
-          </a:ln>
-        </p:spPr>
-      </p:sp>
-      <p:sp>
-        <p:nvSpPr>
-          <p:cNvPr id="14" name="Text 12"/>
-          <p:cNvSpPr/>
-          <p:nvPr/>
-        </p:nvSpPr>
-        <p:spPr>
-          <a:xfrm>
-            <a:off x="502920" y="2852928"/>
-            <a:ext cx="8229600" cy="475488"/>
-          </a:xfrm>
-          <a:prstGeom prst="rect">
-            <a:avLst/>
-          </a:prstGeom>
-          <a:noFill/>
-          <a:ln/>
-        </p:spPr>
-        <p:txBody>
-          <a:bodyPr wrap="square" rtlCol="0" anchor="ctr"/>
-          <a:lstStyle/>
-          <a:p>
-            <a:pPr algn="l" indent="0" marL="0">
-              <a:buNone/>
-            </a:pPr>
-            <a:r>
-              <a:rPr lang="en-US" sz="1200" b="1" dirty="0">
-                <a:solidFill>
-                  <a:srgbClr val="0F766E"/>
+            <a:srgbClr val="F8FAFC"/>
+          </a:solidFill>
+          <a:ln w="12700">
+            <a:solidFill>
+              <a:srgbClr val="E2E8F0"/>
+            </a:solidFill>
+            <a:prstDash val="solid"/>
+          </a:ln>
+        </p:spPr>
+      </p:sp>
+      <p:sp>
+        <p:nvSpPr>
+          <p:cNvPr id="20" name="Shape 18"/>
+          <p:cNvSpPr/>
+          <p:nvPr/>
+        </p:nvSpPr>
+        <p:spPr>
+          <a:xfrm>
+            <a:off x="3185160" y="3977640"/>
+            <a:ext cx="2499360" cy="0"/>
+          </a:xfrm>
+          <a:prstGeom prst="line">
+            <a:avLst/>
+          </a:prstGeom>
+          <a:noFill/>
+          <a:ln w="12700">
+            <a:solidFill>
+              <a:srgbClr val="E2E8F0"/>
+            </a:solidFill>
+            <a:prstDash val="dash"/>
+          </a:ln>
+        </p:spPr>
+      </p:sp>
+      <p:sp>
+        <p:nvSpPr>
+          <p:cNvPr id="21" name="Text 19"/>
+          <p:cNvSpPr/>
+          <p:nvPr/>
+        </p:nvSpPr>
+        <p:spPr>
+          <a:xfrm>
+            <a:off x="3185160" y="3456432"/>
+            <a:ext cx="2499360" cy="502920"/>
+          </a:xfrm>
+          <a:prstGeom prst="rect">
+            <a:avLst/>
+          </a:prstGeom>
+          <a:noFill/>
+          <a:ln/>
+        </p:spPr>
+        <p:txBody>
+          <a:bodyPr wrap="square" lIns="0" tIns="0" rIns="0" bIns="0" rtlCol="0" anchor="ctr"/>
+          <a:lstStyle/>
+          <a:p>
+            <a:pPr algn="ctr" indent="0" marL="0">
+              <a:buNone/>
+            </a:pPr>
+            <a:r>
+              <a:rPr lang="en-US" sz="1400" b="1" dirty="0">
+                <a:solidFill>
+                  <a:srgbClr val="0D9488"/>
+                </a:solidFill>
+                <a:latin typeface="Trebuchet MS" pitchFamily="34" charset="0"/>
+                <a:ea typeface="Trebuchet MS" pitchFamily="34" charset="-122"/>
+                <a:cs typeface="Trebuchet MS" pitchFamily="34" charset="-120"/>
+              </a:rPr>
+              <a:t>reflecting</a:t>
+            </a:r>
+            <a:endParaRPr lang="en-US" sz="1400" dirty="0"/>
+          </a:p>
+        </p:txBody>
+      </p:sp>
+      <p:sp>
+        <p:nvSpPr>
+          <p:cNvPr id="22" name="Text 20"/>
+          <p:cNvSpPr/>
+          <p:nvPr/>
+        </p:nvSpPr>
+        <p:spPr>
+          <a:xfrm>
+            <a:off x="3185160" y="4005072"/>
+            <a:ext cx="2499360" cy="457200"/>
+          </a:xfrm>
+          <a:prstGeom prst="rect">
+            <a:avLst/>
+          </a:prstGeom>
+          <a:noFill/>
+          <a:ln/>
+        </p:spPr>
+        <p:txBody>
+          <a:bodyPr wrap="square" lIns="0" tIns="0" rIns="0" bIns="0" rtlCol="0" anchor="ctr"/>
+          <a:lstStyle/>
+          <a:p>
+            <a:pPr algn="ctr" indent="0" marL="0">
+              <a:buNone/>
+            </a:pPr>
+            <a:r>
+              <a:rPr lang="en-US" sz="900" i="1" dirty="0">
+                <a:solidFill>
+                  <a:srgbClr val="475569"/>
                 </a:solidFill>
                 <a:latin typeface="Calibri" pitchFamily="34" charset="0"/>
                 <a:ea typeface="Calibri" pitchFamily="34" charset="-122"/>
                 <a:cs typeface="Calibri" pitchFamily="34" charset="-120"/>
               </a:rPr>
-              <a:t>Now rewrite each focus word below with space between letters — leave room for your breakdown.</a:t>
-            </a:r>
-            <a:endParaRPr lang="en-US" sz="1200" dirty="0"/>
-          </a:p>
-        </p:txBody>
-      </p:sp>
-      <p:sp>
-        <p:nvSpPr>
-          <p:cNvPr id="15" name="Shape 13"/>
-          <p:cNvSpPr/>
-          <p:nvPr/>
-        </p:nvSpPr>
-        <p:spPr>
-          <a:xfrm>
-            <a:off x="411480" y="3456432"/>
+              <a:t>write your breakdown below</a:t>
+            </a:r>
+            <a:endParaRPr lang="en-US" sz="900" dirty="0"/>
+          </a:p>
+        </p:txBody>
+      </p:sp>
+      <p:sp>
+        <p:nvSpPr>
+          <p:cNvPr id="23" name="Shape 21"/>
+          <p:cNvSpPr/>
+          <p:nvPr/>
+        </p:nvSpPr>
+        <p:spPr>
+          <a:xfrm>
+            <a:off x="5958840" y="3456432"/>
             <a:ext cx="2499360" cy="1005840"/>
           </a:xfrm>
           <a:prstGeom prst="rect">
@@ -18554,13 +18581,13 @@
       </p:sp>
       <p:sp>
         <p:nvSpPr>
-          <p:cNvPr id="16" name="Shape 14"/>
-          <p:cNvSpPr/>
-          <p:nvPr/>
-        </p:nvSpPr>
-        <p:spPr>
-          <a:xfrm>
-            <a:off x="411480" y="3977640"/>
+          <p:cNvPr id="24" name="Shape 22"/>
+          <p:cNvSpPr/>
+          <p:nvPr/>
+        </p:nvSpPr>
+        <p:spPr>
+          <a:xfrm>
+            <a:off x="5958840" y="3977640"/>
             <a:ext cx="2499360" cy="0"/>
           </a:xfrm>
           <a:prstGeom prst="line">
@@ -18577,13 +18604,13 @@
       </p:sp>
       <p:sp>
         <p:nvSpPr>
-          <p:cNvPr id="17" name="Text 15"/>
-          <p:cNvSpPr/>
-          <p:nvPr/>
-        </p:nvSpPr>
-        <p:spPr>
-          <a:xfrm>
-            <a:off x="411480" y="3456432"/>
+          <p:cNvPr id="25" name="Text 23"/>
+          <p:cNvSpPr/>
+          <p:nvPr/>
+        </p:nvSpPr>
+        <p:spPr>
+          <a:xfrm>
+            <a:off x="5958840" y="3456432"/>
             <a:ext cx="2499360" cy="502920"/>
           </a:xfrm>
           <a:prstGeom prst="rect">
@@ -18608,263 +18635,7 @@
                 <a:ea typeface="Trebuchet MS" pitchFamily="34" charset="-122"/>
                 <a:cs typeface="Trebuchet MS" pitchFamily="34" charset="-120"/>
               </a:rPr>
-              <a:t>self-reflection</a:t>
-            </a:r>
-            <a:endParaRPr lang="en-US" sz="1400" dirty="0"/>
-          </a:p>
-        </p:txBody>
-      </p:sp>
-      <p:sp>
-        <p:nvSpPr>
-          <p:cNvPr id="18" name="Text 16"/>
-          <p:cNvSpPr/>
-          <p:nvPr/>
-        </p:nvSpPr>
-        <p:spPr>
-          <a:xfrm>
-            <a:off x="411480" y="4005072"/>
-            <a:ext cx="2499360" cy="457200"/>
-          </a:xfrm>
-          <a:prstGeom prst="rect">
-            <a:avLst/>
-          </a:prstGeom>
-          <a:noFill/>
-          <a:ln/>
-        </p:spPr>
-        <p:txBody>
-          <a:bodyPr wrap="square" lIns="0" tIns="0" rIns="0" bIns="0" rtlCol="0" anchor="ctr"/>
-          <a:lstStyle/>
-          <a:p>
-            <a:pPr algn="ctr" indent="0" marL="0">
-              <a:buNone/>
-            </a:pPr>
-            <a:r>
-              <a:rPr lang="en-US" sz="900" i="1" dirty="0">
-                <a:solidFill>
-                  <a:srgbClr val="475569"/>
-                </a:solidFill>
-                <a:latin typeface="Calibri" pitchFamily="34" charset="0"/>
-                <a:ea typeface="Calibri" pitchFamily="34" charset="-122"/>
-                <a:cs typeface="Calibri" pitchFamily="34" charset="-120"/>
-              </a:rPr>
-              <a:t>write your breakdown below</a:t>
-            </a:r>
-            <a:endParaRPr lang="en-US" sz="900" dirty="0"/>
-          </a:p>
-        </p:txBody>
-      </p:sp>
-      <p:sp>
-        <p:nvSpPr>
-          <p:cNvPr id="19" name="Shape 17"/>
-          <p:cNvSpPr/>
-          <p:nvPr/>
-        </p:nvSpPr>
-        <p:spPr>
-          <a:xfrm>
-            <a:off x="3185160" y="3456432"/>
-            <a:ext cx="2499360" cy="1005840"/>
-          </a:xfrm>
-          <a:prstGeom prst="rect">
-            <a:avLst>
-              <a:gd name="adj" fmla="val 7273"/>
-            </a:avLst>
-          </a:prstGeom>
-          <a:solidFill>
-            <a:srgbClr val="F8FAFC"/>
-          </a:solidFill>
-          <a:ln w="12700">
-            <a:solidFill>
-              <a:srgbClr val="E2E8F0"/>
-            </a:solidFill>
-            <a:prstDash val="solid"/>
-          </a:ln>
-        </p:spPr>
-      </p:sp>
-      <p:sp>
-        <p:nvSpPr>
-          <p:cNvPr id="20" name="Shape 18"/>
-          <p:cNvSpPr/>
-          <p:nvPr/>
-        </p:nvSpPr>
-        <p:spPr>
-          <a:xfrm>
-            <a:off x="3185160" y="3977640"/>
-            <a:ext cx="2499360" cy="0"/>
-          </a:xfrm>
-          <a:prstGeom prst="line">
-            <a:avLst/>
-          </a:prstGeom>
-          <a:noFill/>
-          <a:ln w="12700">
-            <a:solidFill>
-              <a:srgbClr val="E2E8F0"/>
-            </a:solidFill>
-            <a:prstDash val="dash"/>
-          </a:ln>
-        </p:spPr>
-      </p:sp>
-      <p:sp>
-        <p:nvSpPr>
-          <p:cNvPr id="21" name="Text 19"/>
-          <p:cNvSpPr/>
-          <p:nvPr/>
-        </p:nvSpPr>
-        <p:spPr>
-          <a:xfrm>
-            <a:off x="3185160" y="3456432"/>
-            <a:ext cx="2499360" cy="502920"/>
-          </a:xfrm>
-          <a:prstGeom prst="rect">
-            <a:avLst/>
-          </a:prstGeom>
-          <a:noFill/>
-          <a:ln/>
-        </p:spPr>
-        <p:txBody>
-          <a:bodyPr wrap="square" lIns="0" tIns="0" rIns="0" bIns="0" rtlCol="0" anchor="ctr"/>
-          <a:lstStyle/>
-          <a:p>
-            <a:pPr algn="ctr" indent="0" marL="0">
-              <a:buNone/>
-            </a:pPr>
-            <a:r>
-              <a:rPr lang="en-US" sz="1400" b="1" dirty="0">
-                <a:solidFill>
-                  <a:srgbClr val="0D9488"/>
-                </a:solidFill>
-                <a:latin typeface="Trebuchet MS" pitchFamily="34" charset="0"/>
-                <a:ea typeface="Trebuchet MS" pitchFamily="34" charset="-122"/>
-                <a:cs typeface="Trebuchet MS" pitchFamily="34" charset="-120"/>
-              </a:rPr>
-              <a:t>reflecting</a:t>
-            </a:r>
-            <a:endParaRPr lang="en-US" sz="1400" dirty="0"/>
-          </a:p>
-        </p:txBody>
-      </p:sp>
-      <p:sp>
-        <p:nvSpPr>
-          <p:cNvPr id="22" name="Text 20"/>
-          <p:cNvSpPr/>
-          <p:nvPr/>
-        </p:nvSpPr>
-        <p:spPr>
-          <a:xfrm>
-            <a:off x="3185160" y="4005072"/>
-            <a:ext cx="2499360" cy="457200"/>
-          </a:xfrm>
-          <a:prstGeom prst="rect">
-            <a:avLst/>
-          </a:prstGeom>
-          <a:noFill/>
-          <a:ln/>
-        </p:spPr>
-        <p:txBody>
-          <a:bodyPr wrap="square" lIns="0" tIns="0" rIns="0" bIns="0" rtlCol="0" anchor="ctr"/>
-          <a:lstStyle/>
-          <a:p>
-            <a:pPr algn="ctr" indent="0" marL="0">
-              <a:buNone/>
-            </a:pPr>
-            <a:r>
-              <a:rPr lang="en-US" sz="900" i="1" dirty="0">
-                <a:solidFill>
-                  <a:srgbClr val="475569"/>
-                </a:solidFill>
-                <a:latin typeface="Calibri" pitchFamily="34" charset="0"/>
-                <a:ea typeface="Calibri" pitchFamily="34" charset="-122"/>
-                <a:cs typeface="Calibri" pitchFamily="34" charset="-120"/>
-              </a:rPr>
-              <a:t>write your breakdown below</a:t>
-            </a:r>
-            <a:endParaRPr lang="en-US" sz="900" dirty="0"/>
-          </a:p>
-        </p:txBody>
-      </p:sp>
-      <p:sp>
-        <p:nvSpPr>
-          <p:cNvPr id="23" name="Shape 21"/>
-          <p:cNvSpPr/>
-          <p:nvPr/>
-        </p:nvSpPr>
-        <p:spPr>
-          <a:xfrm>
-            <a:off x="5958840" y="3456432"/>
-            <a:ext cx="2499360" cy="1005840"/>
-          </a:xfrm>
-          <a:prstGeom prst="rect">
-            <a:avLst>
-              <a:gd name="adj" fmla="val 7273"/>
-            </a:avLst>
-          </a:prstGeom>
-          <a:solidFill>
-            <a:srgbClr val="F8FAFC"/>
-          </a:solidFill>
-          <a:ln w="12700">
-            <a:solidFill>
-              <a:srgbClr val="E2E8F0"/>
-            </a:solidFill>
-            <a:prstDash val="solid"/>
-          </a:ln>
-        </p:spPr>
-      </p:sp>
-      <p:sp>
-        <p:nvSpPr>
-          <p:cNvPr id="24" name="Shape 22"/>
-          <p:cNvSpPr/>
-          <p:nvPr/>
-        </p:nvSpPr>
-        <p:spPr>
-          <a:xfrm>
-            <a:off x="5958840" y="3977640"/>
-            <a:ext cx="2499360" cy="0"/>
-          </a:xfrm>
-          <a:prstGeom prst="line">
-            <a:avLst/>
-          </a:prstGeom>
-          <a:noFill/>
-          <a:ln w="12700">
-            <a:solidFill>
-              <a:srgbClr val="E2E8F0"/>
-            </a:solidFill>
-            <a:prstDash val="dash"/>
-          </a:ln>
-        </p:spPr>
-      </p:sp>
-      <p:sp>
-        <p:nvSpPr>
-          <p:cNvPr id="25" name="Text 23"/>
-          <p:cNvSpPr/>
-          <p:nvPr/>
-        </p:nvSpPr>
-        <p:spPr>
-          <a:xfrm>
-            <a:off x="5958840" y="3456432"/>
-            <a:ext cx="2499360" cy="502920"/>
-          </a:xfrm>
-          <a:prstGeom prst="rect">
-            <a:avLst/>
-          </a:prstGeom>
-          <a:noFill/>
-          <a:ln/>
-        </p:spPr>
-        <p:txBody>
-          <a:bodyPr wrap="square" lIns="0" tIns="0" rIns="0" bIns="0" rtlCol="0" anchor="ctr"/>
-          <a:lstStyle/>
-          <a:p>
-            <a:pPr algn="ctr" indent="0" marL="0">
-              <a:buNone/>
-            </a:pPr>
-            <a:r>
-              <a:rPr lang="en-US" sz="1400" b="1" dirty="0">
-                <a:solidFill>
-                  <a:srgbClr val="0D9488"/>
-                </a:solidFill>
-                <a:latin typeface="Trebuchet MS" pitchFamily="34" charset="0"/>
-                <a:ea typeface="Trebuchet MS" pitchFamily="34" charset="-122"/>
-                <a:cs typeface="Trebuchet MS" pitchFamily="34" charset="-120"/>
-              </a:rPr>
-              <a:t>reflective</a:t>
+              <a:t>reflected</a:t>
             </a:r>
             <a:endParaRPr lang="en-US" sz="1400" dirty="0"/>
           </a:p>
@@ -19334,7 +19105,7 @@
                 <a:ea typeface="Trebuchet MS" pitchFamily="34" charset="-122"/>
                 <a:cs typeface="Trebuchet MS" pitchFamily="34" charset="-120"/>
               </a:rPr>
-              <a:t>self-reflection</a:t>
+              <a:t>reflector</a:t>
             </a:r>
             <a:endParaRPr lang="en-US" sz="2800" dirty="0"/>
           </a:p>
@@ -20161,7 +19932,7 @@
                 <a:ea typeface="Trebuchet MS" pitchFamily="34" charset="-122"/>
                 <a:cs typeface="Trebuchet MS" pitchFamily="34" charset="-120"/>
               </a:rPr>
-              <a:t>self-reflection</a:t>
+              <a:t>reflector</a:t>
             </a:r>
             <a:endParaRPr lang="en-US" sz="2800" dirty="0"/>
           </a:p>
@@ -20241,8 +20012,8 @@
         </p:nvSpPr>
         <p:spPr>
           <a:xfrm>
-            <a:off x="1989734" y="2258568"/>
-            <a:ext cx="1581912" cy="292608"/>
+            <a:off x="2221992" y="2258568"/>
+            <a:ext cx="1828800" cy="292608"/>
           </a:xfrm>
           <a:prstGeom prst="rect">
             <a:avLst>
@@ -20275,8 +20046,8 @@
         </p:nvSpPr>
         <p:spPr>
           <a:xfrm>
-            <a:off x="1989734" y="2258568"/>
-            <a:ext cx="1581912" cy="292608"/>
+            <a:off x="2221992" y="2258568"/>
+            <a:ext cx="1828800" cy="292608"/>
           </a:xfrm>
           <a:prstGeom prst="rect">
             <a:avLst/>
@@ -20300,7 +20071,7 @@
                 <a:ea typeface="Trebuchet MS" pitchFamily="34" charset="-122"/>
                 <a:cs typeface="Trebuchet MS" pitchFamily="34" charset="-120"/>
               </a:rPr>
-              <a:t>self</a:t>
+              <a:t>re</a:t>
             </a:r>
             <a:endParaRPr lang="en-US" sz="1300" dirty="0"/>
           </a:p>
@@ -20314,8 +20085,8 @@
         </p:nvSpPr>
         <p:spPr>
           <a:xfrm>
-            <a:off x="1989734" y="2569464"/>
-            <a:ext cx="1581912" cy="201168"/>
+            <a:off x="2221992" y="2569464"/>
+            <a:ext cx="1828800" cy="201168"/>
           </a:xfrm>
           <a:prstGeom prst="rect">
             <a:avLst/>
@@ -20339,7 +20110,7 @@
                 <a:ea typeface="Calibri" pitchFamily="34" charset="-122"/>
                 <a:cs typeface="Calibri" pitchFamily="34" charset="-120"/>
               </a:rPr>
-              <a:t>oneself</a:t>
+              <a:t>back</a:t>
             </a:r>
             <a:endParaRPr lang="en-US" sz="850" dirty="0"/>
           </a:p>
@@ -20353,8 +20124,8 @@
         </p:nvSpPr>
         <p:spPr>
           <a:xfrm>
-            <a:off x="3659429" y="2258568"/>
-            <a:ext cx="1581912" cy="292608"/>
+            <a:off x="4370832" y="2258568"/>
+            <a:ext cx="1828800" cy="292608"/>
           </a:xfrm>
           <a:prstGeom prst="rect">
             <a:avLst>
@@ -20387,8 +20158,8 @@
         </p:nvSpPr>
         <p:spPr>
           <a:xfrm>
-            <a:off x="3659429" y="2258568"/>
-            <a:ext cx="1581912" cy="292608"/>
+            <a:off x="4370832" y="2258568"/>
+            <a:ext cx="1828800" cy="292608"/>
           </a:xfrm>
           <a:prstGeom prst="rect">
             <a:avLst/>
@@ -20412,7 +20183,7 @@
                 <a:ea typeface="Trebuchet MS" pitchFamily="34" charset="-122"/>
                 <a:cs typeface="Trebuchet MS" pitchFamily="34" charset="-120"/>
               </a:rPr>
-              <a:t>re</a:t>
+              <a:t>flect</a:t>
             </a:r>
             <a:endParaRPr lang="en-US" sz="1300" dirty="0"/>
           </a:p>
@@ -20426,8 +20197,8 @@
         </p:nvSpPr>
         <p:spPr>
           <a:xfrm>
-            <a:off x="3659429" y="2569464"/>
-            <a:ext cx="1581912" cy="201168"/>
+            <a:off x="4370832" y="2569464"/>
+            <a:ext cx="1828800" cy="201168"/>
           </a:xfrm>
           <a:prstGeom prst="rect">
             <a:avLst/>
@@ -20451,7 +20222,7 @@
                 <a:ea typeface="Calibri" pitchFamily="34" charset="-122"/>
                 <a:cs typeface="Calibri" pitchFamily="34" charset="-120"/>
               </a:rPr>
-              <a:t>back</a:t>
+              <a:t>bend or throw</a:t>
             </a:r>
             <a:endParaRPr lang="en-US" sz="850" dirty="0"/>
           </a:p>
@@ -20465,8 +20236,8 @@
         </p:nvSpPr>
         <p:spPr>
           <a:xfrm>
-            <a:off x="5329123" y="2258568"/>
-            <a:ext cx="1581912" cy="292608"/>
+            <a:off x="6519672" y="2258568"/>
+            <a:ext cx="1828800" cy="292608"/>
           </a:xfrm>
           <a:prstGeom prst="rect">
             <a:avLst>
@@ -20499,8 +20270,8 @@
         </p:nvSpPr>
         <p:spPr>
           <a:xfrm>
-            <a:off x="5329123" y="2258568"/>
-            <a:ext cx="1581912" cy="292608"/>
+            <a:off x="6519672" y="2258568"/>
+            <a:ext cx="1828800" cy="292608"/>
           </a:xfrm>
           <a:prstGeom prst="rect">
             <a:avLst/>
@@ -20524,7 +20295,7 @@
                 <a:ea typeface="Trebuchet MS" pitchFamily="34" charset="-122"/>
                 <a:cs typeface="Trebuchet MS" pitchFamily="34" charset="-120"/>
               </a:rPr>
-              <a:t>flect</a:t>
+              <a:t>or</a:t>
             </a:r>
             <a:endParaRPr lang="en-US" sz="1300" dirty="0"/>
           </a:p>
@@ -20538,8 +20309,8 @@
         </p:nvSpPr>
         <p:spPr>
           <a:xfrm>
-            <a:off x="5329123" y="2569464"/>
-            <a:ext cx="1581912" cy="201168"/>
+            <a:off x="6519672" y="2569464"/>
+            <a:ext cx="1828800" cy="201168"/>
           </a:xfrm>
           <a:prstGeom prst="rect">
             <a:avLst/>
@@ -20563,7 +20334,7 @@
                 <a:ea typeface="Calibri" pitchFamily="34" charset="-122"/>
                 <a:cs typeface="Calibri" pitchFamily="34" charset="-120"/>
               </a:rPr>
-              <a:t>bend or throw back</a:t>
+              <a:t>one who or thing that</a:t>
             </a:r>
             <a:endParaRPr lang="en-US" sz="850" dirty="0"/>
           </a:p>
@@ -20577,30 +20348,23 @@
         </p:nvSpPr>
         <p:spPr>
           <a:xfrm>
-            <a:off x="6998818" y="2258568"/>
-            <a:ext cx="1581912" cy="292608"/>
+            <a:off x="365760" y="3273552"/>
+            <a:ext cx="1371600" cy="658368"/>
           </a:xfrm>
           <a:prstGeom prst="rect">
             <a:avLst>
-              <a:gd name="adj" fmla="val 25000"/>
+              <a:gd name="adj" fmla="val 8333"/>
             </a:avLst>
           </a:prstGeom>
           <a:solidFill>
-            <a:srgbClr val="FCE7F3"/>
-          </a:solidFill>
-          <a:ln w="19050">
-            <a:solidFill>
-              <a:srgbClr val="DB2777"/>
-            </a:solidFill>
-            <a:prstDash val="solid"/>
-          </a:ln>
-          <a:effectLst>
-            <a:outerShdw sx="100000" sy="100000" kx="0" ky="0" algn="bl" rotWithShape="0" blurRad="101600" dist="38100" dir="8100000">
-              <a:srgbClr val="000000">
-                <a:alpha val="12000"/>
-              </a:srgbClr>
-            </a:outerShdw>
-          </a:effectLst>
+            <a:srgbClr val="E2E8F0"/>
+          </a:solidFill>
+          <a:ln w="12700">
+            <a:solidFill>
+              <a:srgbClr val="E2E8F0"/>
+            </a:solidFill>
+            <a:prstDash val="solid"/>
+          </a:ln>
         </p:spPr>
       </p:sp>
       <p:sp>
@@ -20611,90 +20375,117 @@
         </p:nvSpPr>
         <p:spPr>
           <a:xfrm>
-            <a:off x="6998818" y="2258568"/>
-            <a:ext cx="1581912" cy="292608"/>
-          </a:xfrm>
-          <a:prstGeom prst="rect">
-            <a:avLst/>
-          </a:prstGeom>
-          <a:noFill/>
-          <a:ln/>
-        </p:spPr>
-        <p:txBody>
-          <a:bodyPr wrap="square" lIns="0" tIns="0" rIns="0" bIns="0" rtlCol="0" anchor="ctr"/>
-          <a:lstStyle/>
-          <a:p>
-            <a:pPr algn="ctr" indent="0" marL="0">
-              <a:buNone/>
-            </a:pPr>
-            <a:r>
-              <a:rPr lang="en-US" sz="1300" b="1" dirty="0">
-                <a:solidFill>
-                  <a:srgbClr val="9D174D"/>
+            <a:off x="365760" y="3273552"/>
+            <a:ext cx="1371600" cy="658368"/>
+          </a:xfrm>
+          <a:prstGeom prst="rect">
+            <a:avLst/>
+          </a:prstGeom>
+          <a:noFill/>
+          <a:ln/>
+        </p:spPr>
+        <p:txBody>
+          <a:bodyPr wrap="square" lIns="0" tIns="0" rIns="0" bIns="0" rtlCol="0" anchor="ctr"/>
+          <a:lstStyle/>
+          <a:p>
+            <a:pPr algn="ctr" indent="0" marL="0">
+              <a:buNone/>
+            </a:pPr>
+            <a:r>
+              <a:rPr lang="en-US" sz="1100" b="1" dirty="0">
+                <a:solidFill>
+                  <a:srgbClr val="475569"/>
                 </a:solidFill>
                 <a:latin typeface="Trebuchet MS" pitchFamily="34" charset="0"/>
                 <a:ea typeface="Trebuchet MS" pitchFamily="34" charset="-122"/>
                 <a:cs typeface="Trebuchet MS" pitchFamily="34" charset="-120"/>
               </a:rPr>
-              <a:t>ion</a:t>
-            </a:r>
-            <a:endParaRPr lang="en-US" sz="1300" dirty="0"/>
-          </a:p>
-        </p:txBody>
-      </p:sp>
-      <p:sp>
-        <p:nvSpPr>
-          <p:cNvPr id="27" name="Text 25"/>
-          <p:cNvSpPr/>
-          <p:nvPr/>
-        </p:nvSpPr>
-        <p:spPr>
-          <a:xfrm>
-            <a:off x="6998818" y="2569464"/>
-            <a:ext cx="1581912" cy="201168"/>
-          </a:xfrm>
-          <a:prstGeom prst="rect">
-            <a:avLst/>
-          </a:prstGeom>
-          <a:noFill/>
-          <a:ln/>
-        </p:spPr>
-        <p:txBody>
-          <a:bodyPr wrap="square" lIns="0" tIns="0" rIns="0" bIns="0" rtlCol="0" anchor="t"/>
-          <a:lstStyle/>
-          <a:p>
-            <a:pPr algn="ctr" indent="0" marL="0">
-              <a:buNone/>
-            </a:pPr>
-            <a:r>
-              <a:rPr lang="en-US" sz="850" dirty="0">
-                <a:solidFill>
-                  <a:srgbClr val="475569"/>
+              <a:t>Syllables</a:t>
+            </a:r>
+            <a:endParaRPr lang="en-US" sz="1100" dirty="0"/>
+          </a:p>
+        </p:txBody>
+      </p:sp>
+      <p:sp>
+        <p:nvSpPr>
+          <p:cNvPr id="27" name="Shape 25"/>
+          <p:cNvSpPr/>
+          <p:nvPr/>
+        </p:nvSpPr>
+        <p:spPr>
+          <a:xfrm>
+            <a:off x="1874520" y="3273552"/>
+            <a:ext cx="6903720" cy="658368"/>
+          </a:xfrm>
+          <a:prstGeom prst="rect">
+            <a:avLst>
+              <a:gd name="adj" fmla="val 8333"/>
+            </a:avLst>
+          </a:prstGeom>
+          <a:solidFill>
+            <a:srgbClr val="F8FAFC"/>
+          </a:solidFill>
+          <a:ln w="12700">
+            <a:solidFill>
+              <a:srgbClr val="E2E8F0"/>
+            </a:solidFill>
+            <a:prstDash val="dash"/>
+          </a:ln>
+        </p:spPr>
+      </p:sp>
+      <p:sp>
+        <p:nvSpPr>
+          <p:cNvPr id="28" name="Text 26"/>
+          <p:cNvSpPr/>
+          <p:nvPr/>
+        </p:nvSpPr>
+        <p:spPr>
+          <a:xfrm>
+            <a:off x="1874520" y="3273552"/>
+            <a:ext cx="6903720" cy="658368"/>
+          </a:xfrm>
+          <a:prstGeom prst="rect">
+            <a:avLst/>
+          </a:prstGeom>
+          <a:noFill/>
+          <a:ln/>
+        </p:spPr>
+        <p:txBody>
+          <a:bodyPr wrap="square" rtlCol="0" anchor="ctr"/>
+          <a:lstStyle/>
+          <a:p>
+            <a:pPr algn="ctr" indent="0" marL="0">
+              <a:buNone/>
+            </a:pPr>
+            <a:r>
+              <a:rPr lang="en-US" sz="1100" i="1" dirty="0">
+                <a:solidFill>
+                  <a:srgbClr val="CBD5E1"/>
                 </a:solidFill>
                 <a:latin typeface="Calibri" pitchFamily="34" charset="0"/>
                 <a:ea typeface="Calibri" pitchFamily="34" charset="-122"/>
                 <a:cs typeface="Calibri" pitchFamily="34" charset="-120"/>
               </a:rPr>
-              <a:t>act or result of</a:t>
-            </a:r>
-            <a:endParaRPr lang="en-US" sz="850" dirty="0"/>
-          </a:p>
-        </p:txBody>
-      </p:sp>
-      <p:sp>
-        <p:nvSpPr>
-          <p:cNvPr id="28" name="Shape 26"/>
-          <p:cNvSpPr/>
-          <p:nvPr/>
-        </p:nvSpPr>
-        <p:spPr>
-          <a:xfrm>
-            <a:off x="365760" y="3273552"/>
-            <a:ext cx="1371600" cy="658368"/>
+              <a:t>Write here...</a:t>
+            </a:r>
+            <a:endParaRPr lang="en-US" sz="1100" dirty="0"/>
+          </a:p>
+        </p:txBody>
+      </p:sp>
+      <p:sp>
+        <p:nvSpPr>
+          <p:cNvPr id="29" name="Shape 27"/>
+          <p:cNvSpPr/>
+          <p:nvPr/>
+        </p:nvSpPr>
+        <p:spPr>
+          <a:xfrm>
+            <a:off x="365760" y="4096512"/>
+            <a:ext cx="1371600" cy="804672"/>
           </a:xfrm>
           <a:prstGeom prst="rect">
             <a:avLst>
-              <a:gd name="adj" fmla="val 8333"/>
+              <a:gd name="adj" fmla="val 6818"/>
             </a:avLst>
           </a:prstGeom>
           <a:solidFill>
@@ -20710,14 +20501,14 @@
       </p:sp>
       <p:sp>
         <p:nvSpPr>
-          <p:cNvPr id="29" name="Text 27"/>
-          <p:cNvSpPr/>
-          <p:nvPr/>
-        </p:nvSpPr>
-        <p:spPr>
-          <a:xfrm>
-            <a:off x="365760" y="3273552"/>
-            <a:ext cx="1371600" cy="658368"/>
+          <p:cNvPr id="30" name="Text 28"/>
+          <p:cNvSpPr/>
+          <p:nvPr/>
+        </p:nvSpPr>
+        <p:spPr>
+          <a:xfrm>
+            <a:off x="365760" y="4096512"/>
+            <a:ext cx="1371600" cy="804672"/>
           </a:xfrm>
           <a:prstGeom prst="rect">
             <a:avLst/>
@@ -20741,7 +20532,7 @@
                 <a:ea typeface="Trebuchet MS" pitchFamily="34" charset="-122"/>
                 <a:cs typeface="Trebuchet MS" pitchFamily="34" charset="-120"/>
               </a:rPr>
-              <a:t>Syllables</a:t>
+              <a:t>Phonemes</a:t>
             </a:r>
             <a:endParaRPr lang="en-US" sz="1100" dirty="0"/>
           </a:p>
@@ -20749,80 +20540,14 @@
       </p:sp>
       <p:sp>
         <p:nvSpPr>
-          <p:cNvPr id="30" name="Shape 28"/>
-          <p:cNvSpPr/>
-          <p:nvPr/>
-        </p:nvSpPr>
-        <p:spPr>
-          <a:xfrm>
-            <a:off x="1874520" y="3273552"/>
-            <a:ext cx="6903720" cy="658368"/>
-          </a:xfrm>
-          <a:prstGeom prst="rect">
-            <a:avLst>
-              <a:gd name="adj" fmla="val 8333"/>
-            </a:avLst>
-          </a:prstGeom>
-          <a:solidFill>
-            <a:srgbClr val="F8FAFC"/>
-          </a:solidFill>
-          <a:ln w="12700">
-            <a:solidFill>
-              <a:srgbClr val="E2E8F0"/>
-            </a:solidFill>
-            <a:prstDash val="dash"/>
-          </a:ln>
-        </p:spPr>
-      </p:sp>
-      <p:sp>
-        <p:nvSpPr>
-          <p:cNvPr id="31" name="Text 29"/>
-          <p:cNvSpPr/>
-          <p:nvPr/>
-        </p:nvSpPr>
-        <p:spPr>
-          <a:xfrm>
-            <a:off x="1874520" y="3273552"/>
-            <a:ext cx="6903720" cy="658368"/>
-          </a:xfrm>
-          <a:prstGeom prst="rect">
-            <a:avLst/>
-          </a:prstGeom>
-          <a:noFill/>
-          <a:ln/>
-        </p:spPr>
-        <p:txBody>
-          <a:bodyPr wrap="square" rtlCol="0" anchor="ctr"/>
-          <a:lstStyle/>
-          <a:p>
-            <a:pPr algn="ctr" indent="0" marL="0">
-              <a:buNone/>
-            </a:pPr>
-            <a:r>
-              <a:rPr lang="en-US" sz="1100" i="1" dirty="0">
-                <a:solidFill>
-                  <a:srgbClr val="CBD5E1"/>
-                </a:solidFill>
-                <a:latin typeface="Calibri" pitchFamily="34" charset="0"/>
-                <a:ea typeface="Calibri" pitchFamily="34" charset="-122"/>
-                <a:cs typeface="Calibri" pitchFamily="34" charset="-120"/>
-              </a:rPr>
-              <a:t>Write here...</a:t>
-            </a:r>
-            <a:endParaRPr lang="en-US" sz="1100" dirty="0"/>
-          </a:p>
-        </p:txBody>
-      </p:sp>
-      <p:sp>
-        <p:nvSpPr>
-          <p:cNvPr id="32" name="Shape 30"/>
-          <p:cNvSpPr/>
-          <p:nvPr/>
-        </p:nvSpPr>
-        <p:spPr>
-          <a:xfrm>
-            <a:off x="365760" y="4096512"/>
-            <a:ext cx="1371600" cy="804672"/>
+          <p:cNvPr id="31" name="Shape 29"/>
+          <p:cNvSpPr/>
+          <p:nvPr/>
+        </p:nvSpPr>
+        <p:spPr>
+          <a:xfrm>
+            <a:off x="1874520" y="4096512"/>
+            <a:ext cx="6903720" cy="804672"/>
           </a:xfrm>
           <a:prstGeom prst="rect">
             <a:avLst>
@@ -20830,85 +20555,19 @@
             </a:avLst>
           </a:prstGeom>
           <a:solidFill>
-            <a:srgbClr val="E2E8F0"/>
+            <a:srgbClr val="F8FAFC"/>
           </a:solidFill>
           <a:ln w="12700">
             <a:solidFill>
               <a:srgbClr val="E2E8F0"/>
             </a:solidFill>
-            <a:prstDash val="solid"/>
-          </a:ln>
-        </p:spPr>
-      </p:sp>
-      <p:sp>
-        <p:nvSpPr>
-          <p:cNvPr id="33" name="Text 31"/>
-          <p:cNvSpPr/>
-          <p:nvPr/>
-        </p:nvSpPr>
-        <p:spPr>
-          <a:xfrm>
-            <a:off x="365760" y="4096512"/>
-            <a:ext cx="1371600" cy="804672"/>
-          </a:xfrm>
-          <a:prstGeom prst="rect">
-            <a:avLst/>
-          </a:prstGeom>
-          <a:noFill/>
-          <a:ln/>
-        </p:spPr>
-        <p:txBody>
-          <a:bodyPr wrap="square" lIns="0" tIns="0" rIns="0" bIns="0" rtlCol="0" anchor="ctr"/>
-          <a:lstStyle/>
-          <a:p>
-            <a:pPr algn="ctr" indent="0" marL="0">
-              <a:buNone/>
-            </a:pPr>
-            <a:r>
-              <a:rPr lang="en-US" sz="1100" b="1" dirty="0">
-                <a:solidFill>
-                  <a:srgbClr val="475569"/>
-                </a:solidFill>
-                <a:latin typeface="Trebuchet MS" pitchFamily="34" charset="0"/>
-                <a:ea typeface="Trebuchet MS" pitchFamily="34" charset="-122"/>
-                <a:cs typeface="Trebuchet MS" pitchFamily="34" charset="-120"/>
-              </a:rPr>
-              <a:t>Phonemes</a:t>
-            </a:r>
-            <a:endParaRPr lang="en-US" sz="1100" dirty="0"/>
-          </a:p>
-        </p:txBody>
-      </p:sp>
-      <p:sp>
-        <p:nvSpPr>
-          <p:cNvPr id="34" name="Shape 32"/>
-          <p:cNvSpPr/>
-          <p:nvPr/>
-        </p:nvSpPr>
-        <p:spPr>
-          <a:xfrm>
-            <a:off x="1874520" y="4096512"/>
-            <a:ext cx="6903720" cy="804672"/>
-          </a:xfrm>
-          <a:prstGeom prst="rect">
-            <a:avLst>
-              <a:gd name="adj" fmla="val 6818"/>
-            </a:avLst>
-          </a:prstGeom>
-          <a:solidFill>
-            <a:srgbClr val="F8FAFC"/>
-          </a:solidFill>
-          <a:ln w="12700">
-            <a:solidFill>
-              <a:srgbClr val="E2E8F0"/>
-            </a:solidFill>
             <a:prstDash val="dash"/>
           </a:ln>
         </p:spPr>
       </p:sp>
       <p:sp>
         <p:nvSpPr>
-          <p:cNvPr id="35" name="Text 33"/>
+          <p:cNvPr id="32" name="Text 30"/>
           <p:cNvSpPr/>
           <p:nvPr/>
         </p:nvSpPr>
@@ -21370,7 +21029,7 @@
                 <a:ea typeface="Trebuchet MS" pitchFamily="34" charset="-122"/>
                 <a:cs typeface="Trebuchet MS" pitchFamily="34" charset="-120"/>
               </a:rPr>
-              <a:t>self-reflection</a:t>
+              <a:t>reflector</a:t>
             </a:r>
             <a:endParaRPr lang="en-US" sz="2800" dirty="0"/>
           </a:p>
@@ -21450,8 +21109,8 @@
         </p:nvSpPr>
         <p:spPr>
           <a:xfrm>
-            <a:off x="1989734" y="2258568"/>
-            <a:ext cx="1581912" cy="292608"/>
+            <a:off x="2221992" y="2258568"/>
+            <a:ext cx="1828800" cy="292608"/>
           </a:xfrm>
           <a:prstGeom prst="rect">
             <a:avLst>
@@ -21484,8 +21143,8 @@
         </p:nvSpPr>
         <p:spPr>
           <a:xfrm>
-            <a:off x="1989734" y="2258568"/>
-            <a:ext cx="1581912" cy="292608"/>
+            <a:off x="2221992" y="2258568"/>
+            <a:ext cx="1828800" cy="292608"/>
           </a:xfrm>
           <a:prstGeom prst="rect">
             <a:avLst/>
@@ -21509,7 +21168,7 @@
                 <a:ea typeface="Trebuchet MS" pitchFamily="34" charset="-122"/>
                 <a:cs typeface="Trebuchet MS" pitchFamily="34" charset="-120"/>
               </a:rPr>
-              <a:t>self</a:t>
+              <a:t>re</a:t>
             </a:r>
             <a:endParaRPr lang="en-US" sz="1300" dirty="0"/>
           </a:p>
@@ -21523,8 +21182,8 @@
         </p:nvSpPr>
         <p:spPr>
           <a:xfrm>
-            <a:off x="1989734" y="2569464"/>
-            <a:ext cx="1581912" cy="201168"/>
+            <a:off x="2221992" y="2569464"/>
+            <a:ext cx="1828800" cy="201168"/>
           </a:xfrm>
           <a:prstGeom prst="rect">
             <a:avLst/>
@@ -21548,7 +21207,7 @@
                 <a:ea typeface="Calibri" pitchFamily="34" charset="-122"/>
                 <a:cs typeface="Calibri" pitchFamily="34" charset="-120"/>
               </a:rPr>
-              <a:t>oneself</a:t>
+              <a:t>back</a:t>
             </a:r>
             <a:endParaRPr lang="en-US" sz="850" dirty="0"/>
           </a:p>
@@ -21562,8 +21221,8 @@
         </p:nvSpPr>
         <p:spPr>
           <a:xfrm>
-            <a:off x="3659429" y="2258568"/>
-            <a:ext cx="1581912" cy="292608"/>
+            <a:off x="4370832" y="2258568"/>
+            <a:ext cx="1828800" cy="292608"/>
           </a:xfrm>
           <a:prstGeom prst="rect">
             <a:avLst>
@@ -21596,8 +21255,8 @@
         </p:nvSpPr>
         <p:spPr>
           <a:xfrm>
-            <a:off x="3659429" y="2258568"/>
-            <a:ext cx="1581912" cy="292608"/>
+            <a:off x="4370832" y="2258568"/>
+            <a:ext cx="1828800" cy="292608"/>
           </a:xfrm>
           <a:prstGeom prst="rect">
             <a:avLst/>
@@ -21621,7 +21280,7 @@
                 <a:ea typeface="Trebuchet MS" pitchFamily="34" charset="-122"/>
                 <a:cs typeface="Trebuchet MS" pitchFamily="34" charset="-120"/>
               </a:rPr>
-              <a:t>re</a:t>
+              <a:t>flect</a:t>
             </a:r>
             <a:endParaRPr lang="en-US" sz="1300" dirty="0"/>
           </a:p>
@@ -21635,8 +21294,8 @@
         </p:nvSpPr>
         <p:spPr>
           <a:xfrm>
-            <a:off x="3659429" y="2569464"/>
-            <a:ext cx="1581912" cy="201168"/>
+            <a:off x="4370832" y="2569464"/>
+            <a:ext cx="1828800" cy="201168"/>
           </a:xfrm>
           <a:prstGeom prst="rect">
             <a:avLst/>
@@ -21660,7 +21319,7 @@
                 <a:ea typeface="Calibri" pitchFamily="34" charset="-122"/>
                 <a:cs typeface="Calibri" pitchFamily="34" charset="-120"/>
               </a:rPr>
-              <a:t>back</a:t>
+              <a:t>bend or throw</a:t>
             </a:r>
             <a:endParaRPr lang="en-US" sz="850" dirty="0"/>
           </a:p>
@@ -21674,8 +21333,8 @@
         </p:nvSpPr>
         <p:spPr>
           <a:xfrm>
-            <a:off x="5329123" y="2258568"/>
-            <a:ext cx="1581912" cy="292608"/>
+            <a:off x="6519672" y="2258568"/>
+            <a:ext cx="1828800" cy="292608"/>
           </a:xfrm>
           <a:prstGeom prst="rect">
             <a:avLst>
@@ -21708,8 +21367,8 @@
         </p:nvSpPr>
         <p:spPr>
           <a:xfrm>
-            <a:off x="5329123" y="2258568"/>
-            <a:ext cx="1581912" cy="292608"/>
+            <a:off x="6519672" y="2258568"/>
+            <a:ext cx="1828800" cy="292608"/>
           </a:xfrm>
           <a:prstGeom prst="rect">
             <a:avLst/>
@@ -21733,7 +21392,7 @@
                 <a:ea typeface="Trebuchet MS" pitchFamily="34" charset="-122"/>
                 <a:cs typeface="Trebuchet MS" pitchFamily="34" charset="-120"/>
               </a:rPr>
-              <a:t>flect</a:t>
+              <a:t>or</a:t>
             </a:r>
             <a:endParaRPr lang="en-US" sz="1300" dirty="0"/>
           </a:p>
@@ -21747,8 +21406,8 @@
         </p:nvSpPr>
         <p:spPr>
           <a:xfrm>
-            <a:off x="5329123" y="2569464"/>
-            <a:ext cx="1581912" cy="201168"/>
+            <a:off x="6519672" y="2569464"/>
+            <a:ext cx="1828800" cy="201168"/>
           </a:xfrm>
           <a:prstGeom prst="rect">
             <a:avLst/>
@@ -21772,7 +21431,7 @@
                 <a:ea typeface="Calibri" pitchFamily="34" charset="-122"/>
                 <a:cs typeface="Calibri" pitchFamily="34" charset="-120"/>
               </a:rPr>
-              <a:t>bend or throw back</a:t>
+              <a:t>one who or thing that</a:t>
             </a:r>
             <a:endParaRPr lang="en-US" sz="850" dirty="0"/>
           </a:p>
@@ -21786,30 +21445,23 @@
         </p:nvSpPr>
         <p:spPr>
           <a:xfrm>
-            <a:off x="6998818" y="2258568"/>
-            <a:ext cx="1581912" cy="292608"/>
+            <a:off x="365760" y="3273552"/>
+            <a:ext cx="1371600" cy="658368"/>
           </a:xfrm>
           <a:prstGeom prst="rect">
             <a:avLst>
-              <a:gd name="adj" fmla="val 25000"/>
+              <a:gd name="adj" fmla="val 8333"/>
             </a:avLst>
           </a:prstGeom>
           <a:solidFill>
-            <a:srgbClr val="FCE7F3"/>
-          </a:solidFill>
-          <a:ln w="19050">
-            <a:solidFill>
-              <a:srgbClr val="DB2777"/>
-            </a:solidFill>
-            <a:prstDash val="solid"/>
-          </a:ln>
-          <a:effectLst>
-            <a:outerShdw sx="100000" sy="100000" kx="0" ky="0" algn="bl" rotWithShape="0" blurRad="101600" dist="38100" dir="8100000">
-              <a:srgbClr val="000000">
-                <a:alpha val="12000"/>
-              </a:srgbClr>
-            </a:outerShdw>
-          </a:effectLst>
+            <a:srgbClr val="E2E8F0"/>
+          </a:solidFill>
+          <a:ln w="12700">
+            <a:solidFill>
+              <a:srgbClr val="E2E8F0"/>
+            </a:solidFill>
+            <a:prstDash val="solid"/>
+          </a:ln>
         </p:spPr>
       </p:sp>
       <p:sp>
@@ -21820,86 +21472,47 @@
         </p:nvSpPr>
         <p:spPr>
           <a:xfrm>
-            <a:off x="6998818" y="2258568"/>
-            <a:ext cx="1581912" cy="292608"/>
-          </a:xfrm>
-          <a:prstGeom prst="rect">
-            <a:avLst/>
-          </a:prstGeom>
-          <a:noFill/>
-          <a:ln/>
-        </p:spPr>
-        <p:txBody>
-          <a:bodyPr wrap="square" lIns="0" tIns="0" rIns="0" bIns="0" rtlCol="0" anchor="ctr"/>
-          <a:lstStyle/>
-          <a:p>
-            <a:pPr algn="ctr" indent="0" marL="0">
-              <a:buNone/>
-            </a:pPr>
-            <a:r>
-              <a:rPr lang="en-US" sz="1300" b="1" dirty="0">
-                <a:solidFill>
-                  <a:srgbClr val="9D174D"/>
+            <a:off x="365760" y="3273552"/>
+            <a:ext cx="1371600" cy="658368"/>
+          </a:xfrm>
+          <a:prstGeom prst="rect">
+            <a:avLst/>
+          </a:prstGeom>
+          <a:noFill/>
+          <a:ln/>
+        </p:spPr>
+        <p:txBody>
+          <a:bodyPr wrap="square" lIns="0" tIns="0" rIns="0" bIns="0" rtlCol="0" anchor="ctr"/>
+          <a:lstStyle/>
+          <a:p>
+            <a:pPr algn="ctr" indent="0" marL="0">
+              <a:buNone/>
+            </a:pPr>
+            <a:r>
+              <a:rPr lang="en-US" sz="1100" b="1" dirty="0">
+                <a:solidFill>
+                  <a:srgbClr val="475569"/>
                 </a:solidFill>
                 <a:latin typeface="Trebuchet MS" pitchFamily="34" charset="0"/>
                 <a:ea typeface="Trebuchet MS" pitchFamily="34" charset="-122"/>
                 <a:cs typeface="Trebuchet MS" pitchFamily="34" charset="-120"/>
               </a:rPr>
-              <a:t>ion</a:t>
-            </a:r>
-            <a:endParaRPr lang="en-US" sz="1300" dirty="0"/>
-          </a:p>
-        </p:txBody>
-      </p:sp>
-      <p:sp>
-        <p:nvSpPr>
-          <p:cNvPr id="27" name="Text 25"/>
-          <p:cNvSpPr/>
-          <p:nvPr/>
-        </p:nvSpPr>
-        <p:spPr>
-          <a:xfrm>
-            <a:off x="6998818" y="2569464"/>
-            <a:ext cx="1581912" cy="201168"/>
-          </a:xfrm>
-          <a:prstGeom prst="rect">
-            <a:avLst/>
-          </a:prstGeom>
-          <a:noFill/>
-          <a:ln/>
-        </p:spPr>
-        <p:txBody>
-          <a:bodyPr wrap="square" lIns="0" tIns="0" rIns="0" bIns="0" rtlCol="0" anchor="t"/>
-          <a:lstStyle/>
-          <a:p>
-            <a:pPr algn="ctr" indent="0" marL="0">
-              <a:buNone/>
-            </a:pPr>
-            <a:r>
-              <a:rPr lang="en-US" sz="850" dirty="0">
-                <a:solidFill>
-                  <a:srgbClr val="475569"/>
-                </a:solidFill>
-                <a:latin typeface="Calibri" pitchFamily="34" charset="0"/>
-                <a:ea typeface="Calibri" pitchFamily="34" charset="-122"/>
-                <a:cs typeface="Calibri" pitchFamily="34" charset="-120"/>
-              </a:rPr>
-              <a:t>act or result of</a:t>
-            </a:r>
-            <a:endParaRPr lang="en-US" sz="850" dirty="0"/>
-          </a:p>
-        </p:txBody>
-      </p:sp>
-      <p:sp>
-        <p:nvSpPr>
-          <p:cNvPr id="28" name="Shape 26"/>
-          <p:cNvSpPr/>
-          <p:nvPr/>
-        </p:nvSpPr>
-        <p:spPr>
-          <a:xfrm>
-            <a:off x="365760" y="3273552"/>
-            <a:ext cx="1371600" cy="658368"/>
+              <a:t>Syllables</a:t>
+            </a:r>
+            <a:endParaRPr lang="en-US" sz="1100" dirty="0"/>
+          </a:p>
+        </p:txBody>
+      </p:sp>
+      <p:sp>
+        <p:nvSpPr>
+          <p:cNvPr id="27" name="Shape 25"/>
+          <p:cNvSpPr/>
+          <p:nvPr/>
+        </p:nvSpPr>
+        <p:spPr>
+          <a:xfrm>
+            <a:off x="1874520" y="3273552"/>
+            <a:ext cx="6903720" cy="658368"/>
           </a:xfrm>
           <a:prstGeom prst="rect">
             <a:avLst>
@@ -21907,11 +21520,38 @@
             </a:avLst>
           </a:prstGeom>
           <a:solidFill>
-            <a:srgbClr val="E2E8F0"/>
-          </a:solidFill>
-          <a:ln w="12700">
-            <a:solidFill>
-              <a:srgbClr val="E2E8F0"/>
+            <a:srgbClr val="CCFBF1"/>
+          </a:solidFill>
+          <a:ln w="12700">
+            <a:solidFill>
+              <a:srgbClr val="0D9488"/>
+            </a:solidFill>
+            <a:prstDash val="solid"/>
+          </a:ln>
+        </p:spPr>
+      </p:sp>
+      <p:sp>
+        <p:nvSpPr>
+          <p:cNvPr id="28" name="Shape 26"/>
+          <p:cNvSpPr/>
+          <p:nvPr/>
+        </p:nvSpPr>
+        <p:spPr>
+          <a:xfrm>
+            <a:off x="2313432" y="3364992"/>
+            <a:ext cx="1645920" cy="475488"/>
+          </a:xfrm>
+          <a:prstGeom prst="rect">
+            <a:avLst>
+              <a:gd name="adj" fmla="val 9615"/>
+            </a:avLst>
+          </a:prstGeom>
+          <a:solidFill>
+            <a:srgbClr val="FFFFFF"/>
+          </a:solidFill>
+          <a:ln w="12700">
+            <a:solidFill>
+              <a:srgbClr val="0D9488"/>
             </a:solidFill>
             <a:prstDash val="solid"/>
           </a:ln>
@@ -21925,63 +21565,75 @@
         </p:nvSpPr>
         <p:spPr>
           <a:xfrm>
-            <a:off x="365760" y="3273552"/>
-            <a:ext cx="1371600" cy="658368"/>
-          </a:xfrm>
-          <a:prstGeom prst="rect">
-            <a:avLst/>
-          </a:prstGeom>
-          <a:noFill/>
-          <a:ln/>
-        </p:spPr>
-        <p:txBody>
-          <a:bodyPr wrap="square" lIns="0" tIns="0" rIns="0" bIns="0" rtlCol="0" anchor="ctr"/>
-          <a:lstStyle/>
-          <a:p>
-            <a:pPr algn="ctr" indent="0" marL="0">
-              <a:buNone/>
-            </a:pPr>
-            <a:r>
-              <a:rPr lang="en-US" sz="1100" b="1" dirty="0">
-                <a:solidFill>
-                  <a:srgbClr val="475569"/>
+            <a:off x="2313432" y="3364992"/>
+            <a:ext cx="1645920" cy="475488"/>
+          </a:xfrm>
+          <a:prstGeom prst="rect">
+            <a:avLst/>
+          </a:prstGeom>
+          <a:noFill/>
+          <a:ln/>
+        </p:spPr>
+        <p:txBody>
+          <a:bodyPr wrap="square" lIns="0" tIns="0" rIns="0" bIns="0" rtlCol="0" anchor="ctr"/>
+          <a:lstStyle/>
+          <a:p>
+            <a:pPr algn="ctr" indent="0" marL="0">
+              <a:buNone/>
+            </a:pPr>
+            <a:r>
+              <a:rPr lang="en-US" sz="1400" b="1" dirty="0">
+                <a:solidFill>
+                  <a:srgbClr val="0D9488"/>
                 </a:solidFill>
                 <a:latin typeface="Trebuchet MS" pitchFamily="34" charset="0"/>
                 <a:ea typeface="Trebuchet MS" pitchFamily="34" charset="-122"/>
                 <a:cs typeface="Trebuchet MS" pitchFamily="34" charset="-120"/>
               </a:rPr>
-              <a:t>Syllables</a:t>
-            </a:r>
-            <a:endParaRPr lang="en-US" sz="1100" dirty="0"/>
-          </a:p>
-        </p:txBody>
-      </p:sp>
-      <p:sp>
-        <p:nvSpPr>
-          <p:cNvPr id="30" name="Shape 28"/>
-          <p:cNvSpPr/>
-          <p:nvPr/>
-        </p:nvSpPr>
-        <p:spPr>
-          <a:xfrm>
-            <a:off x="1874520" y="3273552"/>
-            <a:ext cx="6903720" cy="658368"/>
-          </a:xfrm>
-          <a:prstGeom prst="rect">
-            <a:avLst>
-              <a:gd name="adj" fmla="val 8333"/>
-            </a:avLst>
-          </a:prstGeom>
-          <a:solidFill>
-            <a:srgbClr val="CCFBF1"/>
-          </a:solidFill>
-          <a:ln w="12700">
-            <a:solidFill>
-              <a:srgbClr val="0D9488"/>
-            </a:solidFill>
-            <a:prstDash val="solid"/>
-          </a:ln>
-        </p:spPr>
+              <a:t>re</a:t>
+            </a:r>
+            <a:endParaRPr lang="en-US" sz="1400" dirty="0"/>
+          </a:p>
+        </p:txBody>
+      </p:sp>
+      <p:sp>
+        <p:nvSpPr>
+          <p:cNvPr id="30" name="Text 28"/>
+          <p:cNvSpPr/>
+          <p:nvPr/>
+        </p:nvSpPr>
+        <p:spPr>
+          <a:xfrm>
+            <a:off x="3959352" y="3364992"/>
+            <a:ext cx="411480" cy="475488"/>
+          </a:xfrm>
+          <a:prstGeom prst="rect">
+            <a:avLst/>
+          </a:prstGeom>
+          <a:noFill/>
+          <a:ln/>
+        </p:spPr>
+        <p:txBody>
+          <a:bodyPr wrap="square" lIns="0" tIns="0" rIns="0" bIns="0" rtlCol="0" anchor="ctr"/>
+          <a:lstStyle/>
+          <a:p>
+            <a:pPr algn="ctr" indent="0" marL="0">
+              <a:buNone/>
+            </a:pPr>
+            <a:r>
+              <a:rPr lang="en-US" sz="1600" b="1" dirty="0">
+                <a:solidFill>
+                  <a:srgbClr val="0D9488"/>
+                </a:solidFill>
+                <a:latin typeface="Trebuchet MS" pitchFamily="34" charset="0"/>
+                <a:ea typeface="Trebuchet MS" pitchFamily="34" charset="-122"/>
+                <a:cs typeface="Trebuchet MS" pitchFamily="34" charset="-120"/>
+              </a:rPr>
+              <a:t>·</a:t>
+            </a:r>
+            <a:endParaRPr lang="en-US" sz="1600" dirty="0"/>
+          </a:p>
+        </p:txBody>
       </p:sp>
       <p:sp>
         <p:nvSpPr>
@@ -21991,8 +21643,8 @@
         </p:nvSpPr>
         <p:spPr>
           <a:xfrm>
-            <a:off x="1975104" y="3364992"/>
-            <a:ext cx="1554480" cy="475488"/>
+            <a:off x="4370832" y="3364992"/>
+            <a:ext cx="1645920" cy="475488"/>
           </a:xfrm>
           <a:prstGeom prst="rect">
             <a:avLst>
@@ -22018,8 +21670,8 @@
         </p:nvSpPr>
         <p:spPr>
           <a:xfrm>
-            <a:off x="1975104" y="3364992"/>
-            <a:ext cx="1554480" cy="475488"/>
+            <a:off x="4370832" y="3364992"/>
+            <a:ext cx="1645920" cy="475488"/>
           </a:xfrm>
           <a:prstGeom prst="rect">
             <a:avLst/>
@@ -22043,7 +21695,7 @@
                 <a:ea typeface="Trebuchet MS" pitchFamily="34" charset="-122"/>
                 <a:cs typeface="Trebuchet MS" pitchFamily="34" charset="-120"/>
               </a:rPr>
-              <a:t>self</a:t>
+              <a:t>flec</a:t>
             </a:r>
             <a:endParaRPr lang="en-US" sz="1400" dirty="0"/>
           </a:p>
@@ -22057,8 +21709,8 @@
         </p:nvSpPr>
         <p:spPr>
           <a:xfrm>
-            <a:off x="3529584" y="3364992"/>
-            <a:ext cx="73152" cy="475488"/>
+            <a:off x="6016752" y="3364992"/>
+            <a:ext cx="411480" cy="475488"/>
           </a:xfrm>
           <a:prstGeom prst="rect">
             <a:avLst/>
@@ -22096,8 +21748,8 @@
         </p:nvSpPr>
         <p:spPr>
           <a:xfrm>
-            <a:off x="3602736" y="3364992"/>
-            <a:ext cx="1554480" cy="475488"/>
+            <a:off x="6428232" y="3364992"/>
+            <a:ext cx="1645920" cy="475488"/>
           </a:xfrm>
           <a:prstGeom prst="rect">
             <a:avLst>
@@ -22123,8 +21775,8 @@
         </p:nvSpPr>
         <p:spPr>
           <a:xfrm>
-            <a:off x="3602736" y="3364992"/>
-            <a:ext cx="1554480" cy="475488"/>
+            <a:off x="6428232" y="3364992"/>
+            <a:ext cx="1645920" cy="475488"/>
           </a:xfrm>
           <a:prstGeom prst="rect">
             <a:avLst/>
@@ -22148,7 +21800,7 @@
                 <a:ea typeface="Trebuchet MS" pitchFamily="34" charset="-122"/>
                 <a:cs typeface="Trebuchet MS" pitchFamily="34" charset="-120"/>
               </a:rPr>
-              <a:t>re</a:t>
+              <a:t>tor</a:t>
             </a:r>
             <a:endParaRPr lang="en-US" sz="1400" dirty="0"/>
           </a:p>
@@ -22156,224 +21808,80 @@
       </p:sp>
       <p:sp>
         <p:nvSpPr>
-          <p:cNvPr id="36" name="Text 34"/>
-          <p:cNvSpPr/>
-          <p:nvPr/>
-        </p:nvSpPr>
-        <p:spPr>
-          <a:xfrm>
-            <a:off x="5157216" y="3364992"/>
-            <a:ext cx="73152" cy="475488"/>
-          </a:xfrm>
-          <a:prstGeom prst="rect">
-            <a:avLst/>
-          </a:prstGeom>
-          <a:noFill/>
-          <a:ln/>
-        </p:spPr>
-        <p:txBody>
-          <a:bodyPr wrap="square" lIns="0" tIns="0" rIns="0" bIns="0" rtlCol="0" anchor="ctr"/>
-          <a:lstStyle/>
-          <a:p>
-            <a:pPr algn="ctr" indent="0" marL="0">
-              <a:buNone/>
-            </a:pPr>
-            <a:r>
-              <a:rPr lang="en-US" sz="1600" b="1" dirty="0">
-                <a:solidFill>
-                  <a:srgbClr val="0D9488"/>
+          <p:cNvPr id="36" name="Shape 34"/>
+          <p:cNvSpPr/>
+          <p:nvPr/>
+        </p:nvSpPr>
+        <p:spPr>
+          <a:xfrm>
+            <a:off x="365760" y="4096512"/>
+            <a:ext cx="1371600" cy="804672"/>
+          </a:xfrm>
+          <a:prstGeom prst="rect">
+            <a:avLst>
+              <a:gd name="adj" fmla="val 6818"/>
+            </a:avLst>
+          </a:prstGeom>
+          <a:solidFill>
+            <a:srgbClr val="E2E8F0"/>
+          </a:solidFill>
+          <a:ln w="12700">
+            <a:solidFill>
+              <a:srgbClr val="E2E8F0"/>
+            </a:solidFill>
+            <a:prstDash val="solid"/>
+          </a:ln>
+        </p:spPr>
+      </p:sp>
+      <p:sp>
+        <p:nvSpPr>
+          <p:cNvPr id="37" name="Text 35"/>
+          <p:cNvSpPr/>
+          <p:nvPr/>
+        </p:nvSpPr>
+        <p:spPr>
+          <a:xfrm>
+            <a:off x="365760" y="4096512"/>
+            <a:ext cx="1371600" cy="804672"/>
+          </a:xfrm>
+          <a:prstGeom prst="rect">
+            <a:avLst/>
+          </a:prstGeom>
+          <a:noFill/>
+          <a:ln/>
+        </p:spPr>
+        <p:txBody>
+          <a:bodyPr wrap="square" lIns="0" tIns="0" rIns="0" bIns="0" rtlCol="0" anchor="ctr"/>
+          <a:lstStyle/>
+          <a:p>
+            <a:pPr algn="ctr" indent="0" marL="0">
+              <a:buNone/>
+            </a:pPr>
+            <a:r>
+              <a:rPr lang="en-US" sz="1100" b="1" dirty="0">
+                <a:solidFill>
+                  <a:srgbClr val="475569"/>
                 </a:solidFill>
                 <a:latin typeface="Trebuchet MS" pitchFamily="34" charset="0"/>
                 <a:ea typeface="Trebuchet MS" pitchFamily="34" charset="-122"/>
                 <a:cs typeface="Trebuchet MS" pitchFamily="34" charset="-120"/>
               </a:rPr>
-              <a:t>·</a:t>
-            </a:r>
-            <a:endParaRPr lang="en-US" sz="1600" dirty="0"/>
-          </a:p>
-        </p:txBody>
-      </p:sp>
-      <p:sp>
-        <p:nvSpPr>
-          <p:cNvPr id="37" name="Shape 35"/>
-          <p:cNvSpPr/>
-          <p:nvPr/>
-        </p:nvSpPr>
-        <p:spPr>
-          <a:xfrm>
-            <a:off x="5230368" y="3364992"/>
-            <a:ext cx="1554480" cy="475488"/>
-          </a:xfrm>
-          <a:prstGeom prst="rect">
-            <a:avLst>
-              <a:gd name="adj" fmla="val 9615"/>
-            </a:avLst>
-          </a:prstGeom>
-          <a:solidFill>
-            <a:srgbClr val="FFFFFF"/>
-          </a:solidFill>
-          <a:ln w="12700">
-            <a:solidFill>
-              <a:srgbClr val="0D9488"/>
-            </a:solidFill>
-            <a:prstDash val="solid"/>
-          </a:ln>
-        </p:spPr>
-      </p:sp>
-      <p:sp>
-        <p:nvSpPr>
-          <p:cNvPr id="38" name="Text 36"/>
-          <p:cNvSpPr/>
-          <p:nvPr/>
-        </p:nvSpPr>
-        <p:spPr>
-          <a:xfrm>
-            <a:off x="5230368" y="3364992"/>
-            <a:ext cx="1554480" cy="475488"/>
-          </a:xfrm>
-          <a:prstGeom prst="rect">
-            <a:avLst/>
-          </a:prstGeom>
-          <a:noFill/>
-          <a:ln/>
-        </p:spPr>
-        <p:txBody>
-          <a:bodyPr wrap="square" lIns="0" tIns="0" rIns="0" bIns="0" rtlCol="0" anchor="ctr"/>
-          <a:lstStyle/>
-          <a:p>
-            <a:pPr algn="ctr" indent="0" marL="0">
-              <a:buNone/>
-            </a:pPr>
-            <a:r>
-              <a:rPr lang="en-US" sz="1400" b="1" dirty="0">
-                <a:solidFill>
-                  <a:srgbClr val="0D9488"/>
-                </a:solidFill>
-                <a:latin typeface="Trebuchet MS" pitchFamily="34" charset="0"/>
-                <a:ea typeface="Trebuchet MS" pitchFamily="34" charset="-122"/>
-                <a:cs typeface="Trebuchet MS" pitchFamily="34" charset="-120"/>
-              </a:rPr>
-              <a:t>flec</a:t>
-            </a:r>
-            <a:endParaRPr lang="en-US" sz="1400" dirty="0"/>
-          </a:p>
-        </p:txBody>
-      </p:sp>
-      <p:sp>
-        <p:nvSpPr>
-          <p:cNvPr id="39" name="Text 37"/>
-          <p:cNvSpPr/>
-          <p:nvPr/>
-        </p:nvSpPr>
-        <p:spPr>
-          <a:xfrm>
-            <a:off x="6784848" y="3364992"/>
-            <a:ext cx="73152" cy="475488"/>
-          </a:xfrm>
-          <a:prstGeom prst="rect">
-            <a:avLst/>
-          </a:prstGeom>
-          <a:noFill/>
-          <a:ln/>
-        </p:spPr>
-        <p:txBody>
-          <a:bodyPr wrap="square" lIns="0" tIns="0" rIns="0" bIns="0" rtlCol="0" anchor="ctr"/>
-          <a:lstStyle/>
-          <a:p>
-            <a:pPr algn="ctr" indent="0" marL="0">
-              <a:buNone/>
-            </a:pPr>
-            <a:r>
-              <a:rPr lang="en-US" sz="1600" b="1" dirty="0">
-                <a:solidFill>
-                  <a:srgbClr val="0D9488"/>
-                </a:solidFill>
-                <a:latin typeface="Trebuchet MS" pitchFamily="34" charset="0"/>
-                <a:ea typeface="Trebuchet MS" pitchFamily="34" charset="-122"/>
-                <a:cs typeface="Trebuchet MS" pitchFamily="34" charset="-120"/>
-              </a:rPr>
-              <a:t>·</a:t>
-            </a:r>
-            <a:endParaRPr lang="en-US" sz="1600" dirty="0"/>
-          </a:p>
-        </p:txBody>
-      </p:sp>
-      <p:sp>
-        <p:nvSpPr>
-          <p:cNvPr id="40" name="Shape 38"/>
-          <p:cNvSpPr/>
-          <p:nvPr/>
-        </p:nvSpPr>
-        <p:spPr>
-          <a:xfrm>
-            <a:off x="6858000" y="3364992"/>
-            <a:ext cx="1554480" cy="475488"/>
-          </a:xfrm>
-          <a:prstGeom prst="rect">
-            <a:avLst>
-              <a:gd name="adj" fmla="val 9615"/>
-            </a:avLst>
-          </a:prstGeom>
-          <a:solidFill>
-            <a:srgbClr val="FFFFFF"/>
-          </a:solidFill>
-          <a:ln w="12700">
-            <a:solidFill>
-              <a:srgbClr val="0D9488"/>
-            </a:solidFill>
-            <a:prstDash val="solid"/>
-          </a:ln>
-        </p:spPr>
-      </p:sp>
-      <p:sp>
-        <p:nvSpPr>
-          <p:cNvPr id="41" name="Text 39"/>
-          <p:cNvSpPr/>
-          <p:nvPr/>
-        </p:nvSpPr>
-        <p:spPr>
-          <a:xfrm>
-            <a:off x="6858000" y="3364992"/>
-            <a:ext cx="1554480" cy="475488"/>
-          </a:xfrm>
-          <a:prstGeom prst="rect">
-            <a:avLst/>
-          </a:prstGeom>
-          <a:noFill/>
-          <a:ln/>
-        </p:spPr>
-        <p:txBody>
-          <a:bodyPr wrap="square" lIns="0" tIns="0" rIns="0" bIns="0" rtlCol="0" anchor="ctr"/>
-          <a:lstStyle/>
-          <a:p>
-            <a:pPr algn="ctr" indent="0" marL="0">
-              <a:buNone/>
-            </a:pPr>
-            <a:r>
-              <a:rPr lang="en-US" sz="1400" b="1" dirty="0">
-                <a:solidFill>
-                  <a:srgbClr val="0D9488"/>
-                </a:solidFill>
-                <a:latin typeface="Trebuchet MS" pitchFamily="34" charset="0"/>
-                <a:ea typeface="Trebuchet MS" pitchFamily="34" charset="-122"/>
-                <a:cs typeface="Trebuchet MS" pitchFamily="34" charset="-120"/>
-              </a:rPr>
-              <a:t>tion</a:t>
-            </a:r>
-            <a:endParaRPr lang="en-US" sz="1400" dirty="0"/>
-          </a:p>
-        </p:txBody>
-      </p:sp>
-      <p:sp>
-        <p:nvSpPr>
-          <p:cNvPr id="42" name="Shape 40"/>
-          <p:cNvSpPr/>
-          <p:nvPr/>
-        </p:nvSpPr>
-        <p:spPr>
-          <a:xfrm>
-            <a:off x="365760" y="4096512"/>
-            <a:ext cx="1371600" cy="804672"/>
+              <a:t>Phonemes</a:t>
+            </a:r>
+            <a:endParaRPr lang="en-US" sz="1100" dirty="0"/>
+          </a:p>
+        </p:txBody>
+      </p:sp>
+      <p:sp>
+        <p:nvSpPr>
+          <p:cNvPr id="38" name="Shape 36"/>
+          <p:cNvSpPr/>
+          <p:nvPr/>
+        </p:nvSpPr>
+        <p:spPr>
+          <a:xfrm>
+            <a:off x="1874520" y="4096512"/>
+            <a:ext cx="6903720" cy="804672"/>
           </a:xfrm>
           <a:prstGeom prst="rect">
             <a:avLst>
@@ -22381,85 +21889,19 @@
             </a:avLst>
           </a:prstGeom>
           <a:solidFill>
-            <a:srgbClr val="E2E8F0"/>
+            <a:srgbClr val="F8FAFC"/>
           </a:solidFill>
           <a:ln w="12700">
             <a:solidFill>
               <a:srgbClr val="E2E8F0"/>
             </a:solidFill>
-            <a:prstDash val="solid"/>
-          </a:ln>
-        </p:spPr>
-      </p:sp>
-      <p:sp>
-        <p:nvSpPr>
-          <p:cNvPr id="43" name="Text 41"/>
-          <p:cNvSpPr/>
-          <p:nvPr/>
-        </p:nvSpPr>
-        <p:spPr>
-          <a:xfrm>
-            <a:off x="365760" y="4096512"/>
-            <a:ext cx="1371600" cy="804672"/>
-          </a:xfrm>
-          <a:prstGeom prst="rect">
-            <a:avLst/>
-          </a:prstGeom>
-          <a:noFill/>
-          <a:ln/>
-        </p:spPr>
-        <p:txBody>
-          <a:bodyPr wrap="square" lIns="0" tIns="0" rIns="0" bIns="0" rtlCol="0" anchor="ctr"/>
-          <a:lstStyle/>
-          <a:p>
-            <a:pPr algn="ctr" indent="0" marL="0">
-              <a:buNone/>
-            </a:pPr>
-            <a:r>
-              <a:rPr lang="en-US" sz="1100" b="1" dirty="0">
-                <a:solidFill>
-                  <a:srgbClr val="475569"/>
-                </a:solidFill>
-                <a:latin typeface="Trebuchet MS" pitchFamily="34" charset="0"/>
-                <a:ea typeface="Trebuchet MS" pitchFamily="34" charset="-122"/>
-                <a:cs typeface="Trebuchet MS" pitchFamily="34" charset="-120"/>
-              </a:rPr>
-              <a:t>Phonemes</a:t>
-            </a:r>
-            <a:endParaRPr lang="en-US" sz="1100" dirty="0"/>
-          </a:p>
-        </p:txBody>
-      </p:sp>
-      <p:sp>
-        <p:nvSpPr>
-          <p:cNvPr id="44" name="Shape 42"/>
-          <p:cNvSpPr/>
-          <p:nvPr/>
-        </p:nvSpPr>
-        <p:spPr>
-          <a:xfrm>
-            <a:off x="1874520" y="4096512"/>
-            <a:ext cx="6903720" cy="804672"/>
-          </a:xfrm>
-          <a:prstGeom prst="rect">
-            <a:avLst>
-              <a:gd name="adj" fmla="val 6818"/>
-            </a:avLst>
-          </a:prstGeom>
-          <a:solidFill>
-            <a:srgbClr val="F8FAFC"/>
-          </a:solidFill>
-          <a:ln w="12700">
-            <a:solidFill>
-              <a:srgbClr val="E2E8F0"/>
-            </a:solidFill>
             <a:prstDash val="dash"/>
           </a:ln>
         </p:spPr>
       </p:sp>
       <p:sp>
         <p:nvSpPr>
-          <p:cNvPr id="45" name="Text 43"/>
+          <p:cNvPr id="39" name="Text 37"/>
           <p:cNvSpPr/>
           <p:nvPr/>
         </p:nvSpPr>
@@ -22921,7 +22363,7 @@
                 <a:ea typeface="Trebuchet MS" pitchFamily="34" charset="-122"/>
                 <a:cs typeface="Trebuchet MS" pitchFamily="34" charset="-120"/>
               </a:rPr>
-              <a:t>self-reflection</a:t>
+              <a:t>reflector</a:t>
             </a:r>
             <a:endParaRPr lang="en-US" sz="2800" dirty="0"/>
           </a:p>
@@ -23001,8 +22443,8 @@
         </p:nvSpPr>
         <p:spPr>
           <a:xfrm>
-            <a:off x="1989734" y="2258568"/>
-            <a:ext cx="1581912" cy="292608"/>
+            <a:off x="2221992" y="2258568"/>
+            <a:ext cx="1828800" cy="292608"/>
           </a:xfrm>
           <a:prstGeom prst="rect">
             <a:avLst>
@@ -23035,8 +22477,8 @@
         </p:nvSpPr>
         <p:spPr>
           <a:xfrm>
-            <a:off x="1989734" y="2258568"/>
-            <a:ext cx="1581912" cy="292608"/>
+            <a:off x="2221992" y="2258568"/>
+            <a:ext cx="1828800" cy="292608"/>
           </a:xfrm>
           <a:prstGeom prst="rect">
             <a:avLst/>
@@ -23060,7 +22502,7 @@
                 <a:ea typeface="Trebuchet MS" pitchFamily="34" charset="-122"/>
                 <a:cs typeface="Trebuchet MS" pitchFamily="34" charset="-120"/>
               </a:rPr>
-              <a:t>self</a:t>
+              <a:t>re</a:t>
             </a:r>
             <a:endParaRPr lang="en-US" sz="1300" dirty="0"/>
           </a:p>
@@ -23074,8 +22516,8 @@
         </p:nvSpPr>
         <p:spPr>
           <a:xfrm>
-            <a:off x="1989734" y="2569464"/>
-            <a:ext cx="1581912" cy="201168"/>
+            <a:off x="2221992" y="2569464"/>
+            <a:ext cx="1828800" cy="201168"/>
           </a:xfrm>
           <a:prstGeom prst="rect">
             <a:avLst/>
@@ -23099,7 +22541,7 @@
                 <a:ea typeface="Calibri" pitchFamily="34" charset="-122"/>
                 <a:cs typeface="Calibri" pitchFamily="34" charset="-120"/>
               </a:rPr>
-              <a:t>oneself</a:t>
+              <a:t>back</a:t>
             </a:r>
             <a:endParaRPr lang="en-US" sz="850" dirty="0"/>
           </a:p>
@@ -23113,8 +22555,8 @@
         </p:nvSpPr>
         <p:spPr>
           <a:xfrm>
-            <a:off x="3659429" y="2258568"/>
-            <a:ext cx="1581912" cy="292608"/>
+            <a:off x="4370832" y="2258568"/>
+            <a:ext cx="1828800" cy="292608"/>
           </a:xfrm>
           <a:prstGeom prst="rect">
             <a:avLst>
@@ -23147,8 +22589,8 @@
         </p:nvSpPr>
         <p:spPr>
           <a:xfrm>
-            <a:off x="3659429" y="2258568"/>
-            <a:ext cx="1581912" cy="292608"/>
+            <a:off x="4370832" y="2258568"/>
+            <a:ext cx="1828800" cy="292608"/>
           </a:xfrm>
           <a:prstGeom prst="rect">
             <a:avLst/>
@@ -23172,7 +22614,7 @@
                 <a:ea typeface="Trebuchet MS" pitchFamily="34" charset="-122"/>
                 <a:cs typeface="Trebuchet MS" pitchFamily="34" charset="-120"/>
               </a:rPr>
-              <a:t>re</a:t>
+              <a:t>flect</a:t>
             </a:r>
             <a:endParaRPr lang="en-US" sz="1300" dirty="0"/>
           </a:p>
@@ -23186,8 +22628,8 @@
         </p:nvSpPr>
         <p:spPr>
           <a:xfrm>
-            <a:off x="3659429" y="2569464"/>
-            <a:ext cx="1581912" cy="201168"/>
+            <a:off x="4370832" y="2569464"/>
+            <a:ext cx="1828800" cy="201168"/>
           </a:xfrm>
           <a:prstGeom prst="rect">
             <a:avLst/>
@@ -23211,7 +22653,7 @@
                 <a:ea typeface="Calibri" pitchFamily="34" charset="-122"/>
                 <a:cs typeface="Calibri" pitchFamily="34" charset="-120"/>
               </a:rPr>
-              <a:t>back</a:t>
+              <a:t>bend or throw</a:t>
             </a:r>
             <a:endParaRPr lang="en-US" sz="850" dirty="0"/>
           </a:p>
@@ -23225,8 +22667,8 @@
         </p:nvSpPr>
         <p:spPr>
           <a:xfrm>
-            <a:off x="5329123" y="2258568"/>
-            <a:ext cx="1581912" cy="292608"/>
+            <a:off x="6519672" y="2258568"/>
+            <a:ext cx="1828800" cy="292608"/>
           </a:xfrm>
           <a:prstGeom prst="rect">
             <a:avLst>
@@ -23259,8 +22701,8 @@
         </p:nvSpPr>
         <p:spPr>
           <a:xfrm>
-            <a:off x="5329123" y="2258568"/>
-            <a:ext cx="1581912" cy="292608"/>
+            <a:off x="6519672" y="2258568"/>
+            <a:ext cx="1828800" cy="292608"/>
           </a:xfrm>
           <a:prstGeom prst="rect">
             <a:avLst/>
@@ -23284,7 +22726,7 @@
                 <a:ea typeface="Trebuchet MS" pitchFamily="34" charset="-122"/>
                 <a:cs typeface="Trebuchet MS" pitchFamily="34" charset="-120"/>
               </a:rPr>
-              <a:t>flect</a:t>
+              <a:t>or</a:t>
             </a:r>
             <a:endParaRPr lang="en-US" sz="1300" dirty="0"/>
           </a:p>
@@ -23298,8 +22740,8 @@
         </p:nvSpPr>
         <p:spPr>
           <a:xfrm>
-            <a:off x="5329123" y="2569464"/>
-            <a:ext cx="1581912" cy="201168"/>
+            <a:off x="6519672" y="2569464"/>
+            <a:ext cx="1828800" cy="201168"/>
           </a:xfrm>
           <a:prstGeom prst="rect">
             <a:avLst/>
@@ -23323,7 +22765,7 @@
                 <a:ea typeface="Calibri" pitchFamily="34" charset="-122"/>
                 <a:cs typeface="Calibri" pitchFamily="34" charset="-120"/>
               </a:rPr>
-              <a:t>bend or throw back</a:t>
+              <a:t>one who or thing that</a:t>
             </a:r>
             <a:endParaRPr lang="en-US" sz="850" dirty="0"/>
           </a:p>
@@ -23337,30 +22779,23 @@
         </p:nvSpPr>
         <p:spPr>
           <a:xfrm>
-            <a:off x="6998818" y="2258568"/>
-            <a:ext cx="1581912" cy="292608"/>
+            <a:off x="365760" y="3273552"/>
+            <a:ext cx="1371600" cy="658368"/>
           </a:xfrm>
           <a:prstGeom prst="rect">
             <a:avLst>
-              <a:gd name="adj" fmla="val 25000"/>
+              <a:gd name="adj" fmla="val 8333"/>
             </a:avLst>
           </a:prstGeom>
           <a:solidFill>
-            <a:srgbClr val="FCE7F3"/>
-          </a:solidFill>
-          <a:ln w="19050">
-            <a:solidFill>
-              <a:srgbClr val="DB2777"/>
-            </a:solidFill>
-            <a:prstDash val="solid"/>
-          </a:ln>
-          <a:effectLst>
-            <a:outerShdw sx="100000" sy="100000" kx="0" ky="0" algn="bl" rotWithShape="0" blurRad="101600" dist="38100" dir="8100000">
-              <a:srgbClr val="000000">
-                <a:alpha val="12000"/>
-              </a:srgbClr>
-            </a:outerShdw>
-          </a:effectLst>
+            <a:srgbClr val="E2E8F0"/>
+          </a:solidFill>
+          <a:ln w="12700">
+            <a:solidFill>
+              <a:srgbClr val="E2E8F0"/>
+            </a:solidFill>
+            <a:prstDash val="solid"/>
+          </a:ln>
         </p:spPr>
       </p:sp>
       <p:sp>
@@ -23371,47 +22806,773 @@
         </p:nvSpPr>
         <p:spPr>
           <a:xfrm>
-            <a:off x="6998818" y="2258568"/>
-            <a:ext cx="1581912" cy="292608"/>
-          </a:xfrm>
-          <a:prstGeom prst="rect">
-            <a:avLst/>
-          </a:prstGeom>
-          <a:noFill/>
-          <a:ln/>
-        </p:spPr>
-        <p:txBody>
-          <a:bodyPr wrap="square" lIns="0" tIns="0" rIns="0" bIns="0" rtlCol="0" anchor="ctr"/>
-          <a:lstStyle/>
-          <a:p>
-            <a:pPr algn="ctr" indent="0" marL="0">
-              <a:buNone/>
-            </a:pPr>
-            <a:r>
-              <a:rPr lang="en-US" sz="1300" b="1" dirty="0">
-                <a:solidFill>
-                  <a:srgbClr val="9D174D"/>
+            <a:off x="365760" y="3273552"/>
+            <a:ext cx="1371600" cy="658368"/>
+          </a:xfrm>
+          <a:prstGeom prst="rect">
+            <a:avLst/>
+          </a:prstGeom>
+          <a:noFill/>
+          <a:ln/>
+        </p:spPr>
+        <p:txBody>
+          <a:bodyPr wrap="square" lIns="0" tIns="0" rIns="0" bIns="0" rtlCol="0" anchor="ctr"/>
+          <a:lstStyle/>
+          <a:p>
+            <a:pPr algn="ctr" indent="0" marL="0">
+              <a:buNone/>
+            </a:pPr>
+            <a:r>
+              <a:rPr lang="en-US" sz="1100" b="1" dirty="0">
+                <a:solidFill>
+                  <a:srgbClr val="475569"/>
                 </a:solidFill>
                 <a:latin typeface="Trebuchet MS" pitchFamily="34" charset="0"/>
                 <a:ea typeface="Trebuchet MS" pitchFamily="34" charset="-122"/>
                 <a:cs typeface="Trebuchet MS" pitchFamily="34" charset="-120"/>
               </a:rPr>
-              <a:t>ion</a:t>
-            </a:r>
-            <a:endParaRPr lang="en-US" sz="1300" dirty="0"/>
-          </a:p>
-        </p:txBody>
-      </p:sp>
-      <p:sp>
-        <p:nvSpPr>
-          <p:cNvPr id="27" name="Text 25"/>
-          <p:cNvSpPr/>
-          <p:nvPr/>
-        </p:nvSpPr>
-        <p:spPr>
-          <a:xfrm>
-            <a:off x="6998818" y="2569464"/>
-            <a:ext cx="1581912" cy="201168"/>
+              <a:t>Syllables</a:t>
+            </a:r>
+            <a:endParaRPr lang="en-US" sz="1100" dirty="0"/>
+          </a:p>
+        </p:txBody>
+      </p:sp>
+      <p:sp>
+        <p:nvSpPr>
+          <p:cNvPr id="27" name="Shape 25"/>
+          <p:cNvSpPr/>
+          <p:nvPr/>
+        </p:nvSpPr>
+        <p:spPr>
+          <a:xfrm>
+            <a:off x="1874520" y="3273552"/>
+            <a:ext cx="6903720" cy="658368"/>
+          </a:xfrm>
+          <a:prstGeom prst="rect">
+            <a:avLst>
+              <a:gd name="adj" fmla="val 8333"/>
+            </a:avLst>
+          </a:prstGeom>
+          <a:solidFill>
+            <a:srgbClr val="CCFBF1"/>
+          </a:solidFill>
+          <a:ln w="12700">
+            <a:solidFill>
+              <a:srgbClr val="0D9488"/>
+            </a:solidFill>
+            <a:prstDash val="solid"/>
+          </a:ln>
+        </p:spPr>
+      </p:sp>
+      <p:sp>
+        <p:nvSpPr>
+          <p:cNvPr id="28" name="Shape 26"/>
+          <p:cNvSpPr/>
+          <p:nvPr/>
+        </p:nvSpPr>
+        <p:spPr>
+          <a:xfrm>
+            <a:off x="2313432" y="3364992"/>
+            <a:ext cx="1645920" cy="475488"/>
+          </a:xfrm>
+          <a:prstGeom prst="rect">
+            <a:avLst>
+              <a:gd name="adj" fmla="val 9615"/>
+            </a:avLst>
+          </a:prstGeom>
+          <a:solidFill>
+            <a:srgbClr val="FFFFFF"/>
+          </a:solidFill>
+          <a:ln w="12700">
+            <a:solidFill>
+              <a:srgbClr val="0D9488"/>
+            </a:solidFill>
+            <a:prstDash val="solid"/>
+          </a:ln>
+        </p:spPr>
+      </p:sp>
+      <p:sp>
+        <p:nvSpPr>
+          <p:cNvPr id="29" name="Text 27"/>
+          <p:cNvSpPr/>
+          <p:nvPr/>
+        </p:nvSpPr>
+        <p:spPr>
+          <a:xfrm>
+            <a:off x="2313432" y="3364992"/>
+            <a:ext cx="1645920" cy="475488"/>
+          </a:xfrm>
+          <a:prstGeom prst="rect">
+            <a:avLst/>
+          </a:prstGeom>
+          <a:noFill/>
+          <a:ln/>
+        </p:spPr>
+        <p:txBody>
+          <a:bodyPr wrap="square" lIns="0" tIns="0" rIns="0" bIns="0" rtlCol="0" anchor="ctr"/>
+          <a:lstStyle/>
+          <a:p>
+            <a:pPr algn="ctr" indent="0" marL="0">
+              <a:buNone/>
+            </a:pPr>
+            <a:r>
+              <a:rPr lang="en-US" sz="1400" b="1" dirty="0">
+                <a:solidFill>
+                  <a:srgbClr val="0D9488"/>
+                </a:solidFill>
+                <a:latin typeface="Trebuchet MS" pitchFamily="34" charset="0"/>
+                <a:ea typeface="Trebuchet MS" pitchFamily="34" charset="-122"/>
+                <a:cs typeface="Trebuchet MS" pitchFamily="34" charset="-120"/>
+              </a:rPr>
+              <a:t>re</a:t>
+            </a:r>
+            <a:endParaRPr lang="en-US" sz="1400" dirty="0"/>
+          </a:p>
+        </p:txBody>
+      </p:sp>
+      <p:sp>
+        <p:nvSpPr>
+          <p:cNvPr id="30" name="Text 28"/>
+          <p:cNvSpPr/>
+          <p:nvPr/>
+        </p:nvSpPr>
+        <p:spPr>
+          <a:xfrm>
+            <a:off x="3959352" y="3364992"/>
+            <a:ext cx="411480" cy="475488"/>
+          </a:xfrm>
+          <a:prstGeom prst="rect">
+            <a:avLst/>
+          </a:prstGeom>
+          <a:noFill/>
+          <a:ln/>
+        </p:spPr>
+        <p:txBody>
+          <a:bodyPr wrap="square" lIns="0" tIns="0" rIns="0" bIns="0" rtlCol="0" anchor="ctr"/>
+          <a:lstStyle/>
+          <a:p>
+            <a:pPr algn="ctr" indent="0" marL="0">
+              <a:buNone/>
+            </a:pPr>
+            <a:r>
+              <a:rPr lang="en-US" sz="1600" b="1" dirty="0">
+                <a:solidFill>
+                  <a:srgbClr val="0D9488"/>
+                </a:solidFill>
+                <a:latin typeface="Trebuchet MS" pitchFamily="34" charset="0"/>
+                <a:ea typeface="Trebuchet MS" pitchFamily="34" charset="-122"/>
+                <a:cs typeface="Trebuchet MS" pitchFamily="34" charset="-120"/>
+              </a:rPr>
+              <a:t>·</a:t>
+            </a:r>
+            <a:endParaRPr lang="en-US" sz="1600" dirty="0"/>
+          </a:p>
+        </p:txBody>
+      </p:sp>
+      <p:sp>
+        <p:nvSpPr>
+          <p:cNvPr id="31" name="Shape 29"/>
+          <p:cNvSpPr/>
+          <p:nvPr/>
+        </p:nvSpPr>
+        <p:spPr>
+          <a:xfrm>
+            <a:off x="4370832" y="3364992"/>
+            <a:ext cx="1645920" cy="475488"/>
+          </a:xfrm>
+          <a:prstGeom prst="rect">
+            <a:avLst>
+              <a:gd name="adj" fmla="val 9615"/>
+            </a:avLst>
+          </a:prstGeom>
+          <a:solidFill>
+            <a:srgbClr val="FFFFFF"/>
+          </a:solidFill>
+          <a:ln w="12700">
+            <a:solidFill>
+              <a:srgbClr val="0D9488"/>
+            </a:solidFill>
+            <a:prstDash val="solid"/>
+          </a:ln>
+        </p:spPr>
+      </p:sp>
+      <p:sp>
+        <p:nvSpPr>
+          <p:cNvPr id="32" name="Text 30"/>
+          <p:cNvSpPr/>
+          <p:nvPr/>
+        </p:nvSpPr>
+        <p:spPr>
+          <a:xfrm>
+            <a:off x="4370832" y="3364992"/>
+            <a:ext cx="1645920" cy="475488"/>
+          </a:xfrm>
+          <a:prstGeom prst="rect">
+            <a:avLst/>
+          </a:prstGeom>
+          <a:noFill/>
+          <a:ln/>
+        </p:spPr>
+        <p:txBody>
+          <a:bodyPr wrap="square" lIns="0" tIns="0" rIns="0" bIns="0" rtlCol="0" anchor="ctr"/>
+          <a:lstStyle/>
+          <a:p>
+            <a:pPr algn="ctr" indent="0" marL="0">
+              <a:buNone/>
+            </a:pPr>
+            <a:r>
+              <a:rPr lang="en-US" sz="1400" b="1" dirty="0">
+                <a:solidFill>
+                  <a:srgbClr val="0D9488"/>
+                </a:solidFill>
+                <a:latin typeface="Trebuchet MS" pitchFamily="34" charset="0"/>
+                <a:ea typeface="Trebuchet MS" pitchFamily="34" charset="-122"/>
+                <a:cs typeface="Trebuchet MS" pitchFamily="34" charset="-120"/>
+              </a:rPr>
+              <a:t>flec</a:t>
+            </a:r>
+            <a:endParaRPr lang="en-US" sz="1400" dirty="0"/>
+          </a:p>
+        </p:txBody>
+      </p:sp>
+      <p:sp>
+        <p:nvSpPr>
+          <p:cNvPr id="33" name="Text 31"/>
+          <p:cNvSpPr/>
+          <p:nvPr/>
+        </p:nvSpPr>
+        <p:spPr>
+          <a:xfrm>
+            <a:off x="6016752" y="3364992"/>
+            <a:ext cx="411480" cy="475488"/>
+          </a:xfrm>
+          <a:prstGeom prst="rect">
+            <a:avLst/>
+          </a:prstGeom>
+          <a:noFill/>
+          <a:ln/>
+        </p:spPr>
+        <p:txBody>
+          <a:bodyPr wrap="square" lIns="0" tIns="0" rIns="0" bIns="0" rtlCol="0" anchor="ctr"/>
+          <a:lstStyle/>
+          <a:p>
+            <a:pPr algn="ctr" indent="0" marL="0">
+              <a:buNone/>
+            </a:pPr>
+            <a:r>
+              <a:rPr lang="en-US" sz="1600" b="1" dirty="0">
+                <a:solidFill>
+                  <a:srgbClr val="0D9488"/>
+                </a:solidFill>
+                <a:latin typeface="Trebuchet MS" pitchFamily="34" charset="0"/>
+                <a:ea typeface="Trebuchet MS" pitchFamily="34" charset="-122"/>
+                <a:cs typeface="Trebuchet MS" pitchFamily="34" charset="-120"/>
+              </a:rPr>
+              <a:t>·</a:t>
+            </a:r>
+            <a:endParaRPr lang="en-US" sz="1600" dirty="0"/>
+          </a:p>
+        </p:txBody>
+      </p:sp>
+      <p:sp>
+        <p:nvSpPr>
+          <p:cNvPr id="34" name="Shape 32"/>
+          <p:cNvSpPr/>
+          <p:nvPr/>
+        </p:nvSpPr>
+        <p:spPr>
+          <a:xfrm>
+            <a:off x="6428232" y="3364992"/>
+            <a:ext cx="1645920" cy="475488"/>
+          </a:xfrm>
+          <a:prstGeom prst="rect">
+            <a:avLst>
+              <a:gd name="adj" fmla="val 9615"/>
+            </a:avLst>
+          </a:prstGeom>
+          <a:solidFill>
+            <a:srgbClr val="FFFFFF"/>
+          </a:solidFill>
+          <a:ln w="12700">
+            <a:solidFill>
+              <a:srgbClr val="0D9488"/>
+            </a:solidFill>
+            <a:prstDash val="solid"/>
+          </a:ln>
+        </p:spPr>
+      </p:sp>
+      <p:sp>
+        <p:nvSpPr>
+          <p:cNvPr id="35" name="Text 33"/>
+          <p:cNvSpPr/>
+          <p:nvPr/>
+        </p:nvSpPr>
+        <p:spPr>
+          <a:xfrm>
+            <a:off x="6428232" y="3364992"/>
+            <a:ext cx="1645920" cy="475488"/>
+          </a:xfrm>
+          <a:prstGeom prst="rect">
+            <a:avLst/>
+          </a:prstGeom>
+          <a:noFill/>
+          <a:ln/>
+        </p:spPr>
+        <p:txBody>
+          <a:bodyPr wrap="square" lIns="0" tIns="0" rIns="0" bIns="0" rtlCol="0" anchor="ctr"/>
+          <a:lstStyle/>
+          <a:p>
+            <a:pPr algn="ctr" indent="0" marL="0">
+              <a:buNone/>
+            </a:pPr>
+            <a:r>
+              <a:rPr lang="en-US" sz="1400" b="1" dirty="0">
+                <a:solidFill>
+                  <a:srgbClr val="0D9488"/>
+                </a:solidFill>
+                <a:latin typeface="Trebuchet MS" pitchFamily="34" charset="0"/>
+                <a:ea typeface="Trebuchet MS" pitchFamily="34" charset="-122"/>
+                <a:cs typeface="Trebuchet MS" pitchFamily="34" charset="-120"/>
+              </a:rPr>
+              <a:t>tor</a:t>
+            </a:r>
+            <a:endParaRPr lang="en-US" sz="1400" dirty="0"/>
+          </a:p>
+        </p:txBody>
+      </p:sp>
+      <p:sp>
+        <p:nvSpPr>
+          <p:cNvPr id="36" name="Shape 34"/>
+          <p:cNvSpPr/>
+          <p:nvPr/>
+        </p:nvSpPr>
+        <p:spPr>
+          <a:xfrm>
+            <a:off x="365760" y="4096512"/>
+            <a:ext cx="1371600" cy="804672"/>
+          </a:xfrm>
+          <a:prstGeom prst="rect">
+            <a:avLst>
+              <a:gd name="adj" fmla="val 6818"/>
+            </a:avLst>
+          </a:prstGeom>
+          <a:solidFill>
+            <a:srgbClr val="E2E8F0"/>
+          </a:solidFill>
+          <a:ln w="12700">
+            <a:solidFill>
+              <a:srgbClr val="E2E8F0"/>
+            </a:solidFill>
+            <a:prstDash val="solid"/>
+          </a:ln>
+        </p:spPr>
+      </p:sp>
+      <p:sp>
+        <p:nvSpPr>
+          <p:cNvPr id="37" name="Text 35"/>
+          <p:cNvSpPr/>
+          <p:nvPr/>
+        </p:nvSpPr>
+        <p:spPr>
+          <a:xfrm>
+            <a:off x="365760" y="4096512"/>
+            <a:ext cx="1371600" cy="804672"/>
+          </a:xfrm>
+          <a:prstGeom prst="rect">
+            <a:avLst/>
+          </a:prstGeom>
+          <a:noFill/>
+          <a:ln/>
+        </p:spPr>
+        <p:txBody>
+          <a:bodyPr wrap="square" lIns="0" tIns="0" rIns="0" bIns="0" rtlCol="0" anchor="ctr"/>
+          <a:lstStyle/>
+          <a:p>
+            <a:pPr algn="ctr" indent="0" marL="0">
+              <a:buNone/>
+            </a:pPr>
+            <a:r>
+              <a:rPr lang="en-US" sz="1100" b="1" dirty="0">
+                <a:solidFill>
+                  <a:srgbClr val="475569"/>
+                </a:solidFill>
+                <a:latin typeface="Trebuchet MS" pitchFamily="34" charset="0"/>
+                <a:ea typeface="Trebuchet MS" pitchFamily="34" charset="-122"/>
+                <a:cs typeface="Trebuchet MS" pitchFamily="34" charset="-120"/>
+              </a:rPr>
+              <a:t>Phonemes</a:t>
+            </a:r>
+            <a:endParaRPr lang="en-US" sz="1100" dirty="0"/>
+          </a:p>
+        </p:txBody>
+      </p:sp>
+      <p:sp>
+        <p:nvSpPr>
+          <p:cNvPr id="38" name="Shape 36"/>
+          <p:cNvSpPr/>
+          <p:nvPr/>
+        </p:nvSpPr>
+        <p:spPr>
+          <a:xfrm>
+            <a:off x="1874520" y="4096512"/>
+            <a:ext cx="6903720" cy="804672"/>
+          </a:xfrm>
+          <a:prstGeom prst="rect">
+            <a:avLst>
+              <a:gd name="adj" fmla="val 6818"/>
+            </a:avLst>
+          </a:prstGeom>
+          <a:solidFill>
+            <a:srgbClr val="FCE7F3"/>
+          </a:solidFill>
+          <a:ln w="12700">
+            <a:solidFill>
+              <a:srgbClr val="DB2777"/>
+            </a:solidFill>
+            <a:prstDash val="solid"/>
+          </a:ln>
+        </p:spPr>
+      </p:sp>
+      <p:sp>
+        <p:nvSpPr>
+          <p:cNvPr id="39" name="Shape 37"/>
+          <p:cNvSpPr/>
+          <p:nvPr/>
+        </p:nvSpPr>
+        <p:spPr>
+          <a:xfrm>
+            <a:off x="2124837" y="4169664"/>
+            <a:ext cx="685800" cy="384048"/>
+          </a:xfrm>
+          <a:prstGeom prst="rect">
+            <a:avLst>
+              <a:gd name="adj" fmla="val 9524"/>
+            </a:avLst>
+          </a:prstGeom>
+          <a:solidFill>
+            <a:srgbClr val="FFFFFF"/>
+          </a:solidFill>
+          <a:ln w="12700">
+            <a:solidFill>
+              <a:srgbClr val="DB2777"/>
+            </a:solidFill>
+            <a:prstDash val="solid"/>
+          </a:ln>
+        </p:spPr>
+      </p:sp>
+      <p:sp>
+        <p:nvSpPr>
+          <p:cNvPr id="40" name="Text 38"/>
+          <p:cNvSpPr/>
+          <p:nvPr/>
+        </p:nvSpPr>
+        <p:spPr>
+          <a:xfrm>
+            <a:off x="2124837" y="4169664"/>
+            <a:ext cx="685800" cy="384048"/>
+          </a:xfrm>
+          <a:prstGeom prst="rect">
+            <a:avLst/>
+          </a:prstGeom>
+          <a:noFill/>
+          <a:ln/>
+        </p:spPr>
+        <p:txBody>
+          <a:bodyPr wrap="square" lIns="0" tIns="0" rIns="0" bIns="0" rtlCol="0" anchor="ctr"/>
+          <a:lstStyle/>
+          <a:p>
+            <a:pPr algn="ctr" indent="0" marL="0">
+              <a:buNone/>
+            </a:pPr>
+            <a:r>
+              <a:rPr lang="en-US" sz="900" b="1" dirty="0">
+                <a:solidFill>
+                  <a:srgbClr val="9D174D"/>
+                </a:solidFill>
+                <a:latin typeface="Trebuchet MS" pitchFamily="34" charset="0"/>
+                <a:ea typeface="Trebuchet MS" pitchFamily="34" charset="-122"/>
+                <a:cs typeface="Trebuchet MS" pitchFamily="34" charset="-120"/>
+              </a:rPr>
+              <a:t>r</a:t>
+            </a:r>
+            <a:endParaRPr lang="en-US" sz="900" dirty="0"/>
+          </a:p>
+        </p:txBody>
+      </p:sp>
+      <p:sp>
+        <p:nvSpPr>
+          <p:cNvPr id="41" name="Shape 39"/>
+          <p:cNvSpPr/>
+          <p:nvPr/>
+        </p:nvSpPr>
+        <p:spPr>
+          <a:xfrm>
+            <a:off x="3033522" y="4169664"/>
+            <a:ext cx="685800" cy="384048"/>
+          </a:xfrm>
+          <a:prstGeom prst="rect">
+            <a:avLst>
+              <a:gd name="adj" fmla="val 9524"/>
+            </a:avLst>
+          </a:prstGeom>
+          <a:solidFill>
+            <a:srgbClr val="FFFFFF"/>
+          </a:solidFill>
+          <a:ln w="12700">
+            <a:solidFill>
+              <a:srgbClr val="DB2777"/>
+            </a:solidFill>
+            <a:prstDash val="solid"/>
+          </a:ln>
+        </p:spPr>
+      </p:sp>
+      <p:sp>
+        <p:nvSpPr>
+          <p:cNvPr id="42" name="Text 40"/>
+          <p:cNvSpPr/>
+          <p:nvPr/>
+        </p:nvSpPr>
+        <p:spPr>
+          <a:xfrm>
+            <a:off x="3033522" y="4169664"/>
+            <a:ext cx="685800" cy="384048"/>
+          </a:xfrm>
+          <a:prstGeom prst="rect">
+            <a:avLst/>
+          </a:prstGeom>
+          <a:noFill/>
+          <a:ln/>
+        </p:spPr>
+        <p:txBody>
+          <a:bodyPr wrap="square" lIns="0" tIns="0" rIns="0" bIns="0" rtlCol="0" anchor="ctr"/>
+          <a:lstStyle/>
+          <a:p>
+            <a:pPr algn="ctr" indent="0" marL="0">
+              <a:buNone/>
+            </a:pPr>
+            <a:r>
+              <a:rPr lang="en-US" sz="900" b="1" dirty="0">
+                <a:solidFill>
+                  <a:srgbClr val="9D174D"/>
+                </a:solidFill>
+                <a:latin typeface="Trebuchet MS" pitchFamily="34" charset="0"/>
+                <a:ea typeface="Trebuchet MS" pitchFamily="34" charset="-122"/>
+                <a:cs typeface="Trebuchet MS" pitchFamily="34" charset="-120"/>
+              </a:rPr>
+              <a:t>e</a:t>
+            </a:r>
+            <a:endParaRPr lang="en-US" sz="900" dirty="0"/>
+          </a:p>
+        </p:txBody>
+      </p:sp>
+      <p:sp>
+        <p:nvSpPr>
+          <p:cNvPr id="43" name="Shape 41"/>
+          <p:cNvSpPr/>
+          <p:nvPr/>
+        </p:nvSpPr>
+        <p:spPr>
+          <a:xfrm>
+            <a:off x="3942207" y="4169664"/>
+            <a:ext cx="685800" cy="384048"/>
+          </a:xfrm>
+          <a:prstGeom prst="rect">
+            <a:avLst>
+              <a:gd name="adj" fmla="val 9524"/>
+            </a:avLst>
+          </a:prstGeom>
+          <a:solidFill>
+            <a:srgbClr val="FFFFFF"/>
+          </a:solidFill>
+          <a:ln w="12700">
+            <a:solidFill>
+              <a:srgbClr val="DB2777"/>
+            </a:solidFill>
+            <a:prstDash val="solid"/>
+          </a:ln>
+        </p:spPr>
+      </p:sp>
+      <p:sp>
+        <p:nvSpPr>
+          <p:cNvPr id="44" name="Text 42"/>
+          <p:cNvSpPr/>
+          <p:nvPr/>
+        </p:nvSpPr>
+        <p:spPr>
+          <a:xfrm>
+            <a:off x="3942207" y="4169664"/>
+            <a:ext cx="685800" cy="384048"/>
+          </a:xfrm>
+          <a:prstGeom prst="rect">
+            <a:avLst/>
+          </a:prstGeom>
+          <a:noFill/>
+          <a:ln/>
+        </p:spPr>
+        <p:txBody>
+          <a:bodyPr wrap="square" lIns="0" tIns="0" rIns="0" bIns="0" rtlCol="0" anchor="ctr"/>
+          <a:lstStyle/>
+          <a:p>
+            <a:pPr algn="ctr" indent="0" marL="0">
+              <a:buNone/>
+            </a:pPr>
+            <a:r>
+              <a:rPr lang="en-US" sz="900" b="1" dirty="0">
+                <a:solidFill>
+                  <a:srgbClr val="9D174D"/>
+                </a:solidFill>
+                <a:latin typeface="Trebuchet MS" pitchFamily="34" charset="0"/>
+                <a:ea typeface="Trebuchet MS" pitchFamily="34" charset="-122"/>
+                <a:cs typeface="Trebuchet MS" pitchFamily="34" charset="-120"/>
+              </a:rPr>
+              <a:t>fl</a:t>
+            </a:r>
+            <a:endParaRPr lang="en-US" sz="900" dirty="0"/>
+          </a:p>
+        </p:txBody>
+      </p:sp>
+      <p:sp>
+        <p:nvSpPr>
+          <p:cNvPr id="45" name="Shape 43"/>
+          <p:cNvSpPr/>
+          <p:nvPr/>
+        </p:nvSpPr>
+        <p:spPr>
+          <a:xfrm>
+            <a:off x="4850892" y="4169664"/>
+            <a:ext cx="685800" cy="384048"/>
+          </a:xfrm>
+          <a:prstGeom prst="rect">
+            <a:avLst>
+              <a:gd name="adj" fmla="val 9524"/>
+            </a:avLst>
+          </a:prstGeom>
+          <a:solidFill>
+            <a:srgbClr val="FFFFFF"/>
+          </a:solidFill>
+          <a:ln w="12700">
+            <a:solidFill>
+              <a:srgbClr val="DB2777"/>
+            </a:solidFill>
+            <a:prstDash val="solid"/>
+          </a:ln>
+        </p:spPr>
+      </p:sp>
+      <p:sp>
+        <p:nvSpPr>
+          <p:cNvPr id="46" name="Text 44"/>
+          <p:cNvSpPr/>
+          <p:nvPr/>
+        </p:nvSpPr>
+        <p:spPr>
+          <a:xfrm>
+            <a:off x="4850892" y="4169664"/>
+            <a:ext cx="685800" cy="384048"/>
+          </a:xfrm>
+          <a:prstGeom prst="rect">
+            <a:avLst/>
+          </a:prstGeom>
+          <a:noFill/>
+          <a:ln/>
+        </p:spPr>
+        <p:txBody>
+          <a:bodyPr wrap="square" lIns="0" tIns="0" rIns="0" bIns="0" rtlCol="0" anchor="ctr"/>
+          <a:lstStyle/>
+          <a:p>
+            <a:pPr algn="ctr" indent="0" marL="0">
+              <a:buNone/>
+            </a:pPr>
+            <a:r>
+              <a:rPr lang="en-US" sz="900" b="1" dirty="0">
+                <a:solidFill>
+                  <a:srgbClr val="9D174D"/>
+                </a:solidFill>
+                <a:latin typeface="Trebuchet MS" pitchFamily="34" charset="0"/>
+                <a:ea typeface="Trebuchet MS" pitchFamily="34" charset="-122"/>
+                <a:cs typeface="Trebuchet MS" pitchFamily="34" charset="-120"/>
+              </a:rPr>
+              <a:t>e</a:t>
+            </a:r>
+            <a:endParaRPr lang="en-US" sz="900" dirty="0"/>
+          </a:p>
+        </p:txBody>
+      </p:sp>
+      <p:sp>
+        <p:nvSpPr>
+          <p:cNvPr id="47" name="Shape 45"/>
+          <p:cNvSpPr/>
+          <p:nvPr/>
+        </p:nvSpPr>
+        <p:spPr>
+          <a:xfrm>
+            <a:off x="5759577" y="4169664"/>
+            <a:ext cx="685800" cy="384048"/>
+          </a:xfrm>
+          <a:prstGeom prst="rect">
+            <a:avLst>
+              <a:gd name="adj" fmla="val 9524"/>
+            </a:avLst>
+          </a:prstGeom>
+          <a:solidFill>
+            <a:srgbClr val="FFFFFF"/>
+          </a:solidFill>
+          <a:ln w="12700">
+            <a:solidFill>
+              <a:srgbClr val="DB2777"/>
+            </a:solidFill>
+            <a:prstDash val="solid"/>
+          </a:ln>
+        </p:spPr>
+      </p:sp>
+      <p:sp>
+        <p:nvSpPr>
+          <p:cNvPr id="48" name="Text 46"/>
+          <p:cNvSpPr/>
+          <p:nvPr/>
+        </p:nvSpPr>
+        <p:spPr>
+          <a:xfrm>
+            <a:off x="5759577" y="4169664"/>
+            <a:ext cx="685800" cy="384048"/>
+          </a:xfrm>
+          <a:prstGeom prst="rect">
+            <a:avLst/>
+          </a:prstGeom>
+          <a:noFill/>
+          <a:ln/>
+        </p:spPr>
+        <p:txBody>
+          <a:bodyPr wrap="square" lIns="0" tIns="0" rIns="0" bIns="0" rtlCol="0" anchor="ctr"/>
+          <a:lstStyle/>
+          <a:p>
+            <a:pPr algn="ctr" indent="0" marL="0">
+              <a:buNone/>
+            </a:pPr>
+            <a:r>
+              <a:rPr lang="en-US" sz="900" b="1" dirty="0">
+                <a:solidFill>
+                  <a:srgbClr val="9D174D"/>
+                </a:solidFill>
+                <a:latin typeface="Trebuchet MS" pitchFamily="34" charset="0"/>
+                <a:ea typeface="Trebuchet MS" pitchFamily="34" charset="-122"/>
+                <a:cs typeface="Trebuchet MS" pitchFamily="34" charset="-120"/>
+              </a:rPr>
+              <a:t>c</a:t>
+            </a:r>
+            <a:endParaRPr lang="en-US" sz="900" dirty="0"/>
+          </a:p>
+        </p:txBody>
+      </p:sp>
+      <p:sp>
+        <p:nvSpPr>
+          <p:cNvPr id="49" name="Text 47"/>
+          <p:cNvSpPr/>
+          <p:nvPr/>
+        </p:nvSpPr>
+        <p:spPr>
+          <a:xfrm>
+            <a:off x="5759577" y="4572000"/>
+            <a:ext cx="685800" cy="219456"/>
           </a:xfrm>
           <a:prstGeom prst="rect">
             <a:avLst/>
@@ -23427,1520 +23588,149 @@
               <a:buNone/>
             </a:pPr>
             <a:r>
-              <a:rPr lang="en-US" sz="850" dirty="0">
-                <a:solidFill>
-                  <a:srgbClr val="475569"/>
+              <a:rPr lang="en-US" sz="750" i="1" dirty="0">
+                <a:solidFill>
+                  <a:srgbClr val="94A3B8"/>
                 </a:solidFill>
                 <a:latin typeface="Calibri" pitchFamily="34" charset="0"/>
                 <a:ea typeface="Calibri" pitchFamily="34" charset="-122"/>
                 <a:cs typeface="Calibri" pitchFamily="34" charset="-120"/>
               </a:rPr>
-              <a:t>act or result of</a:t>
-            </a:r>
-            <a:endParaRPr lang="en-US" sz="850" dirty="0"/>
-          </a:p>
-        </p:txBody>
-      </p:sp>
-      <p:sp>
-        <p:nvSpPr>
-          <p:cNvPr id="28" name="Shape 26"/>
-          <p:cNvSpPr/>
-          <p:nvPr/>
-        </p:nvSpPr>
-        <p:spPr>
-          <a:xfrm>
-            <a:off x="365760" y="3273552"/>
-            <a:ext cx="1371600" cy="658368"/>
+              <a:t>/k/</a:t>
+            </a:r>
+            <a:endParaRPr lang="en-US" sz="750" dirty="0"/>
+          </a:p>
+        </p:txBody>
+      </p:sp>
+      <p:sp>
+        <p:nvSpPr>
+          <p:cNvPr id="50" name="Shape 48"/>
+          <p:cNvSpPr/>
+          <p:nvPr/>
+        </p:nvSpPr>
+        <p:spPr>
+          <a:xfrm>
+            <a:off x="6668262" y="4169664"/>
+            <a:ext cx="685800" cy="384048"/>
           </a:xfrm>
           <a:prstGeom prst="rect">
             <a:avLst>
-              <a:gd name="adj" fmla="val 8333"/>
+              <a:gd name="adj" fmla="val 9524"/>
             </a:avLst>
           </a:prstGeom>
           <a:solidFill>
-            <a:srgbClr val="E2E8F0"/>
-          </a:solidFill>
-          <a:ln w="12700">
-            <a:solidFill>
-              <a:srgbClr val="E2E8F0"/>
-            </a:solidFill>
-            <a:prstDash val="solid"/>
-          </a:ln>
-        </p:spPr>
-      </p:sp>
-      <p:sp>
-        <p:nvSpPr>
-          <p:cNvPr id="29" name="Text 27"/>
-          <p:cNvSpPr/>
-          <p:nvPr/>
-        </p:nvSpPr>
-        <p:spPr>
-          <a:xfrm>
-            <a:off x="365760" y="3273552"/>
-            <a:ext cx="1371600" cy="658368"/>
-          </a:xfrm>
-          <a:prstGeom prst="rect">
-            <a:avLst/>
-          </a:prstGeom>
-          <a:noFill/>
-          <a:ln/>
-        </p:spPr>
-        <p:txBody>
-          <a:bodyPr wrap="square" lIns="0" tIns="0" rIns="0" bIns="0" rtlCol="0" anchor="ctr"/>
-          <a:lstStyle/>
-          <a:p>
-            <a:pPr algn="ctr" indent="0" marL="0">
-              <a:buNone/>
-            </a:pPr>
-            <a:r>
-              <a:rPr lang="en-US" sz="1100" b="1" dirty="0">
-                <a:solidFill>
-                  <a:srgbClr val="475569"/>
+            <a:srgbClr val="FFFFFF"/>
+          </a:solidFill>
+          <a:ln w="12700">
+            <a:solidFill>
+              <a:srgbClr val="DB2777"/>
+            </a:solidFill>
+            <a:prstDash val="solid"/>
+          </a:ln>
+        </p:spPr>
+      </p:sp>
+      <p:sp>
+        <p:nvSpPr>
+          <p:cNvPr id="51" name="Text 49"/>
+          <p:cNvSpPr/>
+          <p:nvPr/>
+        </p:nvSpPr>
+        <p:spPr>
+          <a:xfrm>
+            <a:off x="6668262" y="4169664"/>
+            <a:ext cx="685800" cy="384048"/>
+          </a:xfrm>
+          <a:prstGeom prst="rect">
+            <a:avLst/>
+          </a:prstGeom>
+          <a:noFill/>
+          <a:ln/>
+        </p:spPr>
+        <p:txBody>
+          <a:bodyPr wrap="square" lIns="0" tIns="0" rIns="0" bIns="0" rtlCol="0" anchor="ctr"/>
+          <a:lstStyle/>
+          <a:p>
+            <a:pPr algn="ctr" indent="0" marL="0">
+              <a:buNone/>
+            </a:pPr>
+            <a:r>
+              <a:rPr lang="en-US" sz="900" b="1" dirty="0">
+                <a:solidFill>
+                  <a:srgbClr val="9D174D"/>
                 </a:solidFill>
                 <a:latin typeface="Trebuchet MS" pitchFamily="34" charset="0"/>
                 <a:ea typeface="Trebuchet MS" pitchFamily="34" charset="-122"/>
                 <a:cs typeface="Trebuchet MS" pitchFamily="34" charset="-120"/>
               </a:rPr>
-              <a:t>Syllables</a:t>
-            </a:r>
-            <a:endParaRPr lang="en-US" sz="1100" dirty="0"/>
-          </a:p>
-        </p:txBody>
-      </p:sp>
-      <p:sp>
-        <p:nvSpPr>
-          <p:cNvPr id="30" name="Shape 28"/>
-          <p:cNvSpPr/>
-          <p:nvPr/>
-        </p:nvSpPr>
-        <p:spPr>
-          <a:xfrm>
-            <a:off x="1874520" y="3273552"/>
-            <a:ext cx="6903720" cy="658368"/>
+              <a:t>t</a:t>
+            </a:r>
+            <a:endParaRPr lang="en-US" sz="900" dirty="0"/>
+          </a:p>
+        </p:txBody>
+      </p:sp>
+      <p:sp>
+        <p:nvSpPr>
+          <p:cNvPr id="52" name="Shape 50"/>
+          <p:cNvSpPr/>
+          <p:nvPr/>
+        </p:nvSpPr>
+        <p:spPr>
+          <a:xfrm>
+            <a:off x="7576947" y="4169664"/>
+            <a:ext cx="685800" cy="384048"/>
           </a:xfrm>
           <a:prstGeom prst="rect">
             <a:avLst>
-              <a:gd name="adj" fmla="val 8333"/>
+              <a:gd name="adj" fmla="val 9524"/>
             </a:avLst>
           </a:prstGeom>
           <a:solidFill>
-            <a:srgbClr val="CCFBF1"/>
-          </a:solidFill>
-          <a:ln w="12700">
-            <a:solidFill>
-              <a:srgbClr val="0D9488"/>
-            </a:solidFill>
-            <a:prstDash val="solid"/>
-          </a:ln>
-        </p:spPr>
-      </p:sp>
-      <p:sp>
-        <p:nvSpPr>
-          <p:cNvPr id="31" name="Shape 29"/>
-          <p:cNvSpPr/>
-          <p:nvPr/>
-        </p:nvSpPr>
-        <p:spPr>
-          <a:xfrm>
-            <a:off x="1975104" y="3364992"/>
-            <a:ext cx="1554480" cy="475488"/>
-          </a:xfrm>
-          <a:prstGeom prst="rect">
-            <a:avLst>
-              <a:gd name="adj" fmla="val 9615"/>
-            </a:avLst>
-          </a:prstGeom>
-          <a:solidFill>
             <a:srgbClr val="FFFFFF"/>
           </a:solidFill>
           <a:ln w="12700">
             <a:solidFill>
-              <a:srgbClr val="0D9488"/>
-            </a:solidFill>
-            <a:prstDash val="solid"/>
-          </a:ln>
-        </p:spPr>
-      </p:sp>
-      <p:sp>
-        <p:nvSpPr>
-          <p:cNvPr id="32" name="Text 30"/>
-          <p:cNvSpPr/>
-          <p:nvPr/>
-        </p:nvSpPr>
-        <p:spPr>
-          <a:xfrm>
-            <a:off x="1975104" y="3364992"/>
-            <a:ext cx="1554480" cy="475488"/>
-          </a:xfrm>
-          <a:prstGeom prst="rect">
-            <a:avLst/>
-          </a:prstGeom>
-          <a:noFill/>
-          <a:ln/>
-        </p:spPr>
-        <p:txBody>
-          <a:bodyPr wrap="square" lIns="0" tIns="0" rIns="0" bIns="0" rtlCol="0" anchor="ctr"/>
-          <a:lstStyle/>
-          <a:p>
-            <a:pPr algn="ctr" indent="0" marL="0">
-              <a:buNone/>
-            </a:pPr>
-            <a:r>
-              <a:rPr lang="en-US" sz="1400" b="1" dirty="0">
-                <a:solidFill>
-                  <a:srgbClr val="0D9488"/>
+              <a:srgbClr val="DB2777"/>
+            </a:solidFill>
+            <a:prstDash val="solid"/>
+          </a:ln>
+        </p:spPr>
+      </p:sp>
+      <p:sp>
+        <p:nvSpPr>
+          <p:cNvPr id="53" name="Text 51"/>
+          <p:cNvSpPr/>
+          <p:nvPr/>
+        </p:nvSpPr>
+        <p:spPr>
+          <a:xfrm>
+            <a:off x="7576947" y="4169664"/>
+            <a:ext cx="685800" cy="384048"/>
+          </a:xfrm>
+          <a:prstGeom prst="rect">
+            <a:avLst/>
+          </a:prstGeom>
+          <a:noFill/>
+          <a:ln/>
+        </p:spPr>
+        <p:txBody>
+          <a:bodyPr wrap="square" lIns="0" tIns="0" rIns="0" bIns="0" rtlCol="0" anchor="ctr"/>
+          <a:lstStyle/>
+          <a:p>
+            <a:pPr algn="ctr" indent="0" marL="0">
+              <a:buNone/>
+            </a:pPr>
+            <a:r>
+              <a:rPr lang="en-US" sz="900" b="1" dirty="0">
+                <a:solidFill>
+                  <a:srgbClr val="9D174D"/>
                 </a:solidFill>
                 <a:latin typeface="Trebuchet MS" pitchFamily="34" charset="0"/>
                 <a:ea typeface="Trebuchet MS" pitchFamily="34" charset="-122"/>
                 <a:cs typeface="Trebuchet MS" pitchFamily="34" charset="-120"/>
               </a:rPr>
-              <a:t>self</a:t>
-            </a:r>
-            <a:endParaRPr lang="en-US" sz="1400" dirty="0"/>
-          </a:p>
-        </p:txBody>
-      </p:sp>
-      <p:sp>
-        <p:nvSpPr>
-          <p:cNvPr id="33" name="Text 31"/>
-          <p:cNvSpPr/>
-          <p:nvPr/>
-        </p:nvSpPr>
-        <p:spPr>
-          <a:xfrm>
-            <a:off x="3529584" y="3364992"/>
-            <a:ext cx="73152" cy="475488"/>
-          </a:xfrm>
-          <a:prstGeom prst="rect">
-            <a:avLst/>
-          </a:prstGeom>
-          <a:noFill/>
-          <a:ln/>
-        </p:spPr>
-        <p:txBody>
-          <a:bodyPr wrap="square" lIns="0" tIns="0" rIns="0" bIns="0" rtlCol="0" anchor="ctr"/>
-          <a:lstStyle/>
-          <a:p>
-            <a:pPr algn="ctr" indent="0" marL="0">
-              <a:buNone/>
-            </a:pPr>
-            <a:r>
-              <a:rPr lang="en-US" sz="1600" b="1" dirty="0">
-                <a:solidFill>
-                  <a:srgbClr val="0D9488"/>
-                </a:solidFill>
-                <a:latin typeface="Trebuchet MS" pitchFamily="34" charset="0"/>
-                <a:ea typeface="Trebuchet MS" pitchFamily="34" charset="-122"/>
-                <a:cs typeface="Trebuchet MS" pitchFamily="34" charset="-120"/>
-              </a:rPr>
-              <a:t>·</a:t>
-            </a:r>
-            <a:endParaRPr lang="en-US" sz="1600" dirty="0"/>
-          </a:p>
-        </p:txBody>
-      </p:sp>
-      <p:sp>
-        <p:nvSpPr>
-          <p:cNvPr id="34" name="Shape 32"/>
-          <p:cNvSpPr/>
-          <p:nvPr/>
-        </p:nvSpPr>
-        <p:spPr>
-          <a:xfrm>
-            <a:off x="3602736" y="3364992"/>
-            <a:ext cx="1554480" cy="475488"/>
-          </a:xfrm>
-          <a:prstGeom prst="rect">
-            <a:avLst>
-              <a:gd name="adj" fmla="val 9615"/>
-            </a:avLst>
-          </a:prstGeom>
-          <a:solidFill>
-            <a:srgbClr val="FFFFFF"/>
-          </a:solidFill>
-          <a:ln w="12700">
-            <a:solidFill>
-              <a:srgbClr val="0D9488"/>
-            </a:solidFill>
-            <a:prstDash val="solid"/>
-          </a:ln>
-        </p:spPr>
-      </p:sp>
-      <p:sp>
-        <p:nvSpPr>
-          <p:cNvPr id="35" name="Text 33"/>
-          <p:cNvSpPr/>
-          <p:nvPr/>
-        </p:nvSpPr>
-        <p:spPr>
-          <a:xfrm>
-            <a:off x="3602736" y="3364992"/>
-            <a:ext cx="1554480" cy="475488"/>
-          </a:xfrm>
-          <a:prstGeom prst="rect">
-            <a:avLst/>
-          </a:prstGeom>
-          <a:noFill/>
-          <a:ln/>
-        </p:spPr>
-        <p:txBody>
-          <a:bodyPr wrap="square" lIns="0" tIns="0" rIns="0" bIns="0" rtlCol="0" anchor="ctr"/>
-          <a:lstStyle/>
-          <a:p>
-            <a:pPr algn="ctr" indent="0" marL="0">
-              <a:buNone/>
-            </a:pPr>
-            <a:r>
-              <a:rPr lang="en-US" sz="1400" b="1" dirty="0">
-                <a:solidFill>
-                  <a:srgbClr val="0D9488"/>
-                </a:solidFill>
-                <a:latin typeface="Trebuchet MS" pitchFamily="34" charset="0"/>
-                <a:ea typeface="Trebuchet MS" pitchFamily="34" charset="-122"/>
-                <a:cs typeface="Trebuchet MS" pitchFamily="34" charset="-120"/>
-              </a:rPr>
-              <a:t>re</a:t>
-            </a:r>
-            <a:endParaRPr lang="en-US" sz="1400" dirty="0"/>
-          </a:p>
-        </p:txBody>
-      </p:sp>
-      <p:sp>
-        <p:nvSpPr>
-          <p:cNvPr id="36" name="Text 34"/>
-          <p:cNvSpPr/>
-          <p:nvPr/>
-        </p:nvSpPr>
-        <p:spPr>
-          <a:xfrm>
-            <a:off x="5157216" y="3364992"/>
-            <a:ext cx="73152" cy="475488"/>
-          </a:xfrm>
-          <a:prstGeom prst="rect">
-            <a:avLst/>
-          </a:prstGeom>
-          <a:noFill/>
-          <a:ln/>
-        </p:spPr>
-        <p:txBody>
-          <a:bodyPr wrap="square" lIns="0" tIns="0" rIns="0" bIns="0" rtlCol="0" anchor="ctr"/>
-          <a:lstStyle/>
-          <a:p>
-            <a:pPr algn="ctr" indent="0" marL="0">
-              <a:buNone/>
-            </a:pPr>
-            <a:r>
-              <a:rPr lang="en-US" sz="1600" b="1" dirty="0">
-                <a:solidFill>
-                  <a:srgbClr val="0D9488"/>
-                </a:solidFill>
-                <a:latin typeface="Trebuchet MS" pitchFamily="34" charset="0"/>
-                <a:ea typeface="Trebuchet MS" pitchFamily="34" charset="-122"/>
-                <a:cs typeface="Trebuchet MS" pitchFamily="34" charset="-120"/>
-              </a:rPr>
-              <a:t>·</a:t>
-            </a:r>
-            <a:endParaRPr lang="en-US" sz="1600" dirty="0"/>
-          </a:p>
-        </p:txBody>
-      </p:sp>
-      <p:sp>
-        <p:nvSpPr>
-          <p:cNvPr id="37" name="Shape 35"/>
-          <p:cNvSpPr/>
-          <p:nvPr/>
-        </p:nvSpPr>
-        <p:spPr>
-          <a:xfrm>
-            <a:off x="5230368" y="3364992"/>
-            <a:ext cx="1554480" cy="475488"/>
-          </a:xfrm>
-          <a:prstGeom prst="rect">
-            <a:avLst>
-              <a:gd name="adj" fmla="val 9615"/>
-            </a:avLst>
-          </a:prstGeom>
-          <a:solidFill>
-            <a:srgbClr val="FFFFFF"/>
-          </a:solidFill>
-          <a:ln w="12700">
-            <a:solidFill>
-              <a:srgbClr val="0D9488"/>
-            </a:solidFill>
-            <a:prstDash val="solid"/>
-          </a:ln>
-        </p:spPr>
-      </p:sp>
-      <p:sp>
-        <p:nvSpPr>
-          <p:cNvPr id="38" name="Text 36"/>
-          <p:cNvSpPr/>
-          <p:nvPr/>
-        </p:nvSpPr>
-        <p:spPr>
-          <a:xfrm>
-            <a:off x="5230368" y="3364992"/>
-            <a:ext cx="1554480" cy="475488"/>
-          </a:xfrm>
-          <a:prstGeom prst="rect">
-            <a:avLst/>
-          </a:prstGeom>
-          <a:noFill/>
-          <a:ln/>
-        </p:spPr>
-        <p:txBody>
-          <a:bodyPr wrap="square" lIns="0" tIns="0" rIns="0" bIns="0" rtlCol="0" anchor="ctr"/>
-          <a:lstStyle/>
-          <a:p>
-            <a:pPr algn="ctr" indent="0" marL="0">
-              <a:buNone/>
-            </a:pPr>
-            <a:r>
-              <a:rPr lang="en-US" sz="1400" b="1" dirty="0">
-                <a:solidFill>
-                  <a:srgbClr val="0D9488"/>
-                </a:solidFill>
-                <a:latin typeface="Trebuchet MS" pitchFamily="34" charset="0"/>
-                <a:ea typeface="Trebuchet MS" pitchFamily="34" charset="-122"/>
-                <a:cs typeface="Trebuchet MS" pitchFamily="34" charset="-120"/>
-              </a:rPr>
-              <a:t>flec</a:t>
-            </a:r>
-            <a:endParaRPr lang="en-US" sz="1400" dirty="0"/>
-          </a:p>
-        </p:txBody>
-      </p:sp>
-      <p:sp>
-        <p:nvSpPr>
-          <p:cNvPr id="39" name="Text 37"/>
-          <p:cNvSpPr/>
-          <p:nvPr/>
-        </p:nvSpPr>
-        <p:spPr>
-          <a:xfrm>
-            <a:off x="6784848" y="3364992"/>
-            <a:ext cx="73152" cy="475488"/>
-          </a:xfrm>
-          <a:prstGeom prst="rect">
-            <a:avLst/>
-          </a:prstGeom>
-          <a:noFill/>
-          <a:ln/>
-        </p:spPr>
-        <p:txBody>
-          <a:bodyPr wrap="square" lIns="0" tIns="0" rIns="0" bIns="0" rtlCol="0" anchor="ctr"/>
-          <a:lstStyle/>
-          <a:p>
-            <a:pPr algn="ctr" indent="0" marL="0">
-              <a:buNone/>
-            </a:pPr>
-            <a:r>
-              <a:rPr lang="en-US" sz="1600" b="1" dirty="0">
-                <a:solidFill>
-                  <a:srgbClr val="0D9488"/>
-                </a:solidFill>
-                <a:latin typeface="Trebuchet MS" pitchFamily="34" charset="0"/>
-                <a:ea typeface="Trebuchet MS" pitchFamily="34" charset="-122"/>
-                <a:cs typeface="Trebuchet MS" pitchFamily="34" charset="-120"/>
-              </a:rPr>
-              <a:t>·</a:t>
-            </a:r>
-            <a:endParaRPr lang="en-US" sz="1600" dirty="0"/>
-          </a:p>
-        </p:txBody>
-      </p:sp>
-      <p:sp>
-        <p:nvSpPr>
-          <p:cNvPr id="40" name="Shape 38"/>
-          <p:cNvSpPr/>
-          <p:nvPr/>
-        </p:nvSpPr>
-        <p:spPr>
-          <a:xfrm>
-            <a:off x="6858000" y="3364992"/>
-            <a:ext cx="1554480" cy="475488"/>
-          </a:xfrm>
-          <a:prstGeom prst="rect">
-            <a:avLst>
-              <a:gd name="adj" fmla="val 9615"/>
-            </a:avLst>
-          </a:prstGeom>
-          <a:solidFill>
-            <a:srgbClr val="FFFFFF"/>
-          </a:solidFill>
-          <a:ln w="12700">
-            <a:solidFill>
-              <a:srgbClr val="0D9488"/>
-            </a:solidFill>
-            <a:prstDash val="solid"/>
-          </a:ln>
-        </p:spPr>
-      </p:sp>
-      <p:sp>
-        <p:nvSpPr>
-          <p:cNvPr id="41" name="Text 39"/>
-          <p:cNvSpPr/>
-          <p:nvPr/>
-        </p:nvSpPr>
-        <p:spPr>
-          <a:xfrm>
-            <a:off x="6858000" y="3364992"/>
-            <a:ext cx="1554480" cy="475488"/>
-          </a:xfrm>
-          <a:prstGeom prst="rect">
-            <a:avLst/>
-          </a:prstGeom>
-          <a:noFill/>
-          <a:ln/>
-        </p:spPr>
-        <p:txBody>
-          <a:bodyPr wrap="square" lIns="0" tIns="0" rIns="0" bIns="0" rtlCol="0" anchor="ctr"/>
-          <a:lstStyle/>
-          <a:p>
-            <a:pPr algn="ctr" indent="0" marL="0">
-              <a:buNone/>
-            </a:pPr>
-            <a:r>
-              <a:rPr lang="en-US" sz="1400" b="1" dirty="0">
-                <a:solidFill>
-                  <a:srgbClr val="0D9488"/>
-                </a:solidFill>
-                <a:latin typeface="Trebuchet MS" pitchFamily="34" charset="0"/>
-                <a:ea typeface="Trebuchet MS" pitchFamily="34" charset="-122"/>
-                <a:cs typeface="Trebuchet MS" pitchFamily="34" charset="-120"/>
-              </a:rPr>
-              <a:t>tion</a:t>
-            </a:r>
-            <a:endParaRPr lang="en-US" sz="1400" dirty="0"/>
-          </a:p>
-        </p:txBody>
-      </p:sp>
-      <p:sp>
-        <p:nvSpPr>
-          <p:cNvPr id="42" name="Shape 40"/>
-          <p:cNvSpPr/>
-          <p:nvPr/>
-        </p:nvSpPr>
-        <p:spPr>
-          <a:xfrm>
-            <a:off x="365760" y="4096512"/>
-            <a:ext cx="1371600" cy="804672"/>
-          </a:xfrm>
-          <a:prstGeom prst="rect">
-            <a:avLst>
-              <a:gd name="adj" fmla="val 6818"/>
-            </a:avLst>
-          </a:prstGeom>
-          <a:solidFill>
-            <a:srgbClr val="E2E8F0"/>
-          </a:solidFill>
-          <a:ln w="12700">
-            <a:solidFill>
-              <a:srgbClr val="E2E8F0"/>
-            </a:solidFill>
-            <a:prstDash val="solid"/>
-          </a:ln>
-        </p:spPr>
-      </p:sp>
-      <p:sp>
-        <p:nvSpPr>
-          <p:cNvPr id="43" name="Text 41"/>
-          <p:cNvSpPr/>
-          <p:nvPr/>
-        </p:nvSpPr>
-        <p:spPr>
-          <a:xfrm>
-            <a:off x="365760" y="4096512"/>
-            <a:ext cx="1371600" cy="804672"/>
-          </a:xfrm>
-          <a:prstGeom prst="rect">
-            <a:avLst/>
-          </a:prstGeom>
-          <a:noFill/>
-          <a:ln/>
-        </p:spPr>
-        <p:txBody>
-          <a:bodyPr wrap="square" lIns="0" tIns="0" rIns="0" bIns="0" rtlCol="0" anchor="ctr"/>
-          <a:lstStyle/>
-          <a:p>
-            <a:pPr algn="ctr" indent="0" marL="0">
-              <a:buNone/>
-            </a:pPr>
-            <a:r>
-              <a:rPr lang="en-US" sz="1100" b="1" dirty="0">
-                <a:solidFill>
-                  <a:srgbClr val="475569"/>
-                </a:solidFill>
-                <a:latin typeface="Trebuchet MS" pitchFamily="34" charset="0"/>
-                <a:ea typeface="Trebuchet MS" pitchFamily="34" charset="-122"/>
-                <a:cs typeface="Trebuchet MS" pitchFamily="34" charset="-120"/>
-              </a:rPr>
-              <a:t>Phonemes</a:t>
-            </a:r>
-            <a:endParaRPr lang="en-US" sz="1100" dirty="0"/>
-          </a:p>
-        </p:txBody>
-      </p:sp>
-      <p:sp>
-        <p:nvSpPr>
-          <p:cNvPr id="44" name="Shape 42"/>
-          <p:cNvSpPr/>
-          <p:nvPr/>
-        </p:nvSpPr>
-        <p:spPr>
-          <a:xfrm>
-            <a:off x="1874520" y="4096512"/>
-            <a:ext cx="6903720" cy="804672"/>
-          </a:xfrm>
-          <a:prstGeom prst="rect">
-            <a:avLst>
-              <a:gd name="adj" fmla="val 6818"/>
-            </a:avLst>
-          </a:prstGeom>
-          <a:solidFill>
-            <a:srgbClr val="FCE7F3"/>
-          </a:solidFill>
-          <a:ln w="12700">
-            <a:solidFill>
-              <a:srgbClr val="DB2777"/>
-            </a:solidFill>
-            <a:prstDash val="solid"/>
-          </a:ln>
-        </p:spPr>
-      </p:sp>
-      <p:sp>
-        <p:nvSpPr>
-          <p:cNvPr id="45" name="Shape 43"/>
-          <p:cNvSpPr/>
-          <p:nvPr/>
-        </p:nvSpPr>
-        <p:spPr>
-          <a:xfrm>
-            <a:off x="1952897" y="4169664"/>
-            <a:ext cx="451573" cy="384048"/>
-          </a:xfrm>
-          <a:prstGeom prst="rect">
-            <a:avLst>
-              <a:gd name="adj" fmla="val 9524"/>
-            </a:avLst>
-          </a:prstGeom>
-          <a:solidFill>
-            <a:srgbClr val="FFFFFF"/>
-          </a:solidFill>
-          <a:ln w="12700">
-            <a:solidFill>
-              <a:srgbClr val="DB2777"/>
-            </a:solidFill>
-            <a:prstDash val="solid"/>
-          </a:ln>
-        </p:spPr>
-      </p:sp>
-      <p:sp>
-        <p:nvSpPr>
-          <p:cNvPr id="46" name="Text 44"/>
-          <p:cNvSpPr/>
-          <p:nvPr/>
-        </p:nvSpPr>
-        <p:spPr>
-          <a:xfrm>
-            <a:off x="1952897" y="4169664"/>
-            <a:ext cx="451573" cy="384048"/>
-          </a:xfrm>
-          <a:prstGeom prst="rect">
-            <a:avLst/>
-          </a:prstGeom>
-          <a:noFill/>
-          <a:ln/>
-        </p:spPr>
-        <p:txBody>
-          <a:bodyPr wrap="square" lIns="0" tIns="0" rIns="0" bIns="0" rtlCol="0" anchor="ctr"/>
-          <a:lstStyle/>
-          <a:p>
-            <a:pPr algn="ctr" indent="0" marL="0">
-              <a:buNone/>
-            </a:pPr>
-            <a:r>
-              <a:rPr lang="en-US" sz="900" b="1" dirty="0">
-                <a:solidFill>
-                  <a:srgbClr val="9D174D"/>
-                </a:solidFill>
-                <a:latin typeface="Trebuchet MS" pitchFamily="34" charset="0"/>
-                <a:ea typeface="Trebuchet MS" pitchFamily="34" charset="-122"/>
-                <a:cs typeface="Trebuchet MS" pitchFamily="34" charset="-120"/>
-              </a:rPr>
-              <a:t>s</a:t>
+              <a:t>or</a:t>
             </a:r>
             <a:endParaRPr lang="en-US" sz="900" dirty="0"/>
-          </a:p>
-        </p:txBody>
-      </p:sp>
-      <p:sp>
-        <p:nvSpPr>
-          <p:cNvPr id="47" name="Shape 45"/>
-          <p:cNvSpPr/>
-          <p:nvPr/>
-        </p:nvSpPr>
-        <p:spPr>
-          <a:xfrm>
-            <a:off x="2455415" y="4169664"/>
-            <a:ext cx="451573" cy="384048"/>
-          </a:xfrm>
-          <a:prstGeom prst="rect">
-            <a:avLst>
-              <a:gd name="adj" fmla="val 9524"/>
-            </a:avLst>
-          </a:prstGeom>
-          <a:solidFill>
-            <a:srgbClr val="FFFFFF"/>
-          </a:solidFill>
-          <a:ln w="12700">
-            <a:solidFill>
-              <a:srgbClr val="DB2777"/>
-            </a:solidFill>
-            <a:prstDash val="solid"/>
-          </a:ln>
-        </p:spPr>
-      </p:sp>
-      <p:sp>
-        <p:nvSpPr>
-          <p:cNvPr id="48" name="Text 46"/>
-          <p:cNvSpPr/>
-          <p:nvPr/>
-        </p:nvSpPr>
-        <p:spPr>
-          <a:xfrm>
-            <a:off x="2455415" y="4169664"/>
-            <a:ext cx="451573" cy="384048"/>
-          </a:xfrm>
-          <a:prstGeom prst="rect">
-            <a:avLst/>
-          </a:prstGeom>
-          <a:noFill/>
-          <a:ln/>
-        </p:spPr>
-        <p:txBody>
-          <a:bodyPr wrap="square" lIns="0" tIns="0" rIns="0" bIns="0" rtlCol="0" anchor="ctr"/>
-          <a:lstStyle/>
-          <a:p>
-            <a:pPr algn="ctr" indent="0" marL="0">
-              <a:buNone/>
-            </a:pPr>
-            <a:r>
-              <a:rPr lang="en-US" sz="900" b="1" dirty="0">
-                <a:solidFill>
-                  <a:srgbClr val="9D174D"/>
-                </a:solidFill>
-                <a:latin typeface="Trebuchet MS" pitchFamily="34" charset="0"/>
-                <a:ea typeface="Trebuchet MS" pitchFamily="34" charset="-122"/>
-                <a:cs typeface="Trebuchet MS" pitchFamily="34" charset="-120"/>
-              </a:rPr>
-              <a:t>e</a:t>
-            </a:r>
-            <a:endParaRPr lang="en-US" sz="900" dirty="0"/>
-          </a:p>
-        </p:txBody>
-      </p:sp>
-      <p:sp>
-        <p:nvSpPr>
-          <p:cNvPr id="49" name="Shape 47"/>
-          <p:cNvSpPr/>
-          <p:nvPr/>
-        </p:nvSpPr>
-        <p:spPr>
-          <a:xfrm>
-            <a:off x="2957933" y="4169664"/>
-            <a:ext cx="451573" cy="384048"/>
-          </a:xfrm>
-          <a:prstGeom prst="rect">
-            <a:avLst>
-              <a:gd name="adj" fmla="val 9524"/>
-            </a:avLst>
-          </a:prstGeom>
-          <a:solidFill>
-            <a:srgbClr val="FFFFFF"/>
-          </a:solidFill>
-          <a:ln w="12700">
-            <a:solidFill>
-              <a:srgbClr val="DB2777"/>
-            </a:solidFill>
-            <a:prstDash val="solid"/>
-          </a:ln>
-        </p:spPr>
-      </p:sp>
-      <p:sp>
-        <p:nvSpPr>
-          <p:cNvPr id="50" name="Text 48"/>
-          <p:cNvSpPr/>
-          <p:nvPr/>
-        </p:nvSpPr>
-        <p:spPr>
-          <a:xfrm>
-            <a:off x="2957933" y="4169664"/>
-            <a:ext cx="451573" cy="384048"/>
-          </a:xfrm>
-          <a:prstGeom prst="rect">
-            <a:avLst/>
-          </a:prstGeom>
-          <a:noFill/>
-          <a:ln/>
-        </p:spPr>
-        <p:txBody>
-          <a:bodyPr wrap="square" lIns="0" tIns="0" rIns="0" bIns="0" rtlCol="0" anchor="ctr"/>
-          <a:lstStyle/>
-          <a:p>
-            <a:pPr algn="ctr" indent="0" marL="0">
-              <a:buNone/>
-            </a:pPr>
-            <a:r>
-              <a:rPr lang="en-US" sz="900" b="1" dirty="0">
-                <a:solidFill>
-                  <a:srgbClr val="9D174D"/>
-                </a:solidFill>
-                <a:latin typeface="Trebuchet MS" pitchFamily="34" charset="0"/>
-                <a:ea typeface="Trebuchet MS" pitchFamily="34" charset="-122"/>
-                <a:cs typeface="Trebuchet MS" pitchFamily="34" charset="-120"/>
-              </a:rPr>
-              <a:t>l</a:t>
-            </a:r>
-            <a:endParaRPr lang="en-US" sz="900" dirty="0"/>
-          </a:p>
-        </p:txBody>
-      </p:sp>
-      <p:sp>
-        <p:nvSpPr>
-          <p:cNvPr id="51" name="Shape 49"/>
-          <p:cNvSpPr/>
-          <p:nvPr/>
-        </p:nvSpPr>
-        <p:spPr>
-          <a:xfrm>
-            <a:off x="3460451" y="4169664"/>
-            <a:ext cx="451573" cy="384048"/>
-          </a:xfrm>
-          <a:prstGeom prst="rect">
-            <a:avLst>
-              <a:gd name="adj" fmla="val 9524"/>
-            </a:avLst>
-          </a:prstGeom>
-          <a:solidFill>
-            <a:srgbClr val="FFFFFF"/>
-          </a:solidFill>
-          <a:ln w="12700">
-            <a:solidFill>
-              <a:srgbClr val="DB2777"/>
-            </a:solidFill>
-            <a:prstDash val="solid"/>
-          </a:ln>
-        </p:spPr>
-      </p:sp>
-      <p:sp>
-        <p:nvSpPr>
-          <p:cNvPr id="52" name="Text 50"/>
-          <p:cNvSpPr/>
-          <p:nvPr/>
-        </p:nvSpPr>
-        <p:spPr>
-          <a:xfrm>
-            <a:off x="3460451" y="4169664"/>
-            <a:ext cx="451573" cy="384048"/>
-          </a:xfrm>
-          <a:prstGeom prst="rect">
-            <a:avLst/>
-          </a:prstGeom>
-          <a:noFill/>
-          <a:ln/>
-        </p:spPr>
-        <p:txBody>
-          <a:bodyPr wrap="square" lIns="0" tIns="0" rIns="0" bIns="0" rtlCol="0" anchor="ctr"/>
-          <a:lstStyle/>
-          <a:p>
-            <a:pPr algn="ctr" indent="0" marL="0">
-              <a:buNone/>
-            </a:pPr>
-            <a:r>
-              <a:rPr lang="en-US" sz="900" b="1" dirty="0">
-                <a:solidFill>
-                  <a:srgbClr val="9D174D"/>
-                </a:solidFill>
-                <a:latin typeface="Trebuchet MS" pitchFamily="34" charset="0"/>
-                <a:ea typeface="Trebuchet MS" pitchFamily="34" charset="-122"/>
-                <a:cs typeface="Trebuchet MS" pitchFamily="34" charset="-120"/>
-              </a:rPr>
-              <a:t>f</a:t>
-            </a:r>
-            <a:endParaRPr lang="en-US" sz="900" dirty="0"/>
-          </a:p>
-        </p:txBody>
-      </p:sp>
-      <p:sp>
-        <p:nvSpPr>
-          <p:cNvPr id="53" name="Shape 51"/>
-          <p:cNvSpPr/>
-          <p:nvPr/>
-        </p:nvSpPr>
-        <p:spPr>
-          <a:xfrm>
-            <a:off x="3962969" y="4169664"/>
-            <a:ext cx="451573" cy="384048"/>
-          </a:xfrm>
-          <a:prstGeom prst="rect">
-            <a:avLst>
-              <a:gd name="adj" fmla="val 9524"/>
-            </a:avLst>
-          </a:prstGeom>
-          <a:solidFill>
-            <a:srgbClr val="FFFFFF"/>
-          </a:solidFill>
-          <a:ln w="12700">
-            <a:solidFill>
-              <a:srgbClr val="DB2777"/>
-            </a:solidFill>
-            <a:prstDash val="solid"/>
-          </a:ln>
-        </p:spPr>
-      </p:sp>
-      <p:sp>
-        <p:nvSpPr>
-          <p:cNvPr id="54" name="Text 52"/>
-          <p:cNvSpPr/>
-          <p:nvPr/>
-        </p:nvSpPr>
-        <p:spPr>
-          <a:xfrm>
-            <a:off x="3962969" y="4169664"/>
-            <a:ext cx="451573" cy="384048"/>
-          </a:xfrm>
-          <a:prstGeom prst="rect">
-            <a:avLst/>
-          </a:prstGeom>
-          <a:noFill/>
-          <a:ln/>
-        </p:spPr>
-        <p:txBody>
-          <a:bodyPr wrap="square" lIns="0" tIns="0" rIns="0" bIns="0" rtlCol="0" anchor="ctr"/>
-          <a:lstStyle/>
-          <a:p>
-            <a:pPr algn="ctr" indent="0" marL="0">
-              <a:buNone/>
-            </a:pPr>
-            <a:r>
-              <a:rPr lang="en-US" sz="900" b="1" dirty="0">
-                <a:solidFill>
-                  <a:srgbClr val="9D174D"/>
-                </a:solidFill>
-                <a:latin typeface="Trebuchet MS" pitchFamily="34" charset="0"/>
-                <a:ea typeface="Trebuchet MS" pitchFamily="34" charset="-122"/>
-                <a:cs typeface="Trebuchet MS" pitchFamily="34" charset="-120"/>
-              </a:rPr>
-              <a:t>-</a:t>
-            </a:r>
-            <a:endParaRPr lang="en-US" sz="900" dirty="0"/>
-          </a:p>
-        </p:txBody>
-      </p:sp>
-      <p:sp>
-        <p:nvSpPr>
-          <p:cNvPr id="55" name="Shape 53"/>
-          <p:cNvSpPr/>
-          <p:nvPr/>
-        </p:nvSpPr>
-        <p:spPr>
-          <a:xfrm>
-            <a:off x="4465487" y="4169664"/>
-            <a:ext cx="451573" cy="384048"/>
-          </a:xfrm>
-          <a:prstGeom prst="rect">
-            <a:avLst>
-              <a:gd name="adj" fmla="val 9524"/>
-            </a:avLst>
-          </a:prstGeom>
-          <a:solidFill>
-            <a:srgbClr val="FFFFFF"/>
-          </a:solidFill>
-          <a:ln w="12700">
-            <a:solidFill>
-              <a:srgbClr val="DB2777"/>
-            </a:solidFill>
-            <a:prstDash val="solid"/>
-          </a:ln>
-        </p:spPr>
-      </p:sp>
-      <p:sp>
-        <p:nvSpPr>
-          <p:cNvPr id="56" name="Text 54"/>
-          <p:cNvSpPr/>
-          <p:nvPr/>
-        </p:nvSpPr>
-        <p:spPr>
-          <a:xfrm>
-            <a:off x="4465487" y="4169664"/>
-            <a:ext cx="451573" cy="384048"/>
-          </a:xfrm>
-          <a:prstGeom prst="rect">
-            <a:avLst/>
-          </a:prstGeom>
-          <a:noFill/>
-          <a:ln/>
-        </p:spPr>
-        <p:txBody>
-          <a:bodyPr wrap="square" lIns="0" tIns="0" rIns="0" bIns="0" rtlCol="0" anchor="ctr"/>
-          <a:lstStyle/>
-          <a:p>
-            <a:pPr algn="ctr" indent="0" marL="0">
-              <a:buNone/>
-            </a:pPr>
-            <a:r>
-              <a:rPr lang="en-US" sz="900" b="1" dirty="0">
-                <a:solidFill>
-                  <a:srgbClr val="9D174D"/>
-                </a:solidFill>
-                <a:latin typeface="Trebuchet MS" pitchFamily="34" charset="0"/>
-                <a:ea typeface="Trebuchet MS" pitchFamily="34" charset="-122"/>
-                <a:cs typeface="Trebuchet MS" pitchFamily="34" charset="-120"/>
-              </a:rPr>
-              <a:t>r</a:t>
-            </a:r>
-            <a:endParaRPr lang="en-US" sz="900" dirty="0"/>
-          </a:p>
-        </p:txBody>
-      </p:sp>
-      <p:sp>
-        <p:nvSpPr>
-          <p:cNvPr id="57" name="Shape 55"/>
-          <p:cNvSpPr/>
-          <p:nvPr/>
-        </p:nvSpPr>
-        <p:spPr>
-          <a:xfrm>
-            <a:off x="4968006" y="4169664"/>
-            <a:ext cx="451573" cy="384048"/>
-          </a:xfrm>
-          <a:prstGeom prst="rect">
-            <a:avLst>
-              <a:gd name="adj" fmla="val 9524"/>
-            </a:avLst>
-          </a:prstGeom>
-          <a:solidFill>
-            <a:srgbClr val="FFFFFF"/>
-          </a:solidFill>
-          <a:ln w="12700">
-            <a:solidFill>
-              <a:srgbClr val="DB2777"/>
-            </a:solidFill>
-            <a:prstDash val="solid"/>
-          </a:ln>
-        </p:spPr>
-      </p:sp>
-      <p:sp>
-        <p:nvSpPr>
-          <p:cNvPr id="58" name="Text 56"/>
-          <p:cNvSpPr/>
-          <p:nvPr/>
-        </p:nvSpPr>
-        <p:spPr>
-          <a:xfrm>
-            <a:off x="4968006" y="4169664"/>
-            <a:ext cx="451573" cy="384048"/>
-          </a:xfrm>
-          <a:prstGeom prst="rect">
-            <a:avLst/>
-          </a:prstGeom>
-          <a:noFill/>
-          <a:ln/>
-        </p:spPr>
-        <p:txBody>
-          <a:bodyPr wrap="square" lIns="0" tIns="0" rIns="0" bIns="0" rtlCol="0" anchor="ctr"/>
-          <a:lstStyle/>
-          <a:p>
-            <a:pPr algn="ctr" indent="0" marL="0">
-              <a:buNone/>
-            </a:pPr>
-            <a:r>
-              <a:rPr lang="en-US" sz="900" b="1" dirty="0">
-                <a:solidFill>
-                  <a:srgbClr val="9D174D"/>
-                </a:solidFill>
-                <a:latin typeface="Trebuchet MS" pitchFamily="34" charset="0"/>
-                <a:ea typeface="Trebuchet MS" pitchFamily="34" charset="-122"/>
-                <a:cs typeface="Trebuchet MS" pitchFamily="34" charset="-120"/>
-              </a:rPr>
-              <a:t>e</a:t>
-            </a:r>
-            <a:endParaRPr lang="en-US" sz="900" dirty="0"/>
-          </a:p>
-        </p:txBody>
-      </p:sp>
-      <p:sp>
-        <p:nvSpPr>
-          <p:cNvPr id="59" name="Shape 57"/>
-          <p:cNvSpPr/>
-          <p:nvPr/>
-        </p:nvSpPr>
-        <p:spPr>
-          <a:xfrm>
-            <a:off x="5470524" y="4169664"/>
-            <a:ext cx="451573" cy="384048"/>
-          </a:xfrm>
-          <a:prstGeom prst="rect">
-            <a:avLst>
-              <a:gd name="adj" fmla="val 9524"/>
-            </a:avLst>
-          </a:prstGeom>
-          <a:solidFill>
-            <a:srgbClr val="FFFFFF"/>
-          </a:solidFill>
-          <a:ln w="12700">
-            <a:solidFill>
-              <a:srgbClr val="DB2777"/>
-            </a:solidFill>
-            <a:prstDash val="solid"/>
-          </a:ln>
-        </p:spPr>
-      </p:sp>
-      <p:sp>
-        <p:nvSpPr>
-          <p:cNvPr id="60" name="Text 58"/>
-          <p:cNvSpPr/>
-          <p:nvPr/>
-        </p:nvSpPr>
-        <p:spPr>
-          <a:xfrm>
-            <a:off x="5470524" y="4169664"/>
-            <a:ext cx="451573" cy="384048"/>
-          </a:xfrm>
-          <a:prstGeom prst="rect">
-            <a:avLst/>
-          </a:prstGeom>
-          <a:noFill/>
-          <a:ln/>
-        </p:spPr>
-        <p:txBody>
-          <a:bodyPr wrap="square" lIns="0" tIns="0" rIns="0" bIns="0" rtlCol="0" anchor="ctr"/>
-          <a:lstStyle/>
-          <a:p>
-            <a:pPr algn="ctr" indent="0" marL="0">
-              <a:buNone/>
-            </a:pPr>
-            <a:r>
-              <a:rPr lang="en-US" sz="900" b="1" dirty="0">
-                <a:solidFill>
-                  <a:srgbClr val="9D174D"/>
-                </a:solidFill>
-                <a:latin typeface="Trebuchet MS" pitchFamily="34" charset="0"/>
-                <a:ea typeface="Trebuchet MS" pitchFamily="34" charset="-122"/>
-                <a:cs typeface="Trebuchet MS" pitchFamily="34" charset="-120"/>
-              </a:rPr>
-              <a:t>f</a:t>
-            </a:r>
-            <a:endParaRPr lang="en-US" sz="900" dirty="0"/>
-          </a:p>
-        </p:txBody>
-      </p:sp>
-      <p:sp>
-        <p:nvSpPr>
-          <p:cNvPr id="61" name="Shape 59"/>
-          <p:cNvSpPr/>
-          <p:nvPr/>
-        </p:nvSpPr>
-        <p:spPr>
-          <a:xfrm>
-            <a:off x="5973042" y="4169664"/>
-            <a:ext cx="451573" cy="384048"/>
-          </a:xfrm>
-          <a:prstGeom prst="rect">
-            <a:avLst>
-              <a:gd name="adj" fmla="val 9524"/>
-            </a:avLst>
-          </a:prstGeom>
-          <a:solidFill>
-            <a:srgbClr val="FFFFFF"/>
-          </a:solidFill>
-          <a:ln w="12700">
-            <a:solidFill>
-              <a:srgbClr val="DB2777"/>
-            </a:solidFill>
-            <a:prstDash val="solid"/>
-          </a:ln>
-        </p:spPr>
-      </p:sp>
-      <p:sp>
-        <p:nvSpPr>
-          <p:cNvPr id="62" name="Text 60"/>
-          <p:cNvSpPr/>
-          <p:nvPr/>
-        </p:nvSpPr>
-        <p:spPr>
-          <a:xfrm>
-            <a:off x="5973042" y="4169664"/>
-            <a:ext cx="451573" cy="384048"/>
-          </a:xfrm>
-          <a:prstGeom prst="rect">
-            <a:avLst/>
-          </a:prstGeom>
-          <a:noFill/>
-          <a:ln/>
-        </p:spPr>
-        <p:txBody>
-          <a:bodyPr wrap="square" lIns="0" tIns="0" rIns="0" bIns="0" rtlCol="0" anchor="ctr"/>
-          <a:lstStyle/>
-          <a:p>
-            <a:pPr algn="ctr" indent="0" marL="0">
-              <a:buNone/>
-            </a:pPr>
-            <a:r>
-              <a:rPr lang="en-US" sz="900" b="1" dirty="0">
-                <a:solidFill>
-                  <a:srgbClr val="9D174D"/>
-                </a:solidFill>
-                <a:latin typeface="Trebuchet MS" pitchFamily="34" charset="0"/>
-                <a:ea typeface="Trebuchet MS" pitchFamily="34" charset="-122"/>
-                <a:cs typeface="Trebuchet MS" pitchFamily="34" charset="-120"/>
-              </a:rPr>
-              <a:t>l</a:t>
-            </a:r>
-            <a:endParaRPr lang="en-US" sz="900" dirty="0"/>
-          </a:p>
-        </p:txBody>
-      </p:sp>
-      <p:sp>
-        <p:nvSpPr>
-          <p:cNvPr id="63" name="Shape 61"/>
-          <p:cNvSpPr/>
-          <p:nvPr/>
-        </p:nvSpPr>
-        <p:spPr>
-          <a:xfrm>
-            <a:off x="6475560" y="4169664"/>
-            <a:ext cx="451573" cy="384048"/>
-          </a:xfrm>
-          <a:prstGeom prst="rect">
-            <a:avLst>
-              <a:gd name="adj" fmla="val 9524"/>
-            </a:avLst>
-          </a:prstGeom>
-          <a:solidFill>
-            <a:srgbClr val="FFFFFF"/>
-          </a:solidFill>
-          <a:ln w="12700">
-            <a:solidFill>
-              <a:srgbClr val="DB2777"/>
-            </a:solidFill>
-            <a:prstDash val="solid"/>
-          </a:ln>
-        </p:spPr>
-      </p:sp>
-      <p:sp>
-        <p:nvSpPr>
-          <p:cNvPr id="64" name="Text 62"/>
-          <p:cNvSpPr/>
-          <p:nvPr/>
-        </p:nvSpPr>
-        <p:spPr>
-          <a:xfrm>
-            <a:off x="6475560" y="4169664"/>
-            <a:ext cx="451573" cy="384048"/>
-          </a:xfrm>
-          <a:prstGeom prst="rect">
-            <a:avLst/>
-          </a:prstGeom>
-          <a:noFill/>
-          <a:ln/>
-        </p:spPr>
-        <p:txBody>
-          <a:bodyPr wrap="square" lIns="0" tIns="0" rIns="0" bIns="0" rtlCol="0" anchor="ctr"/>
-          <a:lstStyle/>
-          <a:p>
-            <a:pPr algn="ctr" indent="0" marL="0">
-              <a:buNone/>
-            </a:pPr>
-            <a:r>
-              <a:rPr lang="en-US" sz="900" b="1" dirty="0">
-                <a:solidFill>
-                  <a:srgbClr val="9D174D"/>
-                </a:solidFill>
-                <a:latin typeface="Trebuchet MS" pitchFamily="34" charset="0"/>
-                <a:ea typeface="Trebuchet MS" pitchFamily="34" charset="-122"/>
-                <a:cs typeface="Trebuchet MS" pitchFamily="34" charset="-120"/>
-              </a:rPr>
-              <a:t>e</a:t>
-            </a:r>
-            <a:endParaRPr lang="en-US" sz="900" dirty="0"/>
-          </a:p>
-        </p:txBody>
-      </p:sp>
-      <p:sp>
-        <p:nvSpPr>
-          <p:cNvPr id="65" name="Shape 63"/>
-          <p:cNvSpPr/>
-          <p:nvPr/>
-        </p:nvSpPr>
-        <p:spPr>
-          <a:xfrm>
-            <a:off x="6978078" y="4169664"/>
-            <a:ext cx="451573" cy="384048"/>
-          </a:xfrm>
-          <a:prstGeom prst="rect">
-            <a:avLst>
-              <a:gd name="adj" fmla="val 9524"/>
-            </a:avLst>
-          </a:prstGeom>
-          <a:solidFill>
-            <a:srgbClr val="FFFFFF"/>
-          </a:solidFill>
-          <a:ln w="12700">
-            <a:solidFill>
-              <a:srgbClr val="DB2777"/>
-            </a:solidFill>
-            <a:prstDash val="solid"/>
-          </a:ln>
-        </p:spPr>
-      </p:sp>
-      <p:sp>
-        <p:nvSpPr>
-          <p:cNvPr id="66" name="Text 64"/>
-          <p:cNvSpPr/>
-          <p:nvPr/>
-        </p:nvSpPr>
-        <p:spPr>
-          <a:xfrm>
-            <a:off x="6978078" y="4169664"/>
-            <a:ext cx="451573" cy="384048"/>
-          </a:xfrm>
-          <a:prstGeom prst="rect">
-            <a:avLst/>
-          </a:prstGeom>
-          <a:noFill/>
-          <a:ln/>
-        </p:spPr>
-        <p:txBody>
-          <a:bodyPr wrap="square" lIns="0" tIns="0" rIns="0" bIns="0" rtlCol="0" anchor="ctr"/>
-          <a:lstStyle/>
-          <a:p>
-            <a:pPr algn="ctr" indent="0" marL="0">
-              <a:buNone/>
-            </a:pPr>
-            <a:r>
-              <a:rPr lang="en-US" sz="900" b="1" dirty="0">
-                <a:solidFill>
-                  <a:srgbClr val="9D174D"/>
-                </a:solidFill>
-                <a:latin typeface="Trebuchet MS" pitchFamily="34" charset="0"/>
-                <a:ea typeface="Trebuchet MS" pitchFamily="34" charset="-122"/>
-                <a:cs typeface="Trebuchet MS" pitchFamily="34" charset="-120"/>
-              </a:rPr>
-              <a:t>c</a:t>
-            </a:r>
-            <a:endParaRPr lang="en-US" sz="900" dirty="0"/>
-          </a:p>
-        </p:txBody>
-      </p:sp>
-      <p:sp>
-        <p:nvSpPr>
-          <p:cNvPr id="67" name="Text 65"/>
-          <p:cNvSpPr/>
-          <p:nvPr/>
-        </p:nvSpPr>
-        <p:spPr>
-          <a:xfrm>
-            <a:off x="6978078" y="4572000"/>
-            <a:ext cx="451573" cy="219456"/>
-          </a:xfrm>
-          <a:prstGeom prst="rect">
-            <a:avLst/>
-          </a:prstGeom>
-          <a:noFill/>
-          <a:ln/>
-        </p:spPr>
-        <p:txBody>
-          <a:bodyPr wrap="square" lIns="0" tIns="0" rIns="0" bIns="0" rtlCol="0" anchor="t"/>
-          <a:lstStyle/>
-          <a:p>
-            <a:pPr algn="ctr" indent="0" marL="0">
-              <a:buNone/>
-            </a:pPr>
-            <a:r>
-              <a:rPr lang="en-US" sz="750" i="1" dirty="0">
-                <a:solidFill>
-                  <a:srgbClr val="94A3B8"/>
-                </a:solidFill>
-                <a:latin typeface="Calibri" pitchFamily="34" charset="0"/>
-                <a:ea typeface="Calibri" pitchFamily="34" charset="-122"/>
-                <a:cs typeface="Calibri" pitchFamily="34" charset="-120"/>
-              </a:rPr>
-              <a:t>/k/</a:t>
-            </a:r>
-            <a:endParaRPr lang="en-US" sz="750" dirty="0"/>
-          </a:p>
-        </p:txBody>
-      </p:sp>
-      <p:sp>
-        <p:nvSpPr>
-          <p:cNvPr id="68" name="Shape 66"/>
-          <p:cNvSpPr/>
-          <p:nvPr/>
-        </p:nvSpPr>
-        <p:spPr>
-          <a:xfrm>
-            <a:off x="7480596" y="4169664"/>
-            <a:ext cx="451573" cy="384048"/>
-          </a:xfrm>
-          <a:prstGeom prst="rect">
-            <a:avLst>
-              <a:gd name="adj" fmla="val 9524"/>
-            </a:avLst>
-          </a:prstGeom>
-          <a:solidFill>
-            <a:srgbClr val="FFFFFF"/>
-          </a:solidFill>
-          <a:ln w="12700">
-            <a:solidFill>
-              <a:srgbClr val="DB2777"/>
-            </a:solidFill>
-            <a:prstDash val="solid"/>
-          </a:ln>
-        </p:spPr>
-      </p:sp>
-      <p:sp>
-        <p:nvSpPr>
-          <p:cNvPr id="69" name="Text 67"/>
-          <p:cNvSpPr/>
-          <p:nvPr/>
-        </p:nvSpPr>
-        <p:spPr>
-          <a:xfrm>
-            <a:off x="7480596" y="4169664"/>
-            <a:ext cx="451573" cy="384048"/>
-          </a:xfrm>
-          <a:prstGeom prst="rect">
-            <a:avLst/>
-          </a:prstGeom>
-          <a:noFill/>
-          <a:ln/>
-        </p:spPr>
-        <p:txBody>
-          <a:bodyPr wrap="square" lIns="0" tIns="0" rIns="0" bIns="0" rtlCol="0" anchor="ctr"/>
-          <a:lstStyle/>
-          <a:p>
-            <a:pPr algn="ctr" indent="0" marL="0">
-              <a:buNone/>
-            </a:pPr>
-            <a:r>
-              <a:rPr lang="en-US" sz="900" b="1" dirty="0">
-                <a:solidFill>
-                  <a:srgbClr val="9D174D"/>
-                </a:solidFill>
-                <a:latin typeface="Trebuchet MS" pitchFamily="34" charset="0"/>
-                <a:ea typeface="Trebuchet MS" pitchFamily="34" charset="-122"/>
-                <a:cs typeface="Trebuchet MS" pitchFamily="34" charset="-120"/>
-              </a:rPr>
-              <a:t>t</a:t>
-            </a:r>
-            <a:endParaRPr lang="en-US" sz="900" dirty="0"/>
-          </a:p>
-        </p:txBody>
-      </p:sp>
-      <p:sp>
-        <p:nvSpPr>
-          <p:cNvPr id="70" name="Shape 68"/>
-          <p:cNvSpPr/>
-          <p:nvPr/>
-        </p:nvSpPr>
-        <p:spPr>
-          <a:xfrm>
-            <a:off x="7983114" y="4169664"/>
-            <a:ext cx="451573" cy="384048"/>
-          </a:xfrm>
-          <a:prstGeom prst="rect">
-            <a:avLst>
-              <a:gd name="adj" fmla="val 9524"/>
-            </a:avLst>
-          </a:prstGeom>
-          <a:solidFill>
-            <a:srgbClr val="FFFFFF"/>
-          </a:solidFill>
-          <a:ln w="12700">
-            <a:solidFill>
-              <a:srgbClr val="DB2777"/>
-            </a:solidFill>
-            <a:prstDash val="solid"/>
-          </a:ln>
-        </p:spPr>
-      </p:sp>
-      <p:sp>
-        <p:nvSpPr>
-          <p:cNvPr id="71" name="Text 69"/>
-          <p:cNvSpPr/>
-          <p:nvPr/>
-        </p:nvSpPr>
-        <p:spPr>
-          <a:xfrm>
-            <a:off x="7983114" y="4169664"/>
-            <a:ext cx="451573" cy="384048"/>
-          </a:xfrm>
-          <a:prstGeom prst="rect">
-            <a:avLst/>
-          </a:prstGeom>
-          <a:noFill/>
-          <a:ln/>
-        </p:spPr>
-        <p:txBody>
-          <a:bodyPr wrap="square" lIns="0" tIns="0" rIns="0" bIns="0" rtlCol="0" anchor="ctr"/>
-          <a:lstStyle/>
-          <a:p>
-            <a:pPr algn="ctr" indent="0" marL="0">
-              <a:buNone/>
-            </a:pPr>
-            <a:r>
-              <a:rPr lang="en-US" sz="900" b="1" dirty="0">
-                <a:solidFill>
-                  <a:srgbClr val="9D174D"/>
-                </a:solidFill>
-                <a:latin typeface="Trebuchet MS" pitchFamily="34" charset="0"/>
-                <a:ea typeface="Trebuchet MS" pitchFamily="34" charset="-122"/>
-                <a:cs typeface="Trebuchet MS" pitchFamily="34" charset="-120"/>
-              </a:rPr>
-              <a:t>ion</a:t>
-            </a:r>
-            <a:endParaRPr lang="en-US" sz="900" dirty="0"/>
-          </a:p>
-        </p:txBody>
-      </p:sp>
-      <p:sp>
-        <p:nvSpPr>
-          <p:cNvPr id="72" name="Text 70"/>
-          <p:cNvSpPr/>
-          <p:nvPr/>
-        </p:nvSpPr>
-        <p:spPr>
-          <a:xfrm>
-            <a:off x="7983114" y="4572000"/>
-            <a:ext cx="451573" cy="219456"/>
-          </a:xfrm>
-          <a:prstGeom prst="rect">
-            <a:avLst/>
-          </a:prstGeom>
-          <a:noFill/>
-          <a:ln/>
-        </p:spPr>
-        <p:txBody>
-          <a:bodyPr wrap="square" lIns="0" tIns="0" rIns="0" bIns="0" rtlCol="0" anchor="t"/>
-          <a:lstStyle/>
-          <a:p>
-            <a:pPr algn="ctr" indent="0" marL="0">
-              <a:buNone/>
-            </a:pPr>
-            <a:r>
-              <a:rPr lang="en-US" sz="750" i="1" dirty="0">
-                <a:solidFill>
-                  <a:srgbClr val="94A3B8"/>
-                </a:solidFill>
-                <a:latin typeface="Calibri" pitchFamily="34" charset="0"/>
-                <a:ea typeface="Calibri" pitchFamily="34" charset="-122"/>
-                <a:cs typeface="Calibri" pitchFamily="34" charset="-120"/>
-              </a:rPr>
-              <a:t>/shun/</a:t>
-            </a:r>
-            <a:endParaRPr lang="en-US" sz="750" dirty="0"/>
           </a:p>
         </p:txBody>
       </p:sp>
@@ -26486,7 +25276,7 @@
                 <a:ea typeface="Calibri" pitchFamily="34" charset="-122"/>
                 <a:cs typeface="Calibri" pitchFamily="34" charset="-120"/>
               </a:rPr>
-              <a:t>bend or throw back</a:t>
+              <a:t>bend or throw</a:t>
             </a:r>
             <a:endParaRPr lang="en-US" sz="850" dirty="0"/>
           </a:p>
@@ -26598,7 +25388,7 @@
                 <a:ea typeface="Calibri" pitchFamily="34" charset="-122"/>
                 <a:cs typeface="Calibri" pitchFamily="34" charset="-120"/>
               </a:rPr>
-              <a:t>ongoing action</a:t>
+              <a:t>action happening now</a:t>
             </a:r>
             <a:endParaRPr lang="en-US" sz="850" dirty="0"/>
           </a:p>
@@ -28302,7 +27092,7 @@
                 <a:ea typeface="Calibri" pitchFamily="34" charset="-122"/>
                 <a:cs typeface="Calibri" pitchFamily="34" charset="-120"/>
               </a:rPr>
-              <a:t>bend or throw back</a:t>
+              <a:t>bend or throw</a:t>
             </a:r>
             <a:endParaRPr lang="en-US" sz="850" dirty="0"/>
           </a:p>
@@ -28414,7 +27204,7 @@
                 <a:ea typeface="Calibri" pitchFamily="34" charset="-122"/>
                 <a:cs typeface="Calibri" pitchFamily="34" charset="-120"/>
               </a:rPr>
-              <a:t>ongoing action</a:t>
+              <a:t>action happening now</a:t>
             </a:r>
             <a:endParaRPr lang="en-US" sz="850" dirty="0"/>
           </a:p>
@@ -28678,7 +27468,7 @@
                 <a:ea typeface="Trebuchet MS" pitchFamily="34" charset="-122"/>
                 <a:cs typeface="Trebuchet MS" pitchFamily="34" charset="-120"/>
               </a:rPr>
-              <a:t>flec</a:t>
+              <a:t>flect</a:t>
             </a:r>
             <a:endParaRPr lang="en-US" sz="1400" dirty="0"/>
           </a:p>
@@ -28783,7 +27573,7 @@
                 <a:ea typeface="Trebuchet MS" pitchFamily="34" charset="-122"/>
                 <a:cs typeface="Trebuchet MS" pitchFamily="34" charset="-120"/>
               </a:rPr>
-              <a:t>ting</a:t>
+              <a:t>ing</a:t>
             </a:r>
             <a:endParaRPr lang="en-US" sz="1400" dirty="0"/>
           </a:p>
@@ -29636,7 +28426,7 @@
                 <a:ea typeface="Calibri" pitchFamily="34" charset="-122"/>
                 <a:cs typeface="Calibri" pitchFamily="34" charset="-120"/>
               </a:rPr>
-              <a:t>bend or throw back</a:t>
+              <a:t>bend or throw</a:t>
             </a:r>
             <a:endParaRPr lang="en-US" sz="850" dirty="0"/>
           </a:p>
@@ -29748,7 +28538,7 @@
                 <a:ea typeface="Calibri" pitchFamily="34" charset="-122"/>
                 <a:cs typeface="Calibri" pitchFamily="34" charset="-120"/>
               </a:rPr>
-              <a:t>ongoing action</a:t>
+              <a:t>action happening now</a:t>
             </a:r>
             <a:endParaRPr lang="en-US" sz="850" dirty="0"/>
           </a:p>
@@ -30012,7 +28802,7 @@
                 <a:ea typeface="Trebuchet MS" pitchFamily="34" charset="-122"/>
                 <a:cs typeface="Trebuchet MS" pitchFamily="34" charset="-120"/>
               </a:rPr>
-              <a:t>flec</a:t>
+              <a:t>flect</a:t>
             </a:r>
             <a:endParaRPr lang="en-US" sz="1400" dirty="0"/>
           </a:p>
@@ -30117,7 +28907,7 @@
                 <a:ea typeface="Trebuchet MS" pitchFamily="34" charset="-122"/>
                 <a:cs typeface="Trebuchet MS" pitchFamily="34" charset="-120"/>
               </a:rPr>
-              <a:t>ting</a:t>
+              <a:t>ing</a:t>
             </a:r>
             <a:endParaRPr lang="en-US" sz="1400" dirty="0"/>
           </a:p>
@@ -30224,8 +29014,8 @@
         </p:nvSpPr>
         <p:spPr>
           <a:xfrm>
-            <a:off x="1951330" y="4169664"/>
-            <a:ext cx="676656" cy="384048"/>
+            <a:off x="2124837" y="4169664"/>
+            <a:ext cx="685800" cy="384048"/>
           </a:xfrm>
           <a:prstGeom prst="rect">
             <a:avLst>
@@ -30251,8 +29041,8 @@
         </p:nvSpPr>
         <p:spPr>
           <a:xfrm>
-            <a:off x="1951330" y="4169664"/>
-            <a:ext cx="676656" cy="384048"/>
+            <a:off x="2124837" y="4169664"/>
+            <a:ext cx="685800" cy="384048"/>
           </a:xfrm>
           <a:prstGeom prst="rect">
             <a:avLst/>
@@ -30290,8 +29080,8 @@
         </p:nvSpPr>
         <p:spPr>
           <a:xfrm>
-            <a:off x="2677363" y="4169664"/>
-            <a:ext cx="676656" cy="384048"/>
+            <a:off x="3033522" y="4169664"/>
+            <a:ext cx="685800" cy="384048"/>
           </a:xfrm>
           <a:prstGeom prst="rect">
             <a:avLst>
@@ -30317,8 +29107,8 @@
         </p:nvSpPr>
         <p:spPr>
           <a:xfrm>
-            <a:off x="2677363" y="4169664"/>
-            <a:ext cx="676656" cy="384048"/>
+            <a:off x="3033522" y="4169664"/>
+            <a:ext cx="685800" cy="384048"/>
           </a:xfrm>
           <a:prstGeom prst="rect">
             <a:avLst/>
@@ -30356,8 +29146,8 @@
         </p:nvSpPr>
         <p:spPr>
           <a:xfrm>
-            <a:off x="3403397" y="4169664"/>
-            <a:ext cx="676656" cy="384048"/>
+            <a:off x="3942207" y="4169664"/>
+            <a:ext cx="685800" cy="384048"/>
           </a:xfrm>
           <a:prstGeom prst="rect">
             <a:avLst>
@@ -30383,8 +29173,8 @@
         </p:nvSpPr>
         <p:spPr>
           <a:xfrm>
-            <a:off x="3403397" y="4169664"/>
-            <a:ext cx="676656" cy="384048"/>
+            <a:off x="3942207" y="4169664"/>
+            <a:ext cx="685800" cy="384048"/>
           </a:xfrm>
           <a:prstGeom prst="rect">
             <a:avLst/>
@@ -30408,7 +29198,7 @@
                 <a:ea typeface="Trebuchet MS" pitchFamily="34" charset="-122"/>
                 <a:cs typeface="Trebuchet MS" pitchFamily="34" charset="-120"/>
               </a:rPr>
-              <a:t>f</a:t>
+              <a:t>fl</a:t>
             </a:r>
             <a:endParaRPr lang="en-US" sz="900" dirty="0"/>
           </a:p>
@@ -30422,8 +29212,8 @@
         </p:nvSpPr>
         <p:spPr>
           <a:xfrm>
-            <a:off x="4129430" y="4169664"/>
-            <a:ext cx="676656" cy="384048"/>
+            <a:off x="4850892" y="4169664"/>
+            <a:ext cx="685800" cy="384048"/>
           </a:xfrm>
           <a:prstGeom prst="rect">
             <a:avLst>
@@ -30449,8 +29239,8 @@
         </p:nvSpPr>
         <p:spPr>
           <a:xfrm>
-            <a:off x="4129430" y="4169664"/>
-            <a:ext cx="676656" cy="384048"/>
+            <a:off x="4850892" y="4169664"/>
+            <a:ext cx="685800" cy="384048"/>
           </a:xfrm>
           <a:prstGeom prst="rect">
             <a:avLst/>
@@ -30474,7 +29264,7 @@
                 <a:ea typeface="Trebuchet MS" pitchFamily="34" charset="-122"/>
                 <a:cs typeface="Trebuchet MS" pitchFamily="34" charset="-120"/>
               </a:rPr>
-              <a:t>l</a:t>
+              <a:t>e</a:t>
             </a:r>
             <a:endParaRPr lang="en-US" sz="900" dirty="0"/>
           </a:p>
@@ -30488,8 +29278,8 @@
         </p:nvSpPr>
         <p:spPr>
           <a:xfrm>
-            <a:off x="4855464" y="4169664"/>
-            <a:ext cx="676656" cy="384048"/>
+            <a:off x="5759577" y="4169664"/>
+            <a:ext cx="685800" cy="384048"/>
           </a:xfrm>
           <a:prstGeom prst="rect">
             <a:avLst>
@@ -30515,8 +29305,8 @@
         </p:nvSpPr>
         <p:spPr>
           <a:xfrm>
-            <a:off x="4855464" y="4169664"/>
-            <a:ext cx="676656" cy="384048"/>
+            <a:off x="5759577" y="4169664"/>
+            <a:ext cx="685800" cy="384048"/>
           </a:xfrm>
           <a:prstGeom prst="rect">
             <a:avLst/>
@@ -30540,7 +29330,7 @@
                 <a:ea typeface="Trebuchet MS" pitchFamily="34" charset="-122"/>
                 <a:cs typeface="Trebuchet MS" pitchFamily="34" charset="-120"/>
               </a:rPr>
-              <a:t>e</a:t>
+              <a:t>c</a:t>
             </a:r>
             <a:endParaRPr lang="en-US" sz="900" dirty="0"/>
           </a:p>
@@ -30548,14 +29338,53 @@
       </p:sp>
       <p:sp>
         <p:nvSpPr>
-          <p:cNvPr id="49" name="Shape 47"/>
-          <p:cNvSpPr/>
-          <p:nvPr/>
-        </p:nvSpPr>
-        <p:spPr>
-          <a:xfrm>
-            <a:off x="5581498" y="4169664"/>
-            <a:ext cx="676656" cy="384048"/>
+          <p:cNvPr id="49" name="Text 47"/>
+          <p:cNvSpPr/>
+          <p:nvPr/>
+        </p:nvSpPr>
+        <p:spPr>
+          <a:xfrm>
+            <a:off x="5759577" y="4572000"/>
+            <a:ext cx="685800" cy="219456"/>
+          </a:xfrm>
+          <a:prstGeom prst="rect">
+            <a:avLst/>
+          </a:prstGeom>
+          <a:noFill/>
+          <a:ln/>
+        </p:spPr>
+        <p:txBody>
+          <a:bodyPr wrap="square" lIns="0" tIns="0" rIns="0" bIns="0" rtlCol="0" anchor="t"/>
+          <a:lstStyle/>
+          <a:p>
+            <a:pPr algn="ctr" indent="0" marL="0">
+              <a:buNone/>
+            </a:pPr>
+            <a:r>
+              <a:rPr lang="en-US" sz="750" i="1" dirty="0">
+                <a:solidFill>
+                  <a:srgbClr val="94A3B8"/>
+                </a:solidFill>
+                <a:latin typeface="Calibri" pitchFamily="34" charset="0"/>
+                <a:ea typeface="Calibri" pitchFamily="34" charset="-122"/>
+                <a:cs typeface="Calibri" pitchFamily="34" charset="-120"/>
+              </a:rPr>
+              <a:t>/k/</a:t>
+            </a:r>
+            <a:endParaRPr lang="en-US" sz="750" dirty="0"/>
+          </a:p>
+        </p:txBody>
+      </p:sp>
+      <p:sp>
+        <p:nvSpPr>
+          <p:cNvPr id="50" name="Shape 48"/>
+          <p:cNvSpPr/>
+          <p:nvPr/>
+        </p:nvSpPr>
+        <p:spPr>
+          <a:xfrm>
+            <a:off x="6668262" y="4169664"/>
+            <a:ext cx="685800" cy="384048"/>
           </a:xfrm>
           <a:prstGeom prst="rect">
             <a:avLst>
@@ -30575,14 +29404,14 @@
       </p:sp>
       <p:sp>
         <p:nvSpPr>
-          <p:cNvPr id="50" name="Text 48"/>
-          <p:cNvSpPr/>
-          <p:nvPr/>
-        </p:nvSpPr>
-        <p:spPr>
-          <a:xfrm>
-            <a:off x="5581498" y="4169664"/>
-            <a:ext cx="676656" cy="384048"/>
+          <p:cNvPr id="51" name="Text 49"/>
+          <p:cNvSpPr/>
+          <p:nvPr/>
+        </p:nvSpPr>
+        <p:spPr>
+          <a:xfrm>
+            <a:off x="6668262" y="4169664"/>
+            <a:ext cx="685800" cy="384048"/>
           </a:xfrm>
           <a:prstGeom prst="rect">
             <a:avLst/>
@@ -30606,7 +29435,7 @@
                 <a:ea typeface="Trebuchet MS" pitchFamily="34" charset="-122"/>
                 <a:cs typeface="Trebuchet MS" pitchFamily="34" charset="-120"/>
               </a:rPr>
-              <a:t>c</a:t>
+              <a:t>t</a:t>
             </a:r>
             <a:endParaRPr lang="en-US" sz="900" dirty="0"/>
           </a:p>
@@ -30614,53 +29443,14 @@
       </p:sp>
       <p:sp>
         <p:nvSpPr>
-          <p:cNvPr id="51" name="Text 49"/>
-          <p:cNvSpPr/>
-          <p:nvPr/>
-        </p:nvSpPr>
-        <p:spPr>
-          <a:xfrm>
-            <a:off x="5581498" y="4572000"/>
-            <a:ext cx="676656" cy="219456"/>
-          </a:xfrm>
-          <a:prstGeom prst="rect">
-            <a:avLst/>
-          </a:prstGeom>
-          <a:noFill/>
-          <a:ln/>
-        </p:spPr>
-        <p:txBody>
-          <a:bodyPr wrap="square" lIns="0" tIns="0" rIns="0" bIns="0" rtlCol="0" anchor="t"/>
-          <a:lstStyle/>
-          <a:p>
-            <a:pPr algn="ctr" indent="0" marL="0">
-              <a:buNone/>
-            </a:pPr>
-            <a:r>
-              <a:rPr lang="en-US" sz="750" i="1" dirty="0">
-                <a:solidFill>
-                  <a:srgbClr val="94A3B8"/>
-                </a:solidFill>
-                <a:latin typeface="Calibri" pitchFamily="34" charset="0"/>
-                <a:ea typeface="Calibri" pitchFamily="34" charset="-122"/>
-                <a:cs typeface="Calibri" pitchFamily="34" charset="-120"/>
-              </a:rPr>
-              <a:t>/k/</a:t>
-            </a:r>
-            <a:endParaRPr lang="en-US" sz="750" dirty="0"/>
-          </a:p>
-        </p:txBody>
-      </p:sp>
-      <p:sp>
-        <p:nvSpPr>
           <p:cNvPr id="52" name="Shape 50"/>
           <p:cNvSpPr/>
           <p:nvPr/>
         </p:nvSpPr>
         <p:spPr>
           <a:xfrm>
-            <a:off x="6307531" y="4169664"/>
-            <a:ext cx="676656" cy="384048"/>
+            <a:off x="7576947" y="4169664"/>
+            <a:ext cx="685800" cy="384048"/>
           </a:xfrm>
           <a:prstGeom prst="rect">
             <a:avLst>
@@ -30686,8 +29476,8 @@
         </p:nvSpPr>
         <p:spPr>
           <a:xfrm>
-            <a:off x="6307531" y="4169664"/>
-            <a:ext cx="676656" cy="384048"/>
+            <a:off x="7576947" y="4169664"/>
+            <a:ext cx="685800" cy="384048"/>
           </a:xfrm>
           <a:prstGeom prst="rect">
             <a:avLst/>
@@ -30711,139 +29501,7 @@
                 <a:ea typeface="Trebuchet MS" pitchFamily="34" charset="-122"/>
                 <a:cs typeface="Trebuchet MS" pitchFamily="34" charset="-120"/>
               </a:rPr>
-              <a:t>t</a:t>
-            </a:r>
-            <a:endParaRPr lang="en-US" sz="900" dirty="0"/>
-          </a:p>
-        </p:txBody>
-      </p:sp>
-      <p:sp>
-        <p:nvSpPr>
-          <p:cNvPr id="54" name="Shape 52"/>
-          <p:cNvSpPr/>
-          <p:nvPr/>
-        </p:nvSpPr>
-        <p:spPr>
-          <a:xfrm>
-            <a:off x="7033565" y="4169664"/>
-            <a:ext cx="676656" cy="384048"/>
-          </a:xfrm>
-          <a:prstGeom prst="rect">
-            <a:avLst>
-              <a:gd name="adj" fmla="val 9524"/>
-            </a:avLst>
-          </a:prstGeom>
-          <a:solidFill>
-            <a:srgbClr val="FFFFFF"/>
-          </a:solidFill>
-          <a:ln w="12700">
-            <a:solidFill>
-              <a:srgbClr val="DB2777"/>
-            </a:solidFill>
-            <a:prstDash val="solid"/>
-          </a:ln>
-        </p:spPr>
-      </p:sp>
-      <p:sp>
-        <p:nvSpPr>
-          <p:cNvPr id="55" name="Text 53"/>
-          <p:cNvSpPr/>
-          <p:nvPr/>
-        </p:nvSpPr>
-        <p:spPr>
-          <a:xfrm>
-            <a:off x="7033565" y="4169664"/>
-            <a:ext cx="676656" cy="384048"/>
-          </a:xfrm>
-          <a:prstGeom prst="rect">
-            <a:avLst/>
-          </a:prstGeom>
-          <a:noFill/>
-          <a:ln/>
-        </p:spPr>
-        <p:txBody>
-          <a:bodyPr wrap="square" lIns="0" tIns="0" rIns="0" bIns="0" rtlCol="0" anchor="ctr"/>
-          <a:lstStyle/>
-          <a:p>
-            <a:pPr algn="ctr" indent="0" marL="0">
-              <a:buNone/>
-            </a:pPr>
-            <a:r>
-              <a:rPr lang="en-US" sz="900" b="1" dirty="0">
-                <a:solidFill>
-                  <a:srgbClr val="9D174D"/>
-                </a:solidFill>
-                <a:latin typeface="Trebuchet MS" pitchFamily="34" charset="0"/>
-                <a:ea typeface="Trebuchet MS" pitchFamily="34" charset="-122"/>
-                <a:cs typeface="Trebuchet MS" pitchFamily="34" charset="-120"/>
-              </a:rPr>
-              <a:t>i</a:t>
-            </a:r>
-            <a:endParaRPr lang="en-US" sz="900" dirty="0"/>
-          </a:p>
-        </p:txBody>
-      </p:sp>
-      <p:sp>
-        <p:nvSpPr>
-          <p:cNvPr id="56" name="Shape 54"/>
-          <p:cNvSpPr/>
-          <p:nvPr/>
-        </p:nvSpPr>
-        <p:spPr>
-          <a:xfrm>
-            <a:off x="7759598" y="4169664"/>
-            <a:ext cx="676656" cy="384048"/>
-          </a:xfrm>
-          <a:prstGeom prst="rect">
-            <a:avLst>
-              <a:gd name="adj" fmla="val 9524"/>
-            </a:avLst>
-          </a:prstGeom>
-          <a:solidFill>
-            <a:srgbClr val="FFFFFF"/>
-          </a:solidFill>
-          <a:ln w="12700">
-            <a:solidFill>
-              <a:srgbClr val="DB2777"/>
-            </a:solidFill>
-            <a:prstDash val="solid"/>
-          </a:ln>
-        </p:spPr>
-      </p:sp>
-      <p:sp>
-        <p:nvSpPr>
-          <p:cNvPr id="57" name="Text 55"/>
-          <p:cNvSpPr/>
-          <p:nvPr/>
-        </p:nvSpPr>
-        <p:spPr>
-          <a:xfrm>
-            <a:off x="7759598" y="4169664"/>
-            <a:ext cx="676656" cy="384048"/>
-          </a:xfrm>
-          <a:prstGeom prst="rect">
-            <a:avLst/>
-          </a:prstGeom>
-          <a:noFill/>
-          <a:ln/>
-        </p:spPr>
-        <p:txBody>
-          <a:bodyPr wrap="square" lIns="0" tIns="0" rIns="0" bIns="0" rtlCol="0" anchor="ctr"/>
-          <a:lstStyle/>
-          <a:p>
-            <a:pPr algn="ctr" indent="0" marL="0">
-              <a:buNone/>
-            </a:pPr>
-            <a:r>
-              <a:rPr lang="en-US" sz="900" b="1" dirty="0">
-                <a:solidFill>
-                  <a:srgbClr val="9D174D"/>
-                </a:solidFill>
-                <a:latin typeface="Trebuchet MS" pitchFamily="34" charset="0"/>
-                <a:ea typeface="Trebuchet MS" pitchFamily="34" charset="-122"/>
-                <a:cs typeface="Trebuchet MS" pitchFamily="34" charset="-120"/>
-              </a:rPr>
-              <a:t>ng</a:t>
+              <a:t>ing</a:t>
             </a:r>
             <a:endParaRPr lang="en-US" sz="900" dirty="0"/>
           </a:p>
@@ -31274,7 +29932,7 @@
                 <a:ea typeface="Trebuchet MS" pitchFamily="34" charset="-122"/>
                 <a:cs typeface="Trebuchet MS" pitchFamily="34" charset="-120"/>
               </a:rPr>
-              <a:t>reflective</a:t>
+              <a:t>reflected</a:t>
             </a:r>
             <a:endParaRPr lang="en-US" sz="2800" dirty="0"/>
           </a:p>
@@ -32101,7 +30759,7 @@
                 <a:ea typeface="Trebuchet MS" pitchFamily="34" charset="-122"/>
                 <a:cs typeface="Trebuchet MS" pitchFamily="34" charset="-120"/>
               </a:rPr>
-              <a:t>reflective</a:t>
+              <a:t>reflected</a:t>
             </a:r>
             <a:endParaRPr lang="en-US" sz="2800" dirty="0"/>
           </a:p>
@@ -32391,7 +31049,7 @@
                 <a:ea typeface="Calibri" pitchFamily="34" charset="-122"/>
                 <a:cs typeface="Calibri" pitchFamily="34" charset="-120"/>
               </a:rPr>
-              <a:t>bend or throw back</a:t>
+              <a:t>bend or throw</a:t>
             </a:r>
             <a:endParaRPr lang="en-US" sz="850" dirty="0"/>
           </a:p>
@@ -32464,7 +31122,7 @@
                 <a:ea typeface="Trebuchet MS" pitchFamily="34" charset="-122"/>
                 <a:cs typeface="Trebuchet MS" pitchFamily="34" charset="-120"/>
               </a:rPr>
-              <a:t>ive</a:t>
+              <a:t>ed</a:t>
             </a:r>
             <a:endParaRPr lang="en-US" sz="1300" dirty="0"/>
           </a:p>
@@ -32503,7 +31161,7 @@
                 <a:ea typeface="Calibri" pitchFamily="34" charset="-122"/>
                 <a:cs typeface="Calibri" pitchFamily="34" charset="-120"/>
               </a:rPr>
-              <a:t>having the quality of</a:t>
+              <a:t>happened in the past</a:t>
             </a:r>
             <a:endParaRPr lang="en-US" sz="850" dirty="0"/>
           </a:p>
@@ -33198,7 +31856,7 @@
                 <a:ea typeface="Trebuchet MS" pitchFamily="34" charset="-122"/>
                 <a:cs typeface="Trebuchet MS" pitchFamily="34" charset="-120"/>
               </a:rPr>
-              <a:t>reflective</a:t>
+              <a:t>reflected</a:t>
             </a:r>
             <a:endParaRPr lang="en-US" sz="2800" dirty="0"/>
           </a:p>
@@ -33488,7 +32146,7 @@
                 <a:ea typeface="Calibri" pitchFamily="34" charset="-122"/>
                 <a:cs typeface="Calibri" pitchFamily="34" charset="-120"/>
               </a:rPr>
-              <a:t>bend or throw back</a:t>
+              <a:t>bend or throw</a:t>
             </a:r>
             <a:endParaRPr lang="en-US" sz="850" dirty="0"/>
           </a:p>
@@ -33561,7 +32219,7 @@
                 <a:ea typeface="Trebuchet MS" pitchFamily="34" charset="-122"/>
                 <a:cs typeface="Trebuchet MS" pitchFamily="34" charset="-120"/>
               </a:rPr>
-              <a:t>ive</a:t>
+              <a:t>ed</a:t>
             </a:r>
             <a:endParaRPr lang="en-US" sz="1300" dirty="0"/>
           </a:p>
@@ -33600,7 +32258,7 @@
                 <a:ea typeface="Calibri" pitchFamily="34" charset="-122"/>
                 <a:cs typeface="Calibri" pitchFamily="34" charset="-120"/>
               </a:rPr>
-              <a:t>having the quality of</a:t>
+              <a:t>happened in the past</a:t>
             </a:r>
             <a:endParaRPr lang="en-US" sz="850" dirty="0"/>
           </a:p>
@@ -33864,7 +32522,7 @@
                 <a:ea typeface="Trebuchet MS" pitchFamily="34" charset="-122"/>
                 <a:cs typeface="Trebuchet MS" pitchFamily="34" charset="-120"/>
               </a:rPr>
-              <a:t>flec</a:t>
+              <a:t>flect</a:t>
             </a:r>
             <a:endParaRPr lang="en-US" sz="1400" dirty="0"/>
           </a:p>
@@ -33969,7 +32627,7 @@
                 <a:ea typeface="Trebuchet MS" pitchFamily="34" charset="-122"/>
                 <a:cs typeface="Trebuchet MS" pitchFamily="34" charset="-120"/>
               </a:rPr>
-              <a:t>tive</a:t>
+              <a:t>ed</a:t>
             </a:r>
             <a:endParaRPr lang="en-US" sz="1400" dirty="0"/>
           </a:p>
@@ -34532,7 +33190,7 @@
                 <a:ea typeface="Trebuchet MS" pitchFamily="34" charset="-122"/>
                 <a:cs typeface="Trebuchet MS" pitchFamily="34" charset="-120"/>
               </a:rPr>
-              <a:t>reflective</a:t>
+              <a:t>reflected</a:t>
             </a:r>
             <a:endParaRPr lang="en-US" sz="2800" dirty="0"/>
           </a:p>
@@ -34822,7 +33480,7 @@
                 <a:ea typeface="Calibri" pitchFamily="34" charset="-122"/>
                 <a:cs typeface="Calibri" pitchFamily="34" charset="-120"/>
               </a:rPr>
-              <a:t>bend or throw back</a:t>
+              <a:t>bend or throw</a:t>
             </a:r>
             <a:endParaRPr lang="en-US" sz="850" dirty="0"/>
           </a:p>
@@ -34895,7 +33553,7 @@
                 <a:ea typeface="Trebuchet MS" pitchFamily="34" charset="-122"/>
                 <a:cs typeface="Trebuchet MS" pitchFamily="34" charset="-120"/>
               </a:rPr>
-              <a:t>ive</a:t>
+              <a:t>ed</a:t>
             </a:r>
             <a:endParaRPr lang="en-US" sz="1300" dirty="0"/>
           </a:p>
@@ -34934,7 +33592,7 @@
                 <a:ea typeface="Calibri" pitchFamily="34" charset="-122"/>
                 <a:cs typeface="Calibri" pitchFamily="34" charset="-120"/>
               </a:rPr>
-              <a:t>having the quality of</a:t>
+              <a:t>happened in the past</a:t>
             </a:r>
             <a:endParaRPr lang="en-US" sz="850" dirty="0"/>
           </a:p>
@@ -35198,7 +33856,7 @@
                 <a:ea typeface="Trebuchet MS" pitchFamily="34" charset="-122"/>
                 <a:cs typeface="Trebuchet MS" pitchFamily="34" charset="-120"/>
               </a:rPr>
-              <a:t>flec</a:t>
+              <a:t>flect</a:t>
             </a:r>
             <a:endParaRPr lang="en-US" sz="1400" dirty="0"/>
           </a:p>
@@ -35303,7 +33961,7 @@
                 <a:ea typeface="Trebuchet MS" pitchFamily="34" charset="-122"/>
                 <a:cs typeface="Trebuchet MS" pitchFamily="34" charset="-120"/>
               </a:rPr>
-              <a:t>tive</a:t>
+              <a:t>ed</a:t>
             </a:r>
             <a:endParaRPr lang="en-US" sz="1400" dirty="0"/>
           </a:p>
@@ -35410,8 +34068,8 @@
         </p:nvSpPr>
         <p:spPr>
           <a:xfrm>
-            <a:off x="1951330" y="4169664"/>
-            <a:ext cx="676656" cy="384048"/>
+            <a:off x="2023872" y="4169664"/>
+            <a:ext cx="685800" cy="384048"/>
           </a:xfrm>
           <a:prstGeom prst="rect">
             <a:avLst>
@@ -35437,8 +34095,8 @@
         </p:nvSpPr>
         <p:spPr>
           <a:xfrm>
-            <a:off x="1951330" y="4169664"/>
-            <a:ext cx="676656" cy="384048"/>
+            <a:off x="2023872" y="4169664"/>
+            <a:ext cx="685800" cy="384048"/>
           </a:xfrm>
           <a:prstGeom prst="rect">
             <a:avLst/>
@@ -35476,8 +34134,8 @@
         </p:nvSpPr>
         <p:spPr>
           <a:xfrm>
-            <a:off x="2677363" y="4169664"/>
-            <a:ext cx="676656" cy="384048"/>
+            <a:off x="2831592" y="4169664"/>
+            <a:ext cx="685800" cy="384048"/>
           </a:xfrm>
           <a:prstGeom prst="rect">
             <a:avLst>
@@ -35503,8 +34161,8 @@
         </p:nvSpPr>
         <p:spPr>
           <a:xfrm>
-            <a:off x="2677363" y="4169664"/>
-            <a:ext cx="676656" cy="384048"/>
+            <a:off x="2831592" y="4169664"/>
+            <a:ext cx="685800" cy="384048"/>
           </a:xfrm>
           <a:prstGeom prst="rect">
             <a:avLst/>
@@ -35542,8 +34200,8 @@
         </p:nvSpPr>
         <p:spPr>
           <a:xfrm>
-            <a:off x="3403397" y="4169664"/>
-            <a:ext cx="676656" cy="384048"/>
+            <a:off x="3639312" y="4169664"/>
+            <a:ext cx="685800" cy="384048"/>
           </a:xfrm>
           <a:prstGeom prst="rect">
             <a:avLst>
@@ -35569,8 +34227,8 @@
         </p:nvSpPr>
         <p:spPr>
           <a:xfrm>
-            <a:off x="3403397" y="4169664"/>
-            <a:ext cx="676656" cy="384048"/>
+            <a:off x="3639312" y="4169664"/>
+            <a:ext cx="685800" cy="384048"/>
           </a:xfrm>
           <a:prstGeom prst="rect">
             <a:avLst/>
@@ -35594,7 +34252,7 @@
                 <a:ea typeface="Trebuchet MS" pitchFamily="34" charset="-122"/>
                 <a:cs typeface="Trebuchet MS" pitchFamily="34" charset="-120"/>
               </a:rPr>
-              <a:t>f</a:t>
+              <a:t>fl</a:t>
             </a:r>
             <a:endParaRPr lang="en-US" sz="900" dirty="0"/>
           </a:p>
@@ -35608,8 +34266,8 @@
         </p:nvSpPr>
         <p:spPr>
           <a:xfrm>
-            <a:off x="4129430" y="4169664"/>
-            <a:ext cx="676656" cy="384048"/>
+            <a:off x="4447032" y="4169664"/>
+            <a:ext cx="685800" cy="384048"/>
           </a:xfrm>
           <a:prstGeom prst="rect">
             <a:avLst>
@@ -35635,8 +34293,8 @@
         </p:nvSpPr>
         <p:spPr>
           <a:xfrm>
-            <a:off x="4129430" y="4169664"/>
-            <a:ext cx="676656" cy="384048"/>
+            <a:off x="4447032" y="4169664"/>
+            <a:ext cx="685800" cy="384048"/>
           </a:xfrm>
           <a:prstGeom prst="rect">
             <a:avLst/>
@@ -35660,7 +34318,7 @@
                 <a:ea typeface="Trebuchet MS" pitchFamily="34" charset="-122"/>
                 <a:cs typeface="Trebuchet MS" pitchFamily="34" charset="-120"/>
               </a:rPr>
-              <a:t>l</a:t>
+              <a:t>e</a:t>
             </a:r>
             <a:endParaRPr lang="en-US" sz="900" dirty="0"/>
           </a:p>
@@ -35674,8 +34332,8 @@
         </p:nvSpPr>
         <p:spPr>
           <a:xfrm>
-            <a:off x="4855464" y="4169664"/>
-            <a:ext cx="676656" cy="384048"/>
+            <a:off x="5254752" y="4169664"/>
+            <a:ext cx="685800" cy="384048"/>
           </a:xfrm>
           <a:prstGeom prst="rect">
             <a:avLst>
@@ -35701,8 +34359,8 @@
         </p:nvSpPr>
         <p:spPr>
           <a:xfrm>
-            <a:off x="4855464" y="4169664"/>
-            <a:ext cx="676656" cy="384048"/>
+            <a:off x="5254752" y="4169664"/>
+            <a:ext cx="685800" cy="384048"/>
           </a:xfrm>
           <a:prstGeom prst="rect">
             <a:avLst/>
@@ -35726,7 +34384,7 @@
                 <a:ea typeface="Trebuchet MS" pitchFamily="34" charset="-122"/>
                 <a:cs typeface="Trebuchet MS" pitchFamily="34" charset="-120"/>
               </a:rPr>
-              <a:t>e</a:t>
+              <a:t>c</a:t>
             </a:r>
             <a:endParaRPr lang="en-US" sz="900" dirty="0"/>
           </a:p>
@@ -35734,14 +34392,53 @@
       </p:sp>
       <p:sp>
         <p:nvSpPr>
-          <p:cNvPr id="49" name="Shape 47"/>
-          <p:cNvSpPr/>
-          <p:nvPr/>
-        </p:nvSpPr>
-        <p:spPr>
-          <a:xfrm>
-            <a:off x="5581498" y="4169664"/>
-            <a:ext cx="676656" cy="384048"/>
+          <p:cNvPr id="49" name="Text 47"/>
+          <p:cNvSpPr/>
+          <p:nvPr/>
+        </p:nvSpPr>
+        <p:spPr>
+          <a:xfrm>
+            <a:off x="5254752" y="4572000"/>
+            <a:ext cx="685800" cy="219456"/>
+          </a:xfrm>
+          <a:prstGeom prst="rect">
+            <a:avLst/>
+          </a:prstGeom>
+          <a:noFill/>
+          <a:ln/>
+        </p:spPr>
+        <p:txBody>
+          <a:bodyPr wrap="square" lIns="0" tIns="0" rIns="0" bIns="0" rtlCol="0" anchor="t"/>
+          <a:lstStyle/>
+          <a:p>
+            <a:pPr algn="ctr" indent="0" marL="0">
+              <a:buNone/>
+            </a:pPr>
+            <a:r>
+              <a:rPr lang="en-US" sz="750" i="1" dirty="0">
+                <a:solidFill>
+                  <a:srgbClr val="94A3B8"/>
+                </a:solidFill>
+                <a:latin typeface="Calibri" pitchFamily="34" charset="0"/>
+                <a:ea typeface="Calibri" pitchFamily="34" charset="-122"/>
+                <a:cs typeface="Calibri" pitchFamily="34" charset="-120"/>
+              </a:rPr>
+              <a:t>/k/</a:t>
+            </a:r>
+            <a:endParaRPr lang="en-US" sz="750" dirty="0"/>
+          </a:p>
+        </p:txBody>
+      </p:sp>
+      <p:sp>
+        <p:nvSpPr>
+          <p:cNvPr id="50" name="Shape 48"/>
+          <p:cNvSpPr/>
+          <p:nvPr/>
+        </p:nvSpPr>
+        <p:spPr>
+          <a:xfrm>
+            <a:off x="6062472" y="4169664"/>
+            <a:ext cx="685800" cy="384048"/>
           </a:xfrm>
           <a:prstGeom prst="rect">
             <a:avLst>
@@ -35761,14 +34458,14 @@
       </p:sp>
       <p:sp>
         <p:nvSpPr>
-          <p:cNvPr id="50" name="Text 48"/>
-          <p:cNvSpPr/>
-          <p:nvPr/>
-        </p:nvSpPr>
-        <p:spPr>
-          <a:xfrm>
-            <a:off x="5581498" y="4169664"/>
-            <a:ext cx="676656" cy="384048"/>
+          <p:cNvPr id="51" name="Text 49"/>
+          <p:cNvSpPr/>
+          <p:nvPr/>
+        </p:nvSpPr>
+        <p:spPr>
+          <a:xfrm>
+            <a:off x="6062472" y="4169664"/>
+            <a:ext cx="685800" cy="384048"/>
           </a:xfrm>
           <a:prstGeom prst="rect">
             <a:avLst/>
@@ -35792,7 +34489,7 @@
                 <a:ea typeface="Trebuchet MS" pitchFamily="34" charset="-122"/>
                 <a:cs typeface="Trebuchet MS" pitchFamily="34" charset="-120"/>
               </a:rPr>
-              <a:t>c</a:t>
+              <a:t>t</a:t>
             </a:r>
             <a:endParaRPr lang="en-US" sz="900" dirty="0"/>
           </a:p>
@@ -35800,53 +34497,14 @@
       </p:sp>
       <p:sp>
         <p:nvSpPr>
-          <p:cNvPr id="51" name="Text 49"/>
-          <p:cNvSpPr/>
-          <p:nvPr/>
-        </p:nvSpPr>
-        <p:spPr>
-          <a:xfrm>
-            <a:off x="5581498" y="4572000"/>
-            <a:ext cx="676656" cy="219456"/>
-          </a:xfrm>
-          <a:prstGeom prst="rect">
-            <a:avLst/>
-          </a:prstGeom>
-          <a:noFill/>
-          <a:ln/>
-        </p:spPr>
-        <p:txBody>
-          <a:bodyPr wrap="square" lIns="0" tIns="0" rIns="0" bIns="0" rtlCol="0" anchor="t"/>
-          <a:lstStyle/>
-          <a:p>
-            <a:pPr algn="ctr" indent="0" marL="0">
-              <a:buNone/>
-            </a:pPr>
-            <a:r>
-              <a:rPr lang="en-US" sz="750" i="1" dirty="0">
-                <a:solidFill>
-                  <a:srgbClr val="94A3B8"/>
-                </a:solidFill>
-                <a:latin typeface="Calibri" pitchFamily="34" charset="0"/>
-                <a:ea typeface="Calibri" pitchFamily="34" charset="-122"/>
-                <a:cs typeface="Calibri" pitchFamily="34" charset="-120"/>
-              </a:rPr>
-              <a:t>/k/</a:t>
-            </a:r>
-            <a:endParaRPr lang="en-US" sz="750" dirty="0"/>
-          </a:p>
-        </p:txBody>
-      </p:sp>
-      <p:sp>
-        <p:nvSpPr>
           <p:cNvPr id="52" name="Shape 50"/>
           <p:cNvSpPr/>
           <p:nvPr/>
         </p:nvSpPr>
         <p:spPr>
           <a:xfrm>
-            <a:off x="6307531" y="4169664"/>
-            <a:ext cx="676656" cy="384048"/>
+            <a:off x="6870192" y="4169664"/>
+            <a:ext cx="685800" cy="384048"/>
           </a:xfrm>
           <a:prstGeom prst="rect">
             <a:avLst>
@@ -35872,8 +34530,8 @@
         </p:nvSpPr>
         <p:spPr>
           <a:xfrm>
-            <a:off x="6307531" y="4169664"/>
-            <a:ext cx="676656" cy="384048"/>
+            <a:off x="6870192" y="4169664"/>
+            <a:ext cx="685800" cy="384048"/>
           </a:xfrm>
           <a:prstGeom prst="rect">
             <a:avLst/>
@@ -35897,7 +34555,7 @@
                 <a:ea typeface="Trebuchet MS" pitchFamily="34" charset="-122"/>
                 <a:cs typeface="Trebuchet MS" pitchFamily="34" charset="-120"/>
               </a:rPr>
-              <a:t>t</a:t>
+              <a:t>e</a:t>
             </a:r>
             <a:endParaRPr lang="en-US" sz="900" dirty="0"/>
           </a:p>
@@ -35911,8 +34569,8 @@
         </p:nvSpPr>
         <p:spPr>
           <a:xfrm>
-            <a:off x="7033565" y="4169664"/>
-            <a:ext cx="676656" cy="384048"/>
+            <a:off x="7677912" y="4169664"/>
+            <a:ext cx="685800" cy="384048"/>
           </a:xfrm>
           <a:prstGeom prst="rect">
             <a:avLst>
@@ -35938,8 +34596,8 @@
         </p:nvSpPr>
         <p:spPr>
           <a:xfrm>
-            <a:off x="7033565" y="4169664"/>
-            <a:ext cx="676656" cy="384048"/>
+            <a:off x="7677912" y="4169664"/>
+            <a:ext cx="685800" cy="384048"/>
           </a:xfrm>
           <a:prstGeom prst="rect">
             <a:avLst/>
@@ -35963,73 +34621,7 @@
                 <a:ea typeface="Trebuchet MS" pitchFamily="34" charset="-122"/>
                 <a:cs typeface="Trebuchet MS" pitchFamily="34" charset="-120"/>
               </a:rPr>
-              <a:t>i</a:t>
-            </a:r>
-            <a:endParaRPr lang="en-US" sz="900" dirty="0"/>
-          </a:p>
-        </p:txBody>
-      </p:sp>
-      <p:sp>
-        <p:nvSpPr>
-          <p:cNvPr id="56" name="Shape 54"/>
-          <p:cNvSpPr/>
-          <p:nvPr/>
-        </p:nvSpPr>
-        <p:spPr>
-          <a:xfrm>
-            <a:off x="7759598" y="4169664"/>
-            <a:ext cx="676656" cy="384048"/>
-          </a:xfrm>
-          <a:prstGeom prst="rect">
-            <a:avLst>
-              <a:gd name="adj" fmla="val 9524"/>
-            </a:avLst>
-          </a:prstGeom>
-          <a:solidFill>
-            <a:srgbClr val="FFFFFF"/>
-          </a:solidFill>
-          <a:ln w="12700">
-            <a:solidFill>
-              <a:srgbClr val="DB2777"/>
-            </a:solidFill>
-            <a:prstDash val="solid"/>
-          </a:ln>
-        </p:spPr>
-      </p:sp>
-      <p:sp>
-        <p:nvSpPr>
-          <p:cNvPr id="57" name="Text 55"/>
-          <p:cNvSpPr/>
-          <p:nvPr/>
-        </p:nvSpPr>
-        <p:spPr>
-          <a:xfrm>
-            <a:off x="7759598" y="4169664"/>
-            <a:ext cx="676656" cy="384048"/>
-          </a:xfrm>
-          <a:prstGeom prst="rect">
-            <a:avLst/>
-          </a:prstGeom>
-          <a:noFill/>
-          <a:ln/>
-        </p:spPr>
-        <p:txBody>
-          <a:bodyPr wrap="square" lIns="0" tIns="0" rIns="0" bIns="0" rtlCol="0" anchor="ctr"/>
-          <a:lstStyle/>
-          <a:p>
-            <a:pPr algn="ctr" indent="0" marL="0">
-              <a:buNone/>
-            </a:pPr>
-            <a:r>
-              <a:rPr lang="en-US" sz="900" b="1" dirty="0">
-                <a:solidFill>
-                  <a:srgbClr val="9D174D"/>
-                </a:solidFill>
-                <a:latin typeface="Trebuchet MS" pitchFamily="34" charset="0"/>
-                <a:ea typeface="Trebuchet MS" pitchFamily="34" charset="-122"/>
-                <a:cs typeface="Trebuchet MS" pitchFamily="34" charset="-120"/>
-              </a:rPr>
-              <a:t>ve</a:t>
+              <a:t>d</a:t>
             </a:r>
             <a:endParaRPr lang="en-US" sz="900" dirty="0"/>
           </a:p>
@@ -38136,7 +36728,7 @@
                 <a:ea typeface="Trebuchet MS" pitchFamily="34" charset="-122"/>
                 <a:cs typeface="Trebuchet MS" pitchFamily="34" charset="-120"/>
               </a:rPr>
-              <a:t>non-</a:t>
+              <a:t>de-</a:t>
             </a:r>
             <a:endParaRPr lang="en-US" sz="1300" dirty="0"/>
           </a:p>
@@ -38289,7 +36881,7 @@
                 <a:ea typeface="Trebuchet MS" pitchFamily="34" charset="-122"/>
                 <a:cs typeface="Trebuchet MS" pitchFamily="34" charset="-120"/>
               </a:rPr>
-              <a:t>self-</a:t>
+              <a:t>in-</a:t>
             </a:r>
             <a:endParaRPr lang="en-US" sz="1300" dirty="0"/>
           </a:p>
@@ -38378,7 +36970,7 @@
                 <a:ea typeface="Trebuchet MS" pitchFamily="34" charset="-122"/>
                 <a:cs typeface="Trebuchet MS" pitchFamily="34" charset="-120"/>
               </a:rPr>
-              <a:t>-ed</a:t>
+              <a:t>-ing</a:t>
             </a:r>
             <a:endParaRPr lang="en-US" sz="1300" dirty="0"/>
           </a:p>
@@ -38442,7 +37034,7 @@
                 <a:ea typeface="Trebuchet MS" pitchFamily="34" charset="-122"/>
                 <a:cs typeface="Trebuchet MS" pitchFamily="34" charset="-120"/>
               </a:rPr>
-              <a:t>un-</a:t>
+              <a:t>pre-</a:t>
             </a:r>
             <a:endParaRPr lang="en-US" sz="1300" dirty="0"/>
           </a:p>
@@ -38531,7 +37123,7 @@
                 <a:ea typeface="Trebuchet MS" pitchFamily="34" charset="-122"/>
                 <a:cs typeface="Trebuchet MS" pitchFamily="34" charset="-120"/>
               </a:rPr>
-              <a:t>-ing</a:t>
+              <a:t>-ed</a:t>
             </a:r>
             <a:endParaRPr lang="en-US" sz="1300" dirty="0"/>
           </a:p>
@@ -38900,7 +37492,7 @@
                 <a:ea typeface="Trebuchet MS" pitchFamily="34" charset="-122"/>
                 <a:cs typeface="Trebuchet MS" pitchFamily="34" charset="-120"/>
               </a:rPr>
-              <a:t>reflected</a:t>
+              <a:t>reflecting</a:t>
             </a:r>
             <a:endParaRPr lang="en-US" sz="1200" dirty="0"/>
           </a:p>
@@ -38966,7 +37558,7 @@
                 <a:ea typeface="Trebuchet MS" pitchFamily="34" charset="-122"/>
                 <a:cs typeface="Trebuchet MS" pitchFamily="34" charset="-120"/>
               </a:rPr>
-              <a:t>reflecting</a:t>
+              <a:t>reflected</a:t>
             </a:r>
             <a:endParaRPr lang="en-US" sz="1200" dirty="0"/>
           </a:p>
@@ -39032,7 +37624,7 @@
                 <a:ea typeface="Trebuchet MS" pitchFamily="34" charset="-122"/>
                 <a:cs typeface="Trebuchet MS" pitchFamily="34" charset="-120"/>
               </a:rPr>
-              <a:t>self-reflection</a:t>
+              <a:t>reflections</a:t>
             </a:r>
             <a:endParaRPr lang="en-US" sz="1200" dirty="0"/>
           </a:p>
@@ -39098,7 +37690,7 @@
                 <a:ea typeface="Trebuchet MS" pitchFamily="34" charset="-122"/>
                 <a:cs typeface="Trebuchet MS" pitchFamily="34" charset="-120"/>
               </a:rPr>
-              <a:t>unreflective</a:t>
+              <a:t>self-reflection</a:t>
             </a:r>
             <a:endParaRPr lang="en-US" sz="1200" dirty="0"/>
           </a:p>
@@ -40286,7 +38878,7 @@
                 <a:ea typeface="Calibri" pitchFamily="34" charset="-122"/>
                 <a:cs typeface="Calibri" pitchFamily="34" charset="-120"/>
               </a:rPr>
-              <a:t>1.  The root 'reflect' comes from Latin and means to bend or throw back.</a:t>
+              <a:t>1.  The word 'reflection' means to look forward to something in the future.</a:t>
             </a:r>
             <a:endParaRPr lang="en-US" sz="1300" dirty="0"/>
           </a:p>
@@ -40309,11 +38901,11 @@
             </a:avLst>
           </a:prstGeom>
           <a:solidFill>
-            <a:srgbClr val="DCFCE7"/>
-          </a:solidFill>
-          <a:ln w="12700">
-            <a:solidFill>
-              <a:srgbClr val="16A34A"/>
+            <a:srgbClr val="FEE2E2"/>
+          </a:solidFill>
+          <a:ln w="12700">
+            <a:solidFill>
+              <a:srgbClr val="DC2626"/>
             </a:solidFill>
             <a:prstDash val="solid"/>
           </a:ln>
@@ -40346,13 +38938,13 @@
             <a:r>
               <a:rPr lang="en-US" sz="1100" b="1" dirty="0">
                 <a:solidFill>
-                  <a:srgbClr val="16A34A"/>
+                  <a:srgbClr val="DC2626"/>
                 </a:solidFill>
                 <a:latin typeface="Trebuchet MS" pitchFamily="34" charset="0"/>
                 <a:ea typeface="Trebuchet MS" pitchFamily="34" charset="-122"/>
                 <a:cs typeface="Trebuchet MS" pitchFamily="34" charset="-120"/>
               </a:rPr>
-              <a:t>TRUE</a:t>
+              <a:t>FALSE</a:t>
             </a:r>
             <a:endParaRPr lang="en-US" sz="1100" dirty="0"/>
           </a:p>
@@ -40425,7 +39017,7 @@
                 <a:ea typeface="Calibri" pitchFamily="34" charset="-122"/>
                 <a:cs typeface="Calibri" pitchFamily="34" charset="-120"/>
               </a:rPr>
-              <a:t>2.  A reflector absorbs all light that hits it.</a:t>
+              <a:t>2.  The word 'reflective' contains the root 'reflect'.</a:t>
             </a:r>
             <a:endParaRPr lang="en-US" sz="1300" dirty="0"/>
           </a:p>
@@ -40448,11 +39040,11 @@
             </a:avLst>
           </a:prstGeom>
           <a:solidFill>
-            <a:srgbClr val="FEE2E2"/>
-          </a:solidFill>
-          <a:ln w="12700">
-            <a:solidFill>
-              <a:srgbClr val="DC2626"/>
+            <a:srgbClr val="DCFCE7"/>
+          </a:solidFill>
+          <a:ln w="12700">
+            <a:solidFill>
+              <a:srgbClr val="16A34A"/>
             </a:solidFill>
             <a:prstDash val="solid"/>
           </a:ln>
@@ -40485,13 +39077,13 @@
             <a:r>
               <a:rPr lang="en-US" sz="1100" b="1" dirty="0">
                 <a:solidFill>
-                  <a:srgbClr val="DC2626"/>
+                  <a:srgbClr val="16A34A"/>
                 </a:solidFill>
                 <a:latin typeface="Trebuchet MS" pitchFamily="34" charset="0"/>
                 <a:ea typeface="Trebuchet MS" pitchFamily="34" charset="-122"/>
                 <a:cs typeface="Trebuchet MS" pitchFamily="34" charset="-120"/>
               </a:rPr>
-              <a:t>FALSE</a:t>
+              <a:t>TRUE</a:t>
             </a:r>
             <a:endParaRPr lang="en-US" sz="1100" dirty="0"/>
           </a:p>
@@ -40564,7 +39156,7 @@
                 <a:ea typeface="Calibri" pitchFamily="34" charset="-122"/>
                 <a:cs typeface="Calibri" pitchFamily="34" charset="-120"/>
               </a:rPr>
-              <a:t>3.  The word 'reflection' contains the root 'reflect' plus the suffix '-ion'.</a:t>
+              <a:t>3.  The root 'reflect' comes from Ancient Greek.</a:t>
             </a:r>
             <a:endParaRPr lang="en-US" sz="1300" dirty="0"/>
           </a:p>
@@ -40587,11 +39179,11 @@
             </a:avLst>
           </a:prstGeom>
           <a:solidFill>
-            <a:srgbClr val="DCFCE7"/>
-          </a:solidFill>
-          <a:ln w="12700">
-            <a:solidFill>
-              <a:srgbClr val="16A34A"/>
+            <a:srgbClr val="FEE2E2"/>
+          </a:solidFill>
+          <a:ln w="12700">
+            <a:solidFill>
+              <a:srgbClr val="DC2626"/>
             </a:solidFill>
             <a:prstDash val="solid"/>
           </a:ln>
@@ -40624,13 +39216,13 @@
             <a:r>
               <a:rPr lang="en-US" sz="1100" b="1" dirty="0">
                 <a:solidFill>
-                  <a:srgbClr val="16A34A"/>
+                  <a:srgbClr val="DC2626"/>
                 </a:solidFill>
                 <a:latin typeface="Trebuchet MS" pitchFamily="34" charset="0"/>
                 <a:ea typeface="Trebuchet MS" pitchFamily="34" charset="-122"/>
                 <a:cs typeface="Trebuchet MS" pitchFamily="34" charset="-120"/>
               </a:rPr>
-              <a:t>TRUE</a:t>
+              <a:t>FALSE</a:t>
             </a:r>
             <a:endParaRPr lang="en-US" sz="1100" dirty="0"/>
           </a:p>
@@ -40703,7 +39295,7 @@
                 <a:ea typeface="Calibri" pitchFamily="34" charset="-122"/>
                 <a:cs typeface="Calibri" pitchFamily="34" charset="-120"/>
               </a:rPr>
-              <a:t>4.  Self-reflection means thinking carefully about your own actions and feelings.</a:t>
+              <a:t>4.  A reflector on a bicycle bounces light back so drivers can see it.</a:t>
             </a:r>
             <a:endParaRPr lang="en-US" sz="1300" dirty="0"/>
           </a:p>
@@ -40842,7 +39434,7 @@
                 <a:ea typeface="Calibri" pitchFamily="34" charset="-122"/>
                 <a:cs typeface="Calibri" pitchFamily="34" charset="-120"/>
               </a:rPr>
-              <a:t>5.  The suffix '-ive' in 'reflective' means 'without'.</a:t>
+              <a:t>5.  Self-reflection means thinking carefully about your own actions and feelings.</a:t>
             </a:r>
             <a:endParaRPr lang="en-US" sz="1300" dirty="0"/>
           </a:p>
@@ -40865,11 +39457,11 @@
             </a:avLst>
           </a:prstGeom>
           <a:solidFill>
-            <a:srgbClr val="FEE2E2"/>
-          </a:solidFill>
-          <a:ln w="12700">
-            <a:solidFill>
-              <a:srgbClr val="DC2626"/>
+            <a:srgbClr val="DCFCE7"/>
+          </a:solidFill>
+          <a:ln w="12700">
+            <a:solidFill>
+              <a:srgbClr val="16A34A"/>
             </a:solidFill>
             <a:prstDash val="solid"/>
           </a:ln>
@@ -40902,13 +39494,13 @@
             <a:r>
               <a:rPr lang="en-US" sz="1100" b="1" dirty="0">
                 <a:solidFill>
-                  <a:srgbClr val="DC2626"/>
+                  <a:srgbClr val="16A34A"/>
                 </a:solidFill>
                 <a:latin typeface="Trebuchet MS" pitchFamily="34" charset="0"/>
                 <a:ea typeface="Trebuchet MS" pitchFamily="34" charset="-122"/>
                 <a:cs typeface="Trebuchet MS" pitchFamily="34" charset="-120"/>
               </a:rPr>
-              <a:t>FALSE</a:t>
+              <a:t>TRUE</a:t>
             </a:r>
             <a:endParaRPr lang="en-US" sz="1100" dirty="0"/>
           </a:p>
@@ -41745,7 +40337,7 @@
                 <a:ea typeface="Trebuchet MS" pitchFamily="34" charset="-122"/>
                 <a:cs typeface="Trebuchet MS" pitchFamily="34" charset="-120"/>
               </a:rPr>
-              <a:t>reflected</a:t>
+              <a:t>reflecting</a:t>
             </a:r>
             <a:endParaRPr lang="en-US" sz="1300" dirty="0"/>
           </a:p>
@@ -41811,7 +40403,7 @@
                 <a:ea typeface="Trebuchet MS" pitchFamily="34" charset="-122"/>
                 <a:cs typeface="Trebuchet MS" pitchFamily="34" charset="-120"/>
               </a:rPr>
-              <a:t>reflecting</a:t>
+              <a:t>reflected</a:t>
             </a:r>
             <a:endParaRPr lang="en-US" sz="1300" dirty="0"/>
           </a:p>
@@ -41877,7 +40469,7 @@
                 <a:ea typeface="Trebuchet MS" pitchFamily="34" charset="-122"/>
                 <a:cs typeface="Trebuchet MS" pitchFamily="34" charset="-120"/>
               </a:rPr>
-              <a:t>self-reflection</a:t>
+              <a:t>reflections</a:t>
             </a:r>
             <a:endParaRPr lang="en-US" sz="1300" dirty="0"/>
           </a:p>
@@ -42815,7 +41407,7 @@
                 <a:ea typeface="Trebuchet MS" pitchFamily="34" charset="-122"/>
                 <a:cs typeface="Trebuchet MS" pitchFamily="34" charset="-120"/>
               </a:rPr>
-              <a:t>non-</a:t>
+              <a:t>de-</a:t>
             </a:r>
             <a:endParaRPr lang="en-US" sz="1300" dirty="0"/>
           </a:p>
@@ -42968,7 +41560,7 @@
                 <a:ea typeface="Trebuchet MS" pitchFamily="34" charset="-122"/>
                 <a:cs typeface="Trebuchet MS" pitchFamily="34" charset="-120"/>
               </a:rPr>
-              <a:t>self-</a:t>
+              <a:t>in-</a:t>
             </a:r>
             <a:endParaRPr lang="en-US" sz="1300" dirty="0"/>
           </a:p>
@@ -43057,7 +41649,7 @@
                 <a:ea typeface="Trebuchet MS" pitchFamily="34" charset="-122"/>
                 <a:cs typeface="Trebuchet MS" pitchFamily="34" charset="-120"/>
               </a:rPr>
-              <a:t>-ed</a:t>
+              <a:t>-ing</a:t>
             </a:r>
             <a:endParaRPr lang="en-US" sz="1300" dirty="0"/>
           </a:p>
@@ -43121,7 +41713,7 @@
                 <a:ea typeface="Trebuchet MS" pitchFamily="34" charset="-122"/>
                 <a:cs typeface="Trebuchet MS" pitchFamily="34" charset="-120"/>
               </a:rPr>
-              <a:t>un-</a:t>
+              <a:t>pre-</a:t>
             </a:r>
             <a:endParaRPr lang="en-US" sz="1300" dirty="0"/>
           </a:p>
@@ -43210,7 +41802,7 @@
                 <a:ea typeface="Trebuchet MS" pitchFamily="34" charset="-122"/>
                 <a:cs typeface="Trebuchet MS" pitchFamily="34" charset="-120"/>
               </a:rPr>
-              <a:t>-ing</a:t>
+              <a:t>-ed</a:t>
             </a:r>
             <a:endParaRPr lang="en-US" sz="1300" dirty="0"/>
           </a:p>
@@ -44121,7 +42713,7 @@
                 <a:ea typeface="Calibri" pitchFamily="34" charset="-122"/>
                 <a:cs typeface="Calibri" pitchFamily="34" charset="-120"/>
               </a:rPr>
-              <a:t>When light or an image has been bounced back from a surface.</a:t>
+              <a:t>Currently throwing back light, or thinking carefully about something right now.</a:t>
             </a:r>
             <a:endParaRPr lang="en-US" sz="1200" dirty="0"/>
           </a:p>
@@ -44260,7 +42852,7 @@
                 <a:ea typeface="Calibri" pitchFamily="34" charset="-122"/>
                 <a:cs typeface="Calibri" pitchFamily="34" charset="-120"/>
               </a:rPr>
-              <a:t>An object or surface that bounces light back, like the red disc on the back of a bike.</a:t>
+              <a:t>A surface or object that bounces light back, like the red part on a bicycle.</a:t>
             </a:r>
             <a:endParaRPr lang="en-US" sz="1200" dirty="0"/>
           </a:p>
@@ -44399,7 +42991,7 @@
                 <a:ea typeface="Calibri" pitchFamily="34" charset="-122"/>
                 <a:cs typeface="Calibri" pitchFamily="34" charset="-120"/>
               </a:rPr>
-              <a:t>Something that bounces back light, or describing a person who thinks deeply.</a:t>
+              <a:t>Able to bounce back light, or describing someone who thinks deeply.</a:t>
             </a:r>
             <a:endParaRPr lang="en-US" sz="1200" dirty="0"/>
           </a:p>
@@ -44538,7 +43130,7 @@
                 <a:ea typeface="Calibri" pitchFamily="34" charset="-122"/>
                 <a:cs typeface="Calibri" pitchFamily="34" charset="-120"/>
               </a:rPr>
-              <a:t>The act of thinking carefully about your own thoughts, feelings and actions.</a:t>
+              <a:t>More than one image seen in a mirror or water, or several thoughts about a topic.</a:t>
             </a:r>
             <a:endParaRPr lang="en-US" sz="1200" dirty="0"/>
           </a:p>
@@ -44611,7 +43203,7 @@
                 <a:ea typeface="Trebuchet MS" pitchFamily="34" charset="-122"/>
                 <a:cs typeface="Trebuchet MS" pitchFamily="34" charset="-120"/>
               </a:rPr>
-              <a:t>reflected</a:t>
+              <a:t>reflecting</a:t>
             </a:r>
             <a:endParaRPr lang="en-US" sz="1200" dirty="0"/>
           </a:p>
@@ -44677,7 +43269,7 @@
                 <a:ea typeface="Calibri" pitchFamily="34" charset="-122"/>
                 <a:cs typeface="Calibri" pitchFamily="34" charset="-120"/>
               </a:rPr>
-              <a:t>To throw back light or sound, or to think carefully about something.</a:t>
+              <a:t>To throw back light, or to think carefully about something.</a:t>
             </a:r>
             <a:endParaRPr lang="en-US" sz="1200" dirty="0"/>
           </a:p>
@@ -44750,7 +43342,7 @@
                 <a:ea typeface="Trebuchet MS" pitchFamily="34" charset="-122"/>
                 <a:cs typeface="Trebuchet MS" pitchFamily="34" charset="-120"/>
               </a:rPr>
-              <a:t>reflecting</a:t>
+              <a:t>reflected</a:t>
             </a:r>
             <a:endParaRPr lang="en-US" sz="1200" dirty="0"/>
           </a:p>
@@ -44816,7 +43408,7 @@
                 <a:ea typeface="Calibri" pitchFamily="34" charset="-122"/>
                 <a:cs typeface="Calibri" pitchFamily="34" charset="-120"/>
               </a:rPr>
-              <a:t>Currently bouncing back light, or in the process of thinking carefully.</a:t>
+              <a:t>When light was already bounced back, or when someone already thought about something.</a:t>
             </a:r>
             <a:endParaRPr lang="en-US" sz="1200" dirty="0"/>
           </a:p>
@@ -44889,7 +43481,7 @@
                 <a:ea typeface="Trebuchet MS" pitchFamily="34" charset="-122"/>
                 <a:cs typeface="Trebuchet MS" pitchFamily="34" charset="-120"/>
               </a:rPr>
-              <a:t>self-reflection</a:t>
+              <a:t>reflections</a:t>
             </a:r>
             <a:endParaRPr lang="en-US" sz="1200" dirty="0"/>
           </a:p>
@@ -44955,7 +43547,7 @@
                 <a:ea typeface="Calibri" pitchFamily="34" charset="-122"/>
                 <a:cs typeface="Calibri" pitchFamily="34" charset="-120"/>
               </a:rPr>
-              <a:t>The image you see in a mirror, or a careful thought about something.</a:t>
+              <a:t>The image you see in a mirror, or a thought about something that happened.</a:t>
             </a:r>
             <a:endParaRPr lang="en-US" sz="1200" dirty="0"/>
           </a:p>
@@ -45614,7 +44206,7 @@
                 <a:ea typeface="Calibri" pitchFamily="34" charset="-122"/>
                 <a:cs typeface="Calibri" pitchFamily="34" charset="-120"/>
               </a:rPr>
-              <a:t>After the argument, Sam took some time to reflect on how his words might have hurt his friend.</a:t>
+              <a:t>After the argument, Maya took time to reflect on how her words might have hurt her friend.</a:t>
             </a:r>
             <a:endParaRPr lang="en-US" sz="1500" dirty="0"/>
           </a:p>
@@ -45778,7 +44370,7 @@
                 <a:ea typeface="Calibri" pitchFamily="34" charset="-122"/>
                 <a:cs typeface="Calibri" pitchFamily="34" charset="-120"/>
               </a:rPr>
-              <a:t>The cyclists wore reflective vests so that car drivers could see them easily in the dark.</a:t>
+              <a:t>The reflective strips on his school bag helped drivers see him clearly in the dark.</a:t>
             </a:r>
             <a:endParaRPr lang="en-US" sz="1500" dirty="0"/>
           </a:p>
